--- a/docs/presentation/Маршрут_итоговая_защита.pptx
+++ b/docs/presentation/Маршрут_итоговая_защита.pptx
@@ -122,27 +122,27 @@
   <p:extLst>
     <p:ext uri="{521415D9-36F7-43E2-AB2F-B90AF26B5E84}">
       <p14:sectionLst xmlns:p14="http://schemas.microsoft.com/office/powerpoint/2010/main">
-        <p14:section name="Введение" id="{e6d8d68c-5412-cb75-0168-f13953dd7cea}">
+        <p14:section name="Введение" id="{9fc5e7ce-e98d-e7e0-50c5-6edcd512cf54}">
           <p14:sldIdLst>
             <p14:sldId id="256"/>
             <p14:sldId id="257"/>
             <p14:sldId id="258"/>
           </p14:sldIdLst>
         </p14:section>
-        <p14:section name="Решение" id="{0137e65d-a80c-16bf-9cff-c82d83e13a31}">
+        <p14:section name="Решение" id="{0455f2eb-0d9c-7cff-4ec6-ce117aa38df9}">
           <p14:sldIdLst>
             <p14:sldId id="259"/>
             <p14:sldId id="260"/>
             <p14:sldId id="261"/>
           </p14:sldIdLst>
         </p14:section>
-        <p14:section name="1 семестр" id="{fc125068-d6ee-7a5f-82f4-b8f03d992bab}">
+        <p14:section name="1 семестр" id="{f0339942-242b-2d56-a9a9-f5d5c25f2647}">
           <p14:sldIdLst>
             <p14:sldId id="262"/>
             <p14:sldId id="263"/>
           </p14:sldIdLst>
         </p14:section>
-        <p14:section name="2 семестр" id="{9a4d81bc-ee54-829b-b2af-6f11d0aa98a0}">
+        <p14:section name="2 семестр" id="{fe592fb3-cc7b-2b9c-d2c5-c31185ec3dda}">
           <p14:sldIdLst>
             <p14:sldId id="264"/>
             <p14:sldId id="265"/>
@@ -153,7 +153,7 @@
             <p14:sldId id="270"/>
           </p14:sldIdLst>
         </p14:section>
-        <p14:section name="Итоги" id="{92af85f5-d0a8-feea-7c9b-5dadc2f587fb}">
+        <p14:section name="Итоги" id="{5a2c4a9c-026e-d340-7fd0-accef57c05c9}">
           <p14:sldIdLst>
             <p14:sldId id="271"/>
           </p14:sldIdLst>
@@ -2781,6 +2781,78 @@
         </p:nvSpPr>
         <p:spPr>
           <a:xfrm>
+            <a:off x="1783080" y="640080"/>
+            <a:ext cx="5303520" cy="914400"/>
+          </a:xfrm>
+          <a:prstGeom prst="rect">
+            <a:avLst/>
+          </a:prstGeom>
+          <a:noFill/>
+          <a:ln/>
+        </p:spPr>
+        <p:txBody>
+          <a:bodyPr wrap="square" lIns="0" tIns="0" rIns="0" bIns="0" rtlCol="0" anchor="ctr"/>
+          <a:lstStyle/>
+          <a:p>
+            <a:pPr indent="0" marL="0">
+              <a:buNone/>
+            </a:pPr>
+            <a:r>
+              <a:rPr lang="en-US" sz="1800" b="1" dirty="0">
+                <a:solidFill>
+                  <a:schemeClr val="bg1"/>
+                </a:solidFill>
+              </a:rPr>
+              <a:t>Колледж Astana IT University</a:t>
+            </a:r>
+            <a:endParaRPr lang="en-US" sz="1800" dirty="0"/>
+          </a:p>
+        </p:txBody>
+      </p:sp>
+      <p:sp>
+        <p:nvSpPr>
+          <p:cNvPr id="4" name="Text 1"/>
+          <p:cNvSpPr txBox="1"/>
+          <p:nvPr/>
+        </p:nvSpPr>
+        <p:spPr>
+          <a:xfrm>
+            <a:off x="640080" y="6035040"/>
+            <a:ext cx="6766560" cy="320040"/>
+          </a:xfrm>
+          <a:prstGeom prst="rect">
+            <a:avLst/>
+          </a:prstGeom>
+          <a:noFill/>
+          <a:ln/>
+        </p:spPr>
+        <p:txBody>
+          <a:bodyPr wrap="square" lIns="0" tIns="0" rIns="0" bIns="0" rtlCol="0" anchor="t"/>
+          <a:lstStyle/>
+          <a:p>
+            <a:pPr indent="0" marL="0">
+              <a:buNone/>
+            </a:pPr>
+            <a:r>
+              <a:rPr lang="en-US" sz="1400" dirty="0">
+                <a:solidFill>
+                  <a:schemeClr val="accent5"/>
+                </a:solidFill>
+              </a:rPr>
+              <a:t>Астана 2026</a:t>
+            </a:r>
+            <a:endParaRPr lang="en-US" sz="1400" dirty="0"/>
+          </a:p>
+        </p:txBody>
+      </p:sp>
+      <p:sp>
+        <p:nvSpPr>
+          <p:cNvPr id="5" name="Text 2"/>
+          <p:cNvSpPr txBox="1"/>
+          <p:nvPr/>
+        </p:nvSpPr>
+        <p:spPr>
+          <a:xfrm>
             <a:off x="640080" y="1828800"/>
             <a:ext cx="6766560" cy="365760"/>
           </a:xfrm>
@@ -2811,7 +2883,7 @@
       </p:sp>
       <p:sp>
         <p:nvSpPr>
-          <p:cNvPr id="4" name="Text 1"/>
+          <p:cNvPr id="6" name="Text 3"/>
           <p:cNvSpPr txBox="1"/>
           <p:nvPr/>
         </p:nvSpPr>
@@ -2850,7 +2922,7 @@
       </p:sp>
       <p:sp>
         <p:nvSpPr>
-          <p:cNvPr id="5" name="Text 2"/>
+          <p:cNvPr id="7" name="Text 4"/>
           <p:cNvSpPr txBox="1"/>
           <p:nvPr/>
         </p:nvSpPr>
@@ -2886,7 +2958,7 @@
       </p:sp>
       <p:sp>
         <p:nvSpPr>
-          <p:cNvPr id="6" name="Text 3"/>
+          <p:cNvPr id="8" name="Text 5"/>
           <p:cNvSpPr txBox="1"/>
           <p:nvPr/>
         </p:nvSpPr>
@@ -2922,7 +2994,7 @@
       </p:sp>
       <p:sp>
         <p:nvSpPr>
-          <p:cNvPr id="7" name="Text 4"/>
+          <p:cNvPr id="9" name="Text 6"/>
           <p:cNvSpPr txBox="1"/>
           <p:nvPr/>
         </p:nvSpPr>
@@ -3006,7 +3078,7 @@
       </p:sp>
       <p:pic>
         <p:nvPicPr>
-          <p:cNvPr id="8" name="Скриншот 05_home" descr="05_home">    </p:cNvPr>
+          <p:cNvPr id="10" name="Скриншот 05_home" descr="05_home">    </p:cNvPr>
           <p:cNvPicPr>
             <a:picLocks noChangeAspect="1"/>
           </p:cNvPicPr>
@@ -3030,7 +3102,7 @@
       </p:pic>
       <p:pic>
         <p:nvPicPr>
-          <p:cNvPr id="9" name="Скриншот 19_preview" descr="19_preview">    </p:cNvPr>
+          <p:cNvPr id="11" name="Скриншот 19_preview" descr="19_preview">    </p:cNvPr>
           <p:cNvPicPr>
             <a:picLocks noChangeAspect="1"/>
           </p:cNvPicPr>

--- a/docs/presentation/Маршрут_итоговая_защита.pptx
+++ b/docs/presentation/Маршрут_итоговая_защита.pptx
@@ -21,9 +21,10 @@
     <p:sldId id="269" r:id="rId15"/>
     <p:sldId id="270" r:id="rId16"/>
     <p:sldId id="271" r:id="rId17"/>
+    <p:sldId id="272" r:id="rId18"/>
   </p:sldIdLst>
   <p:notesMasterIdLst>
-    <p:notesMasterId r:id="rId18"/>
+    <p:notesMasterId r:id="rId19"/>
   </p:notesMasterIdLst>
   <p:sldSz cx="12192000" cy="6858000"/>
   <p:notesSz cx="6858000" cy="12192000"/>
@@ -122,27 +123,27 @@
   <p:extLst>
     <p:ext uri="{521415D9-36F7-43E2-AB2F-B90AF26B5E84}">
       <p14:sectionLst xmlns:p14="http://schemas.microsoft.com/office/powerpoint/2010/main">
-        <p14:section name="Введение" id="{9fc5e7ce-e98d-e7e0-50c5-6edcd512cf54}">
+        <p14:section name="Введение" id="{ff4b0d56-86b7-a640-76cd-2aea603672e1}">
           <p14:sldIdLst>
             <p14:sldId id="256"/>
             <p14:sldId id="257"/>
             <p14:sldId id="258"/>
           </p14:sldIdLst>
         </p14:section>
-        <p14:section name="Решение" id="{0455f2eb-0d9c-7cff-4ec6-ce117aa38df9}">
+        <p14:section name="Решение" id="{76dd9cbb-3624-d653-a194-55c967ff17a0}">
           <p14:sldIdLst>
             <p14:sldId id="259"/>
             <p14:sldId id="260"/>
             <p14:sldId id="261"/>
           </p14:sldIdLst>
         </p14:section>
-        <p14:section name="1 семестр" id="{f0339942-242b-2d56-a9a9-f5d5c25f2647}">
+        <p14:section name="1 семестр" id="{762b0c60-eb79-4649-55ea-8b386466f513}">
           <p14:sldIdLst>
             <p14:sldId id="262"/>
             <p14:sldId id="263"/>
           </p14:sldIdLst>
         </p14:section>
-        <p14:section name="2 семестр" id="{fe592fb3-cc7b-2b9c-d2c5-c31185ec3dda}">
+        <p14:section name="2 семестр" id="{80e34792-de9d-54ca-d717-9df02e52749b}">
           <p14:sldIdLst>
             <p14:sldId id="264"/>
             <p14:sldId id="265"/>
@@ -151,11 +152,12 @@
             <p14:sldId id="268"/>
             <p14:sldId id="269"/>
             <p14:sldId id="270"/>
+            <p14:sldId id="271"/>
           </p14:sldIdLst>
         </p14:section>
-        <p14:section name="Итоги" id="{5a2c4a9c-026e-d340-7fd0-accef57c05c9}">
+        <p14:section name="Итоги" id="{5921cc3f-7f11-5665-9e92-854a14eedf2c}">
           <p14:sldIdLst>
-            <p14:sldId id="271"/>
+            <p14:sldId id="272"/>
           </p14:sldIdLst>
         </p14:section>
       </p14:sectionLst>
@@ -255,9 +257,9 @@
           </c:dLbls>
           <c:cat>
             <c:multiLvlStrRef>
-              <c:f>Sheet1!$A$2:$A$6</c:f>
+              <c:f>Sheet1!$A$2:$A$8</c:f>
               <c:multiLvlStrCache>
-                <c:ptCount val="5"/>
+                <c:ptCount val="7"/>
                 <c:lvl>
                   <c:pt idx="0">
                     <c:v>Алгоритм</c:v>
@@ -266,12 +268,18 @@
                     <c:v>Утилиты и роутер</c:v>
                   </c:pt>
                   <c:pt idx="2">
-                    <c:v>Слой данных</c:v>
+                    <c:v>Сервер API</c:v>
                   </c:pt>
                   <c:pt idx="3">
                     <c:v>Виджет-тесты</c:v>
                   </c:pt>
                   <c:pt idx="4">
+                    <c:v>Репозитории БД</c:v>
+                  </c:pt>
+                  <c:pt idx="5">
+                    <c:v>Клиент API</c:v>
+                  </c:pt>
+                  <c:pt idx="6">
                     <c:v>Интеграционный</c:v>
                   </c:pt>
                 </c:lvl>
@@ -280,10 +288,10 @@
           </c:cat>
           <c:val>
             <c:numRef>
-              <c:f>Sheet1!$B$2:$B$6</c:f>
+              <c:f>Sheet1!$B$2:$B$8</c:f>
               <c:numCache>
                 <c:formatCode>General</c:formatCode>
-                <c:ptCount val="5"/>
+                <c:ptCount val="7"/>
                 <c:pt idx="0">
                   <c:v>32</c:v>
                 </c:pt>
@@ -291,12 +299,18 @@
                   <c:v>29</c:v>
                 </c:pt>
                 <c:pt idx="2">
+                  <c:v>23</c:v>
+                </c:pt>
+                <c:pt idx="3">
+                  <c:v>21</c:v>
+                </c:pt>
+                <c:pt idx="4">
                   <c:v>18</c:v>
                 </c:pt>
-                <c:pt idx="3">
-                  <c:v>18</c:v>
+                <c:pt idx="5">
+                  <c:v>14</c:v>
                 </c:pt>
-                <c:pt idx="4">
+                <c:pt idx="6">
                   <c:v>1</c:v>
                 </c:pt>
               </c:numCache>
@@ -327,7 +341,7 @@
           <c:showBubbleSize val="0"/>
           <c:showLeaderLines val="0"/>
         </c:dLbls>
-        <c:gapWidth val="60"/>
+        <c:gapWidth val="50"/>
         <c:overlap val="0"/>
         <c:axId val="2094734554"/>
         <c:axId val="2094734552"/>
@@ -832,7 +846,7 @@
           <a:p>
             <a:r>
               <a:rPr lang="en-US" dirty="0"/>
-              <a:t>Здравствуйте. Меня зовут Баринов Николай, группа ПО2410. Представляю курсовой проект «Маршрут» — приложение для автоматического формирования персонального плана обучения. Руководитель — Синтиков Еркебулан Канатович. Приложение написано на Flutter и Dart и работает на Android и Windows.</a:t>
+              <a:t>Здравствуйте. Меня зовут Баринов Николай, группа ПО2410. Представляю курсовой проект «Маршрут» — приложение для автоматического формирования персонального плана обучения. Руководитель — Синтиков Еркебулан Канатович. Приложение написано на Flutter и Dart, работает на Android, iPhone и Windows, а данные хранит на собственном сервере API.</a:t>
             </a:r>
             <a:endParaRPr lang="en-US" dirty="0"/>
           </a:p>
@@ -1008,7 +1022,7 @@
           <a:p>
             <a:r>
               <a:rPr lang="en-US" dirty="0"/>
-              <a:t>Данные хранятся локально в SQLite через drift. В базе восемь таблиц: у пользователя есть планы, свои темы, заметки, избранное и история «помидоров»; план состоит из тем и занятий. Все внешние ключи объявлены с каскадным удалением: удаление плана удаляет его занятия, удаление аккаунта — все данные пользователя. Каталог направлений лежит в JSON, поэтому новое направление добавляется без изменения кода. Через интерфейс доступны все операции CRUD над планами, своими темами и заметками, а ошибки, например пустое название или занятый email, выводятся понятными сообщениями.</a:t>
+              <a:t>Данные хранятся в базе SQLite на сервере, работа с базой идёт через drift. Таблиц девять: у пользователя есть планы, свои темы, заметки, избранное, история «помидоров» и токены входа; план состоит из тем и занятий. Все внешние ключи объявлены с каскадным удалением: удаление аккаунта удаляет все данные пользователя и его токены. Приложение к базе напрямую не обращается: у сервера 39 адресов API, и полный CRUD — получение, добавление, изменение и удаление — есть у заметок, своих тем и планов. Сервер отвечает кодами HTTP: 200, 201 и 204 при успехе, 400 при неверных данных, 401 без токена, 404 если запись не найдена или чужая, 500 при сбое. Приложение показывает каждую ошибку понятным сообщением.</a:t>
             </a:r>
             <a:endParaRPr lang="en-US" dirty="0"/>
           </a:p>
@@ -1096,7 +1110,7 @@
           <a:p>
             <a:r>
               <a:rPr lang="en-US" dirty="0"/>
-              <a:t>Профиль показывает данные пользователя и статистику, позволяет изменить имя, email и цвет аватара, сменить пароль и удалить аккаунт — для этого нужно ввести пароль ещё раз. Пароли не хранятся в открытом виде: используется PBKDF2-HMAC-SHA256 со 100 000 итераций и случайной солью. В формате хэша записано число итераций, поэтому его можно увеличить в следующей версии. Старые хэши SHA-256 из первого семестра принимаются один раз и сразу пересчитываются.</a:t>
+              <a:t>Покажу, что данные идут только через API. Сервер запущен на ноутбуке, его окно видно, телефон подключён к той же сети Wi-Fi; адрес сервера вводится на экране входа и проверяется запросом к серверу. Создаю заметку — в журнале сервера появляется строка POST /api/notes с кодом 201. Изменяю её — PUT с кодом 204, удаляю — DELETE с кодом 204. Теперь выключаю сервер и пробую сохранить заметку: приложение показывает красное сообщение «Нет связи с сервером», а данные не меняются. Включаю сервер, повторяю действие — оно сохраняется.</a:t>
             </a:r>
             <a:endParaRPr lang="en-US" dirty="0"/>
           </a:p>
@@ -1184,7 +1198,7 @@
           <a:p>
             <a:r>
               <a:rPr lang="en-US" dirty="0"/>
-              <a:t>Интерфейс построен на Material 3 в фирменных цветах: тёмно-синий — спокойный фон для учёбы, оранжевым выделены кнопки действий и прогресс. Есть светлая и тёмная тема. Вёрстка адаптивная: на широком экране, например в окне Windows, нижняя навигация заменяется боковой панелью, а содержимое не растягивается шире 720 пикселей. Для пустых списков есть подсказки, а удаление всегда требует подтверждения. Все экраны проверены матрицей из 280 снимков в семи вариантах.</a:t>
+              <a:t>Профиль показывает данные пользователя и статистику, позволяет изменить имя, email и цвет аватара, сменить пароль и удалить аккаунт — для этого нужно ввести пароль ещё раз. Пароли не хранятся в открытом виде: используется PBKDF2-HMAC-SHA256 со 100 000 итераций и случайной солью. В формате хэша записано число итераций, поэтому его можно увеличить в следующей версии. После входа сервер выдаёт токен из 32 случайных байт; в базе хранится только его хэш SHA-256, поэтому копия базы не даёт ни паролей, ни действующих токенов. Токен действует 30 дней и удаляется при выходе.</a:t>
             </a:r>
             <a:endParaRPr lang="en-US" dirty="0"/>
           </a:p>
@@ -1272,7 +1286,7 @@
           <a:p>
             <a:r>
               <a:rPr lang="en-US" dirty="0"/>
-              <a:t>Приложение покрыто 97 модульными и виджет-тестами: 32 проверяют алгоритм, 18 — слой данных на базе SQLite в памяти, 18 — экраны и сценарии. Ещё есть интеграционный тест, который проходит весь сценарий в настоящем приложении. В документе 36 тест-кейсов и журнал из 24 найденных и исправленных ошибок. Перед сдачей я проверил матрицу из 280 снимков экранов. GitHub Actions на каждое изменение проверяет форматирование, запускает анализатор, все тесты, интеграционный тест и собирает APK и версию для Windows.</a:t>
+              <a:t>Интерфейс построен на Material 3 в фирменных цветах: тёмно-синий — спокойный фон для учёбы, оранжевым выделены кнопки действий и прогресс. Есть светлая и тёмная тема. Вёрстка адаптивная: на широком экране, например в окне Windows, нижняя навигация заменяется боковой панелью, а содержимое не растягивается шире 720 пикселей. Для пустых списков есть подсказки, а удаление всегда требует подтверждения. Все экраны проверены матрицей из 280 снимков в семи вариантах.</a:t>
             </a:r>
             <a:endParaRPr lang="en-US" dirty="0"/>
           </a:p>
@@ -1360,7 +1374,7 @@
           <a:p>
             <a:r>
               <a:rPr lang="en-US" dirty="0"/>
-              <a:t>Пояснительная записка — 80 страниц: введение с целью и задачами, теоретическая глава с анализом аналогов и обоснованием технологий, практическая глава с архитектурой, ER-диаграммой, схемой алгоритма и скриншотами, заключение, 43 источника и приложения с кодом. Релизная сборка: APK для Android и версия для Windows собираются автоматически командой flutter build apk --release в GitHub Actions. Приложение можно установить на телефон и запустить без интернета.</a:t>
+              <a:t>Приложение проверяют 137 модульных и виджет-тестов. 32 проверяют алгоритм, 23 — сервер API: коды ответов, отказ без токена, защиту чужих записей, CRUD; 14 — клиент API: выключенный сервер, таймаут, ответ 401. Виджет-тесты запускают приложение вместе с настоящим сервером API, у которого база в памяти, поэтому проверяется весь путь данных — от экрана до базы. Интеграционный тест проходит сценарий в настоящем приложении с настоящим HTTP-сервером. В документе 45 тест-кейсов и журнал из 27 найденных и исправленных ошибок. GitHub Actions на каждое изменение запускает все проверки и собирает APK, файл для iPhone, версию для Windows и программу-сервер.</a:t>
             </a:r>
             <a:endParaRPr lang="en-US" dirty="0"/>
           </a:p>
@@ -1448,7 +1462,7 @@
           <a:p>
             <a:r>
               <a:rPr lang="en-US" dirty="0"/>
-              <a:t>Подведу итог. Все задачи курсовой выполнены: приложение «Маршрут» строит персональный план обучения с учётом знаний, времени и дедлайна и перестраивает его при отставании. Оно построено по Clean Architecture, покрыто тестами, собирается автоматически и работает офлайн на Android и Windows. Дальнейшее развитие — синхронизация между устройствами и экспорт плана. Спасибо за внимание, готов ответить на вопросы.</a:t>
+              <a:t>Пояснительная записка — 105 страниц: введение с целью и девятью задачами, теоретическая глава с анализом аналогов и обоснованием технологий, практическая глава с архитектурой, базой данных и API сервера, схемой алгоритма и скриншотами, заключение, 50 источников и приложения с кодом алгоритма, сервера и клиента API. Сборки делает GitHub Actions: APK для Android командой flutter build apk --release, файл IPA для iPhone, который ставится через Sideloadly, версию для Windows и программу-сервер для ноутбука.</a:t>
             </a:r>
             <a:endParaRPr lang="en-US" dirty="0"/>
           </a:p>
@@ -1472,6 +1486,94 @@
             <a:fld id="{F7021451-1387-4CA6-816F-3879F97B5CBC}" type="slidenum">
               <a:rPr lang="en-US"/>
               <a:t>16</a:t>
+            </a:fld>
+            <a:endParaRPr lang="en-US"/>
+          </a:p>
+        </p:txBody>
+      </p:sp>
+    </p:spTree>
+    <p:extLst>
+      <p:ext uri="{BB962C8B-B14F-4D97-AF65-F5344CB8AC3E}">
+        <p14:creationId xmlns:p14="http://schemas.microsoft.com/office/powerpoint/2010/main" val="1024086991"/>
+      </p:ext>
+    </p:extLst>
+  </p:cSld>
+  <p:clrMapOvr>
+    <a:masterClrMapping/>
+  </p:clrMapOvr>
+</p:notes>
+</file>
+
+<file path=ppt/notesSlides/notesSlide17.xml><?xml version="1.0" encoding="utf-8"?>
+<p:notes xmlns:a="http://schemas.openxmlformats.org/drawingml/2006/main" xmlns:r="http://schemas.openxmlformats.org/officeDocument/2006/relationships" xmlns:p="http://schemas.openxmlformats.org/presentationml/2006/main">
+  <p:cSld>
+    <p:spTree>
+      <p:nvGrpSpPr>
+        <p:cNvPr id="1" name=""/>
+        <p:cNvGrpSpPr/>
+        <p:nvPr/>
+      </p:nvGrpSpPr>
+      <p:grpSpPr>
+        <a:xfrm>
+          <a:off x="0" y="0"/>
+          <a:ext cx="0" cy="0"/>
+          <a:chOff x="0" y="0"/>
+          <a:chExt cx="0" cy="0"/>
+        </a:xfrm>
+      </p:grpSpPr>
+      <p:sp>
+        <p:nvSpPr>
+          <p:cNvPr id="2" name="Slide Image Placeholder 1"/>
+          <p:cNvSpPr>
+            <a:spLocks noGrp="1" noRot="1" noChangeAspect="1"/>
+          </p:cNvSpPr>
+          <p:nvPr>
+            <p:ph type="sldImg"/>
+          </p:nvPr>
+        </p:nvSpPr>
+        <p:spPr/>
+      </p:sp>
+      <p:sp>
+        <p:nvSpPr>
+          <p:cNvPr id="3" name="Notes Placeholder 2"/>
+          <p:cNvSpPr>
+            <a:spLocks noGrp="1"/>
+          </p:cNvSpPr>
+          <p:nvPr>
+            <p:ph type="body" idx="1"/>
+          </p:nvPr>
+        </p:nvSpPr>
+        <p:spPr/>
+        <p:txBody>
+          <a:bodyPr/>
+          <a:lstStyle/>
+          <a:p>
+            <a:r>
+              <a:rPr lang="en-US" dirty="0"/>
+              <a:t>Подведу итог. Все задачи курсовой выполнены: приложение «Маршрут» строит персональный план обучения с учётом знаний, времени и дедлайна и перестраивает его при отставании. Приложение работает с данными только через собственный сервер API, покрыто тестами и собирается автоматически для Android, iPhone и Windows. Дальнейшее развитие — размещение сервера в интернете с шифрованием HTTPS и экспорт плана. Спасибо за внимание, готов ответить на вопросы.</a:t>
+            </a:r>
+            <a:endParaRPr lang="en-US" dirty="0"/>
+          </a:p>
+        </p:txBody>
+      </p:sp>
+      <p:sp>
+        <p:nvSpPr>
+          <p:cNvPr id="4" name="Slide Number Placeholder 3"/>
+          <p:cNvSpPr>
+            <a:spLocks noGrp="1"/>
+          </p:cNvSpPr>
+          <p:nvPr>
+            <p:ph type="sldNum" sz="quarter" idx="10"/>
+          </p:nvPr>
+        </p:nvSpPr>
+        <p:spPr/>
+        <p:txBody>
+          <a:bodyPr/>
+          <a:lstStyle/>
+          <a:p>
+            <a:fld id="{F7021451-1387-4CA6-816F-3879F97B5CBC}" type="slidenum">
+              <a:rPr lang="en-US"/>
+              <a:t>17</a:t>
             </a:fld>
             <a:endParaRPr lang="en-US"/>
           </a:p>
@@ -1624,7 +1726,7 @@
           <a:p>
             <a:r>
               <a:rPr lang="en-US" dirty="0"/>
-              <a:t>Я сравнил приложение с аналогами. roadmap.sh показывает схемы изучения технологий, но схема одна для всех и не превращается в расписание. Duolingo хорошо мотивирует ежедневной целью, но план задаёт сам сервис. Курсы на Stepik и Coursera идут в своём темпе. Планировщики вроде Notion или Todoist требуют расписывать всё вручную. «Маршрут» объединяет граф тем, учёт уровня через тест, расписание под ваше время и автоматическую перестройку, и работает без интернета. (Перед защитой сверить таблицу с актуальными версиями сервисов.)</a:t>
+              <a:t>Я сравнил приложение с аналогами. roadmap.sh показывает схемы изучения технологий, но схема одна для всех и не превращается в расписание. Duolingo хорошо мотивирует ежедневной целью, но план задаёт сам сервис. Курсы на Stepik и Coursera идут в своём темпе. Планировщики вроде Notion или Todoist требуют расписывать всё вручную. «Маршрут» объединяет граф тем, учёт уровня через тест, расписание под ваше время и автоматическую перестройку, а данные хранит на собственном сервере API без облачных сервисов. (Перед защитой сверить таблицу с актуальными версиями сервисов.)</a:t>
             </a:r>
             <a:endParaRPr lang="en-US" dirty="0"/>
           </a:p>
@@ -1712,7 +1814,7 @@
           <a:p>
             <a:r>
               <a:rPr lang="en-US" dirty="0"/>
-              <a:t>Архитектура построена по Clean Architecture и разделена на три слоя. Domain написан на чистом Dart и не знает о Flutter: здесь сущности и главный алгоритм, поэтому его легко тестировать. Data отвечает за хранение: SQLite через drift, каталог тем в JSON и настройки. Presentation — экраны и провайдеры Riverpod. Riverpod выбран вместо BLoC, потому что требует меньше шаблонного кода, и вместо Provider, потому что не зависит от BuildContext и легко подменяется в тестах. drift выбран, потому что данные связаны: у пользователя планы, у плана занятия. Hive хранит пары ключ-значение без связей, а Firebase требует облака и интернета. go_router с redirect не пускает на закрытые экраны без входа.</a:t>
+              <a:t>Система состоит из двух программ. Приложение на Flutter построено по Clean Architecture: экраны берут данные у провайдеров Riverpod, провайдеры вызывают PlanService и алгоритм в слое domain на чистом Dart, а данные получают через репозитории API. Все запросы идут через общий клиент ApiClient: он добавляет токен, ждёт ответ не дольше 10 секунд и превращает ошибки в понятные сообщения. Сервер API тоже написан на Dart, на библиотеке shelf. Он выбирает обработчик по адресу, проверяет токен, данные и то, что запись принадлежит этому пользователю, и только после этого работает с базой SQLite через drift. Приложение к базе напрямую не обращается: получение, добавление, изменение и удаление идут только через API. Riverpod выбран вместо BLoC и Provider: меньше шаблонного кода, легко подменять зависимости в тестах. Свой сервер вместо Firebase — нет облака, ключей и внешних сервисов, а данные связаны и требуют SQL. Слоистая архитектура себя оправдала: при переходе на сервер заменились только репозитории, алгоритм и экраны остались прежними.</a:t>
             </a:r>
             <a:endParaRPr lang="en-US" dirty="0"/>
           </a:p>
@@ -1976,7 +2078,7 @@
           <a:p>
             <a:r>
               <a:rPr lang="en-US" dirty="0"/>
-              <a:t>Покажу обязательный сценарий первого семестра. Заставка с логотипом сама переходит на вход или, если сессия сохранена, сразу на главную. Регистрация проверяет каждое поле: пустые поля, формат email, пароль из букв и цифр, совпадение паролей, уникальность email. При неверном пароле вход показывает понятное сообщение, есть ссылка на регистрацию. Пользователь хранится в базе, после входа открывается главная с прогрессом и задачами на сегодня. Пять вкладок внизу: Главная, План, Темы, Статистика, Профиль. В профиле кнопка «Выйти»: после выхода открывается вход, а закрытые экраны без входа недоступны — это делает redirect в go_router. Тот же сценарий автоматически проходит интеграционный тест.</a:t>
+              <a:t>Покажу обязательный сценарий первого семестра. Заставка с логотипом сама переходит на вход или, если сессия сохранена, сразу на главную. Регистрация проверяет каждое поле: пустые поля, формат email, пароль из букв и цифр, совпадение паролей, уникальность email. При неверном пароле вход показывает понятное сообщение, есть ссылка на регистрацию. Пользователь хранится в базе на сервере, после входа сервер выдаёт токен, и открывается главная с прогрессом и задачами на сегодня. Пять вкладок внизу: Главная, План, Темы, Статистика, Профиль. В профиле кнопка «Выйти»: после выхода открывается вход, а закрытые экраны без входа недоступны — это делает redirect в go_router. Тот же сценарий автоматически проходит интеграционный тест.</a:t>
             </a:r>
             <a:endParaRPr lang="en-US" dirty="0"/>
           </a:p>
@@ -3745,7 +3847,7 @@
       </p:sp>
       <p:sp>
         <p:nvSpPr>
-          <p:cNvPr id="17" name="Метка Windows"/>
+          <p:cNvPr id="17" name="Метка iPhone и Windows"/>
           <p:cNvSpPr/>
           <p:nvPr/>
         </p:nvSpPr>
@@ -3777,7 +3879,7 @@
                   <a:schemeClr val="tx2"/>
                 </a:solidFill>
               </a:rPr>
-              <a:t>Windows</a:t>
+              <a:t>iPhone и Windows</a:t>
             </a:r>
             <a:endParaRPr lang="en-US" sz="1300" dirty="0"/>
           </a:p>
@@ -4065,7 +4167,7 @@
                   <a:schemeClr val="tx2"/>
                 </a:solidFill>
               </a:rPr>
-              <a:t>Данные: 8 связанных таблиц SQLite</a:t>
+              <a:t>Данные: 9 таблиц SQLite на сервере, доступ только через API</a:t>
             </a:r>
             <a:endParaRPr lang="en-US" sz="3200" dirty="0"/>
           </a:p>
@@ -4079,12 +4181,12 @@
         </p:nvSpPr>
         <p:spPr>
           <a:xfrm>
-            <a:off x="548640" y="3337560"/>
-            <a:ext cx="1828800" cy="566928"/>
+            <a:off x="548640" y="3200400"/>
+            <a:ext cx="1737360" cy="548640"/>
           </a:xfrm>
           <a:prstGeom prst="roundRect">
             <a:avLst>
-              <a:gd name="adj" fmla="val 16129"/>
+              <a:gd name="adj" fmla="val 16667"/>
             </a:avLst>
           </a:prstGeom>
           <a:solidFill>
@@ -4133,12 +4235,12 @@
         </p:nvSpPr>
         <p:spPr>
           <a:xfrm>
-            <a:off x="3108960" y="1600200"/>
-            <a:ext cx="2011680" cy="566928"/>
+            <a:off x="2926080" y="1371600"/>
+            <a:ext cx="2011680" cy="548640"/>
           </a:xfrm>
           <a:prstGeom prst="roundRect">
             <a:avLst>
-              <a:gd name="adj" fmla="val 16129"/>
+              <a:gd name="adj" fmla="val 16667"/>
             </a:avLst>
           </a:prstGeom>
           <a:solidFill>
@@ -4187,8 +4289,8 @@
         </p:nvSpPr>
         <p:spPr>
           <a:xfrm flipV="1">
-            <a:off x="2377440" y="1883664"/>
-            <a:ext cx="731520" cy="1737360"/>
+            <a:off x="2286000" y="1645920"/>
+            <a:ext cx="640080" cy="1828800"/>
           </a:xfrm>
           <a:prstGeom prst="line">
             <a:avLst/>
@@ -4211,12 +4313,12 @@
         </p:nvSpPr>
         <p:spPr>
           <a:xfrm>
-            <a:off x="3108960" y="2468880"/>
-            <a:ext cx="2011680" cy="566928"/>
+            <a:off x="2926080" y="2103120"/>
+            <a:ext cx="2011680" cy="548640"/>
           </a:xfrm>
           <a:prstGeom prst="roundRect">
             <a:avLst>
-              <a:gd name="adj" fmla="val 16129"/>
+              <a:gd name="adj" fmla="val 16667"/>
             </a:avLst>
           </a:prstGeom>
           <a:solidFill>
@@ -4265,8 +4367,8 @@
         </p:nvSpPr>
         <p:spPr>
           <a:xfrm flipV="1">
-            <a:off x="2377440" y="2752344"/>
-            <a:ext cx="731520" cy="868680"/>
+            <a:off x="2286000" y="2377440"/>
+            <a:ext cx="640080" cy="1097280"/>
           </a:xfrm>
           <a:prstGeom prst="line">
             <a:avLst/>
@@ -4289,12 +4391,12 @@
         </p:nvSpPr>
         <p:spPr>
           <a:xfrm>
-            <a:off x="3108960" y="3337560"/>
-            <a:ext cx="2011680" cy="566928"/>
+            <a:off x="2926080" y="2834640"/>
+            <a:ext cx="2011680" cy="548640"/>
           </a:xfrm>
           <a:prstGeom prst="roundRect">
             <a:avLst>
-              <a:gd name="adj" fmla="val 16129"/>
+              <a:gd name="adj" fmla="val 16667"/>
             </a:avLst>
           </a:prstGeom>
           <a:solidFill>
@@ -4342,9 +4444,9 @@
           <p:nvPr/>
         </p:nvSpPr>
         <p:spPr>
-          <a:xfrm>
-            <a:off x="2377440" y="3621024"/>
-            <a:ext cx="731520" cy="0"/>
+          <a:xfrm flipV="1">
+            <a:off x="2286000" y="3108960"/>
+            <a:ext cx="640080" cy="365760"/>
           </a:xfrm>
           <a:prstGeom prst="line">
             <a:avLst/>
@@ -4367,12 +4469,12 @@
         </p:nvSpPr>
         <p:spPr>
           <a:xfrm>
-            <a:off x="3108960" y="4206240"/>
-            <a:ext cx="2011680" cy="566928"/>
+            <a:off x="2926080" y="3566160"/>
+            <a:ext cx="2011680" cy="548640"/>
           </a:xfrm>
           <a:prstGeom prst="roundRect">
             <a:avLst>
-              <a:gd name="adj" fmla="val 16129"/>
+              <a:gd name="adj" fmla="val 16667"/>
             </a:avLst>
           </a:prstGeom>
           <a:solidFill>
@@ -4421,8 +4523,8 @@
         </p:nvSpPr>
         <p:spPr>
           <a:xfrm>
-            <a:off x="2377440" y="3621024"/>
-            <a:ext cx="731520" cy="868680"/>
+            <a:off x="2286000" y="3474720"/>
+            <a:ext cx="640080" cy="365760"/>
           </a:xfrm>
           <a:prstGeom prst="line">
             <a:avLst/>
@@ -4445,12 +4547,12 @@
         </p:nvSpPr>
         <p:spPr>
           <a:xfrm>
-            <a:off x="3108960" y="5074920"/>
-            <a:ext cx="2011680" cy="566928"/>
+            <a:off x="2926080" y="4297680"/>
+            <a:ext cx="2011680" cy="548640"/>
           </a:xfrm>
           <a:prstGeom prst="roundRect">
             <a:avLst>
-              <a:gd name="adj" fmla="val 16129"/>
+              <a:gd name="adj" fmla="val 16667"/>
             </a:avLst>
           </a:prstGeom>
           <a:solidFill>
@@ -4499,8 +4601,8 @@
         </p:nvSpPr>
         <p:spPr>
           <a:xfrm>
-            <a:off x="2377440" y="3621024"/>
-            <a:ext cx="731520" cy="1737360"/>
+            <a:off x="2286000" y="3474720"/>
+            <a:ext cx="640080" cy="1097280"/>
           </a:xfrm>
           <a:prstGeom prst="line">
             <a:avLst/>
@@ -4517,22 +4619,22 @@
       </p:sp>
       <p:sp>
         <p:nvSpPr>
-          <p:cNvPr id="14" name="Таблица plan_topics"/>
+          <p:cNvPr id="14" name="Таблица api_tokens"/>
           <p:cNvSpPr/>
           <p:nvPr/>
         </p:nvSpPr>
         <p:spPr>
           <a:xfrm>
-            <a:off x="5852160" y="1325880"/>
-            <a:ext cx="2011680" cy="566928"/>
+            <a:off x="2926080" y="5029200"/>
+            <a:ext cx="2011680" cy="548640"/>
           </a:xfrm>
           <a:prstGeom prst="roundRect">
             <a:avLst>
-              <a:gd name="adj" fmla="val 16129"/>
+              <a:gd name="adj" fmla="val 16667"/>
             </a:avLst>
           </a:prstGeom>
           <a:solidFill>
-            <a:schemeClr val="bg2"/>
+            <a:srgbClr val="FFE3C4"/>
           </a:solidFill>
           <a:ln/>
         </p:spPr>
@@ -4549,7 +4651,7 @@
                   <a:schemeClr val="tx2"/>
                 </a:solidFill>
               </a:rPr>
-              <a:t>plan_topics</a:t>
+              <a:t>api_tokens</a:t>
             </a:r>
             <a:endParaRPr lang="en-US" sz="1400" dirty="0"/>
           </a:p>
@@ -4563,7 +4665,7 @@
                   <a:schemeClr val="tx2"/>
                 </a:solidFill>
               </a:rPr>
-              <a:t>темы плана</a:t>
+              <a:t>токены входа</a:t>
             </a:r>
             <a:endParaRPr lang="en-US" sz="1400" dirty="0"/>
           </a:p>
@@ -4576,9 +4678,9 @@
           <p:nvPr/>
         </p:nvSpPr>
         <p:spPr>
-          <a:xfrm flipV="1">
-            <a:off x="5120640" y="1609344"/>
-            <a:ext cx="731520" cy="274320"/>
+          <a:xfrm>
+            <a:off x="2286000" y="3474720"/>
+            <a:ext cx="640080" cy="1828800"/>
           </a:xfrm>
           <a:prstGeom prst="line">
             <a:avLst/>
@@ -4595,18 +4697,18 @@
       </p:sp>
       <p:sp>
         <p:nvSpPr>
-          <p:cNvPr id="16" name="Таблица sessions"/>
+          <p:cNvPr id="16" name="Таблица plan_topics"/>
           <p:cNvSpPr/>
           <p:nvPr/>
         </p:nvSpPr>
         <p:spPr>
           <a:xfrm>
-            <a:off x="5852160" y="2240280"/>
-            <a:ext cx="2011680" cy="566928"/>
+            <a:off x="5577840" y="1325880"/>
+            <a:ext cx="1828800" cy="548640"/>
           </a:xfrm>
           <a:prstGeom prst="roundRect">
             <a:avLst>
-              <a:gd name="adj" fmla="val 16129"/>
+              <a:gd name="adj" fmla="val 16667"/>
             </a:avLst>
           </a:prstGeom>
           <a:solidFill>
@@ -4627,7 +4729,7 @@
                   <a:schemeClr val="tx2"/>
                 </a:solidFill>
               </a:rPr>
-              <a:t>sessions</a:t>
+              <a:t>plan_topics</a:t>
             </a:r>
             <a:endParaRPr lang="en-US" sz="1400" dirty="0"/>
           </a:p>
@@ -4641,7 +4743,7 @@
                   <a:schemeClr val="tx2"/>
                 </a:solidFill>
               </a:rPr>
-              <a:t>занятия</a:t>
+              <a:t>темы плана</a:t>
             </a:r>
             <a:endParaRPr lang="en-US" sz="1400" dirty="0"/>
           </a:p>
@@ -4654,9 +4756,9 @@
           <p:nvPr/>
         </p:nvSpPr>
         <p:spPr>
-          <a:xfrm>
-            <a:off x="5120640" y="1883664"/>
-            <a:ext cx="731520" cy="640080"/>
+          <a:xfrm flipV="1">
+            <a:off x="4937760" y="1600200"/>
+            <a:ext cx="640080" cy="45720"/>
           </a:xfrm>
           <a:prstGeom prst="line">
             <a:avLst/>
@@ -4673,18 +4775,96 @@
       </p:sp>
       <p:sp>
         <p:nvSpPr>
-          <p:cNvPr id="18" name="Каскад"/>
+          <p:cNvPr id="18" name="Таблица sessions"/>
           <p:cNvSpPr/>
           <p:nvPr/>
         </p:nvSpPr>
         <p:spPr>
           <a:xfrm>
-            <a:off x="5852160" y="3429000"/>
-            <a:ext cx="2103120" cy="2194560"/>
+            <a:off x="5577840" y="2103120"/>
+            <a:ext cx="1828800" cy="548640"/>
           </a:xfrm>
           <a:prstGeom prst="roundRect">
             <a:avLst>
-              <a:gd name="adj" fmla="val 5217"/>
+              <a:gd name="adj" fmla="val 16667"/>
+            </a:avLst>
+          </a:prstGeom>
+          <a:solidFill>
+            <a:schemeClr val="bg2"/>
+          </a:solidFill>
+          <a:ln/>
+        </p:spPr>
+        <p:txBody>
+          <a:bodyPr wrap="square" lIns="381" tIns="381" rIns="381" bIns="381" rtlCol="0" anchor="ctr"/>
+          <a:lstStyle/>
+          <a:p>
+            <a:pPr algn="ctr" indent="0" marL="0">
+              <a:buNone/>
+            </a:pPr>
+            <a:r>
+              <a:rPr lang="en-US" sz="1400" b="1" dirty="0">
+                <a:solidFill>
+                  <a:schemeClr val="tx2"/>
+                </a:solidFill>
+              </a:rPr>
+              <a:t>sessions</a:t>
+            </a:r>
+            <a:endParaRPr lang="en-US" sz="1400" dirty="0"/>
+          </a:p>
+          <a:p>
+            <a:pPr algn="ctr" indent="0" marL="0">
+              <a:buNone/>
+            </a:pPr>
+            <a:r>
+              <a:rPr lang="en-US" sz="1100" dirty="0">
+                <a:solidFill>
+                  <a:schemeClr val="tx2"/>
+                </a:solidFill>
+              </a:rPr>
+              <a:t>занятия</a:t>
+            </a:r>
+            <a:endParaRPr lang="en-US" sz="1400" dirty="0"/>
+          </a:p>
+        </p:txBody>
+      </p:sp>
+      <p:sp>
+        <p:nvSpPr>
+          <p:cNvPr id="19" name="Связь"/>
+          <p:cNvSpPr/>
+          <p:nvPr/>
+        </p:nvSpPr>
+        <p:spPr>
+          <a:xfrm>
+            <a:off x="4937760" y="1645920"/>
+            <a:ext cx="640080" cy="731520"/>
+          </a:xfrm>
+          <a:prstGeom prst="line">
+            <a:avLst/>
+          </a:prstGeom>
+          <a:noFill/>
+          <a:ln w="15875">
+            <a:solidFill>
+              <a:schemeClr val="accent6"/>
+            </a:solidFill>
+            <a:prstDash val="solid"/>
+            <a:tailEnd type="triangle"/>
+          </a:ln>
+        </p:spPr>
+      </p:sp>
+      <p:sp>
+        <p:nvSpPr>
+          <p:cNvPr id="20" name="Каскад"/>
+          <p:cNvSpPr/>
+          <p:nvPr/>
+        </p:nvSpPr>
+        <p:spPr>
+          <a:xfrm>
+            <a:off x="5577840" y="3063240"/>
+            <a:ext cx="1828800" cy="2514600"/>
+          </a:xfrm>
+          <a:prstGeom prst="roundRect">
+            <a:avLst>
+              <a:gd name="adj" fmla="val 6000"/>
             </a:avLst>
           </a:prstGeom>
           <a:solidFill>
@@ -4695,14 +4875,14 @@
       </p:sp>
       <p:sp>
         <p:nvSpPr>
-          <p:cNvPr id="19" name="Text 17"/>
+          <p:cNvPr id="21" name="Text 19"/>
           <p:cNvSpPr txBox="1"/>
           <p:nvPr/>
         </p:nvSpPr>
         <p:spPr>
           <a:xfrm>
-            <a:off x="6035040" y="3566160"/>
-            <a:ext cx="1783080" cy="1920240"/>
+            <a:off x="5742432" y="3200400"/>
+            <a:ext cx="1554480" cy="2286000"/>
           </a:xfrm>
           <a:prstGeom prst="rect">
             <a:avLst/>
@@ -4725,34 +4905,34 @@
               </a:rPr>
               <a:t>1 : N</a:t>
             </a:r>
-            <a:endParaRPr lang="en-US" sz="1300" dirty="0"/>
+            <a:endParaRPr lang="en-US" sz="1200" dirty="0"/>
           </a:p>
           <a:p>
             <a:pPr indent="0" marL="0">
               <a:buNone/>
             </a:pPr>
             <a:r>
-              <a:rPr lang="en-US" sz="1300" dirty="0">
+              <a:rPr lang="en-US" sz="1200" dirty="0">
                 <a:solidFill>
                   <a:schemeClr val="bg1"/>
                 </a:solidFill>
               </a:rPr>
-              <a:t>ON DELETE CASCADE: удаление аккаунта удаляет все его данные</a:t>
-            </a:r>
-            <a:endParaRPr lang="en-US" sz="1300" dirty="0"/>
-          </a:p>
-        </p:txBody>
-      </p:sp>
-      <p:sp>
-        <p:nvSpPr>
-          <p:cNvPr id="20" name="Text 18"/>
+              <a:t>ON DELETE CASCADE: удаление аккаунта удаляет все его данные и токены</a:t>
+            </a:r>
+            <a:endParaRPr lang="en-US" sz="1200" dirty="0"/>
+          </a:p>
+        </p:txBody>
+      </p:sp>
+      <p:sp>
+        <p:nvSpPr>
+          <p:cNvPr id="22" name="Text 20"/>
           <p:cNvSpPr txBox="1"/>
           <p:nvPr/>
         </p:nvSpPr>
         <p:spPr>
           <a:xfrm>
             <a:off x="548640" y="5852160"/>
-            <a:ext cx="7406640" cy="320040"/>
+            <a:ext cx="6949440" cy="320040"/>
           </a:xfrm>
           <a:prstGeom prst="rect">
             <a:avLst/>
@@ -4773,7 +4953,7 @@
                   <a:schemeClr val="accent6"/>
                 </a:solidFill>
               </a:rPr>
-              <a:t>Каталог тем — JSON в assets: новое направление без изменения кода</a:t>
+              <a:t>Каталог тем — JSON на сервере, приложение получает его через GET /api/directions</a:t>
             </a:r>
             <a:endParaRPr lang="en-US" sz="1200" dirty="0"/>
           </a:p>
@@ -4781,18 +4961,18 @@
       </p:sp>
       <p:sp>
         <p:nvSpPr>
-          <p:cNvPr id="21" name="CRUD"/>
+          <p:cNvPr id="23" name="CRUD"/>
           <p:cNvSpPr/>
           <p:nvPr/>
         </p:nvSpPr>
         <p:spPr>
           <a:xfrm>
-            <a:off x="8275320" y="1325880"/>
-            <a:ext cx="3364992" cy="4526280"/>
+            <a:off x="7772400" y="1325880"/>
+            <a:ext cx="3867912" cy="4846320"/>
           </a:xfrm>
           <a:prstGeom prst="roundRect">
             <a:avLst>
-              <a:gd name="adj" fmla="val 3261"/>
+              <a:gd name="adj" fmla="val 2837"/>
             </a:avLst>
           </a:prstGeom>
           <a:solidFill>
@@ -4803,14 +4983,14 @@
       </p:sp>
       <p:sp>
         <p:nvSpPr>
-          <p:cNvPr id="22" name="Text 20"/>
+          <p:cNvPr id="24" name="Text 22"/>
           <p:cNvSpPr txBox="1"/>
           <p:nvPr/>
         </p:nvSpPr>
         <p:spPr>
           <a:xfrm>
-            <a:off x="8503920" y="1508760"/>
-            <a:ext cx="2926080" cy="274320"/>
+            <a:off x="8001000" y="1481328"/>
+            <a:ext cx="3474720" cy="274320"/>
           </a:xfrm>
           <a:prstGeom prst="rect">
             <a:avLst/>
@@ -4831,7 +5011,7 @@
                   <a:schemeClr val="accent1"/>
                 </a:solidFill>
               </a:rPr>
-              <a:t>CRUD ЧЕРЕЗ ИНТЕРФЕЙС</a:t>
+              <a:t>ПОЛНЫЙ CRUD ЧЕРЕЗ API</a:t>
             </a:r>
             <a:endParaRPr lang="en-US" sz="1300" dirty="0"/>
           </a:p>
@@ -4839,14 +5019,14 @@
       </p:sp>
       <p:sp>
         <p:nvSpPr>
-          <p:cNvPr id="23" name="Text 21"/>
+          <p:cNvPr id="25" name="Text 23"/>
           <p:cNvSpPr txBox="1"/>
           <p:nvPr/>
         </p:nvSpPr>
         <p:spPr>
           <a:xfrm>
-            <a:off x="8503920" y="1874520"/>
-            <a:ext cx="2971800" cy="3840480"/>
+            <a:off x="8001000" y="1874520"/>
+            <a:ext cx="3474720" cy="292608"/>
           </a:xfrm>
           <a:prstGeom prst="rect">
             <a:avLst/>
@@ -4858,76 +5038,556 @@
           <a:bodyPr wrap="square" lIns="0" tIns="0" rIns="0" bIns="0" rtlCol="0" anchor="t"/>
           <a:lstStyle/>
           <a:p>
-            <a:pPr marL="342900" indent="-342900">
-              <a:spcAft>
-                <a:spcPts val="800"/>
-              </a:spcAft>
-              <a:buSzPct val="100000"/>
-              <a:buChar char="•"/>
-            </a:pPr>
-            <a:r>
-              <a:rPr lang="en-US" sz="1400" dirty="0">
+            <a:pPr indent="0" marL="0">
+              <a:buNone/>
+            </a:pPr>
+            <a:r>
+              <a:rPr lang="en-US" sz="1500" b="1" dirty="0">
+                <a:solidFill>
+                  <a:schemeClr val="tx2"/>
+                </a:solidFill>
+              </a:rPr>
+              <a:t>Заметки</a:t>
+            </a:r>
+            <a:endParaRPr lang="en-US" sz="1500" dirty="0"/>
+          </a:p>
+        </p:txBody>
+      </p:sp>
+      <p:sp>
+        <p:nvSpPr>
+          <p:cNvPr id="26" name="Text 24"/>
+          <p:cNvSpPr txBox="1"/>
+          <p:nvPr/>
+        </p:nvSpPr>
+        <p:spPr>
+          <a:xfrm>
+            <a:off x="8001000" y="2185416"/>
+            <a:ext cx="3520440" cy="411480"/>
+          </a:xfrm>
+          <a:prstGeom prst="rect">
+            <a:avLst/>
+          </a:prstGeom>
+          <a:noFill/>
+          <a:ln/>
+        </p:spPr>
+        <p:txBody>
+          <a:bodyPr wrap="square" lIns="0" tIns="0" rIns="0" bIns="0" rtlCol="0" anchor="t"/>
+          <a:lstStyle/>
+          <a:p>
+            <a:pPr indent="0" marL="0">
+              <a:buNone/>
+            </a:pPr>
+            <a:r>
+              <a:rPr lang="en-US" sz="1200" dirty="0">
                 <a:solidFill>
                   <a:schemeClr val="tx1"/>
                 </a:solidFill>
               </a:rPr>
-              <a:t>Планы: создать, переименовать, сделать активным, удалить</a:t>
-            </a:r>
-            <a:endParaRPr lang="en-US" sz="1400" dirty="0"/>
-          </a:p>
-          <a:p>
-            <a:pPr marL="342900" indent="-342900">
-              <a:spcAft>
-                <a:spcPts val="800"/>
-              </a:spcAft>
-              <a:buSzPct val="100000"/>
-              <a:buChar char="•"/>
-            </a:pPr>
-            <a:r>
-              <a:rPr lang="en-US" sz="1400" dirty="0">
+              <a:t>GET · POST · PUT · DELETE  </a:t>
+            </a:r>
+            <a:pPr indent="0" marL="0">
+              <a:buNone/>
+            </a:pPr>
+            <a:r>
+              <a:rPr lang="en-US" sz="1100" dirty="0">
+                <a:solidFill>
+                  <a:schemeClr val="accent6"/>
+                </a:solidFill>
+                <a:latin typeface="Courier New" pitchFamily="34" charset="0"/>
+                <a:ea typeface="Courier New" pitchFamily="34" charset="-122"/>
+                <a:cs typeface="Courier New" pitchFamily="34" charset="-120"/>
+              </a:rPr>
+              <a:t>/api/notes</a:t>
+            </a:r>
+            <a:endParaRPr lang="en-US" sz="1200" dirty="0"/>
+          </a:p>
+        </p:txBody>
+      </p:sp>
+      <p:sp>
+        <p:nvSpPr>
+          <p:cNvPr id="27" name="Text 25"/>
+          <p:cNvSpPr txBox="1"/>
+          <p:nvPr/>
+        </p:nvSpPr>
+        <p:spPr>
+          <a:xfrm>
+            <a:off x="8001000" y="2743200"/>
+            <a:ext cx="3474720" cy="292608"/>
+          </a:xfrm>
+          <a:prstGeom prst="rect">
+            <a:avLst/>
+          </a:prstGeom>
+          <a:noFill/>
+          <a:ln/>
+        </p:spPr>
+        <p:txBody>
+          <a:bodyPr wrap="square" lIns="0" tIns="0" rIns="0" bIns="0" rtlCol="0" anchor="t"/>
+          <a:lstStyle/>
+          <a:p>
+            <a:pPr indent="0" marL="0">
+              <a:buNone/>
+            </a:pPr>
+            <a:r>
+              <a:rPr lang="en-US" sz="1500" b="1" dirty="0">
+                <a:solidFill>
+                  <a:schemeClr val="tx2"/>
+                </a:solidFill>
+              </a:rPr>
+              <a:t>Свои темы</a:t>
+            </a:r>
+            <a:endParaRPr lang="en-US" sz="1500" dirty="0"/>
+          </a:p>
+        </p:txBody>
+      </p:sp>
+      <p:sp>
+        <p:nvSpPr>
+          <p:cNvPr id="28" name="Text 26"/>
+          <p:cNvSpPr txBox="1"/>
+          <p:nvPr/>
+        </p:nvSpPr>
+        <p:spPr>
+          <a:xfrm>
+            <a:off x="8001000" y="3054096"/>
+            <a:ext cx="3520440" cy="411480"/>
+          </a:xfrm>
+          <a:prstGeom prst="rect">
+            <a:avLst/>
+          </a:prstGeom>
+          <a:noFill/>
+          <a:ln/>
+        </p:spPr>
+        <p:txBody>
+          <a:bodyPr wrap="square" lIns="0" tIns="0" rIns="0" bIns="0" rtlCol="0" anchor="t"/>
+          <a:lstStyle/>
+          <a:p>
+            <a:pPr indent="0" marL="0">
+              <a:buNone/>
+            </a:pPr>
+            <a:r>
+              <a:rPr lang="en-US" sz="1200" dirty="0">
                 <a:solidFill>
                   <a:schemeClr val="tx1"/>
                 </a:solidFill>
               </a:rPr>
-              <a:t>Свои темы и заметки: создать, найти, изменить, удалить</a:t>
-            </a:r>
-            <a:endParaRPr lang="en-US" sz="1400" dirty="0"/>
-          </a:p>
-          <a:p>
-            <a:pPr marL="342900" indent="-342900">
-              <a:spcAft>
-                <a:spcPts val="800"/>
-              </a:spcAft>
-              <a:buSzPct val="100000"/>
-              <a:buChar char="•"/>
-            </a:pPr>
-            <a:r>
-              <a:rPr lang="en-US" sz="1400" dirty="0">
+              <a:t>GET · POST · PUT · DELETE  </a:t>
+            </a:r>
+            <a:pPr indent="0" marL="0">
+              <a:buNone/>
+            </a:pPr>
+            <a:r>
+              <a:rPr lang="en-US" sz="1100" dirty="0">
+                <a:solidFill>
+                  <a:schemeClr val="accent6"/>
+                </a:solidFill>
+                <a:latin typeface="Courier New" pitchFamily="34" charset="0"/>
+                <a:ea typeface="Courier New" pitchFamily="34" charset="-122"/>
+                <a:cs typeface="Courier New" pitchFamily="34" charset="-120"/>
+              </a:rPr>
+              <a:t>/api/custom-topics</a:t>
+            </a:r>
+            <a:endParaRPr lang="en-US" sz="1200" dirty="0"/>
+          </a:p>
+        </p:txBody>
+      </p:sp>
+      <p:sp>
+        <p:nvSpPr>
+          <p:cNvPr id="29" name="Text 27"/>
+          <p:cNvSpPr txBox="1"/>
+          <p:nvPr/>
+        </p:nvSpPr>
+        <p:spPr>
+          <a:xfrm>
+            <a:off x="8001000" y="3611880"/>
+            <a:ext cx="3474720" cy="292608"/>
+          </a:xfrm>
+          <a:prstGeom prst="rect">
+            <a:avLst/>
+          </a:prstGeom>
+          <a:noFill/>
+          <a:ln/>
+        </p:spPr>
+        <p:txBody>
+          <a:bodyPr wrap="square" lIns="0" tIns="0" rIns="0" bIns="0" rtlCol="0" anchor="t"/>
+          <a:lstStyle/>
+          <a:p>
+            <a:pPr indent="0" marL="0">
+              <a:buNone/>
+            </a:pPr>
+            <a:r>
+              <a:rPr lang="en-US" sz="1500" b="1" dirty="0">
+                <a:solidFill>
+                  <a:schemeClr val="tx2"/>
+                </a:solidFill>
+              </a:rPr>
+              <a:t>Планы</a:t>
+            </a:r>
+            <a:endParaRPr lang="en-US" sz="1500" dirty="0"/>
+          </a:p>
+        </p:txBody>
+      </p:sp>
+      <p:sp>
+        <p:nvSpPr>
+          <p:cNvPr id="30" name="Text 28"/>
+          <p:cNvSpPr txBox="1"/>
+          <p:nvPr/>
+        </p:nvSpPr>
+        <p:spPr>
+          <a:xfrm>
+            <a:off x="8001000" y="3922776"/>
+            <a:ext cx="3520440" cy="411480"/>
+          </a:xfrm>
+          <a:prstGeom prst="rect">
+            <a:avLst/>
+          </a:prstGeom>
+          <a:noFill/>
+          <a:ln/>
+        </p:spPr>
+        <p:txBody>
+          <a:bodyPr wrap="square" lIns="0" tIns="0" rIns="0" bIns="0" rtlCol="0" anchor="t"/>
+          <a:lstStyle/>
+          <a:p>
+            <a:pPr indent="0" marL="0">
+              <a:buNone/>
+            </a:pPr>
+            <a:r>
+              <a:rPr lang="en-US" sz="1200" dirty="0">
                 <a:solidFill>
                   <a:schemeClr val="tx1"/>
                 </a:solidFill>
               </a:rPr>
-              <a:t>Профиль: изменить, аккаунт: удалить</a:t>
-            </a:r>
-            <a:endParaRPr lang="en-US" sz="1400" dirty="0"/>
-          </a:p>
-          <a:p>
-            <a:pPr marL="342900" indent="-342900">
-              <a:spcAft>
-                <a:spcPts val="800"/>
-              </a:spcAft>
-              <a:buSzPct val="100000"/>
-              <a:buChar char="•"/>
-            </a:pPr>
-            <a:r>
-              <a:rPr lang="en-US" sz="1400" dirty="0">
-                <a:solidFill>
-                  <a:schemeClr val="tx1"/>
-                </a:solidFill>
-              </a:rPr>
-              <a:t>Ошибки: понятные сообщения, пустые состояния</a:t>
-            </a:r>
-            <a:endParaRPr lang="en-US" sz="1400" dirty="0"/>
+              <a:t>GET · POST · PUT · DELETE  </a:t>
+            </a:r>
+            <a:pPr indent="0" marL="0">
+              <a:buNone/>
+            </a:pPr>
+            <a:r>
+              <a:rPr lang="en-US" sz="1100" dirty="0">
+                <a:solidFill>
+                  <a:schemeClr val="accent6"/>
+                </a:solidFill>
+                <a:latin typeface="Courier New" pitchFamily="34" charset="0"/>
+                <a:ea typeface="Courier New" pitchFamily="34" charset="-122"/>
+                <a:cs typeface="Courier New" pitchFamily="34" charset="-120"/>
+              </a:rPr>
+              <a:t>/api/plans</a:t>
+            </a:r>
+            <a:endParaRPr lang="en-US" sz="1200" dirty="0"/>
+          </a:p>
+        </p:txBody>
+      </p:sp>
+      <p:sp>
+        <p:nvSpPr>
+          <p:cNvPr id="31" name="Text 29"/>
+          <p:cNvSpPr txBox="1"/>
+          <p:nvPr/>
+        </p:nvSpPr>
+        <p:spPr>
+          <a:xfrm>
+            <a:off x="8001000" y="4526280"/>
+            <a:ext cx="3474720" cy="274320"/>
+          </a:xfrm>
+          <a:prstGeom prst="rect">
+            <a:avLst/>
+          </a:prstGeom>
+          <a:noFill/>
+          <a:ln/>
+        </p:spPr>
+        <p:txBody>
+          <a:bodyPr wrap="square" lIns="0" tIns="0" rIns="0" bIns="0" rtlCol="0" anchor="t"/>
+          <a:lstStyle/>
+          <a:p>
+            <a:pPr indent="0" marL="0">
+              <a:buNone/>
+            </a:pPr>
+            <a:r>
+              <a:rPr lang="en-US" sz="1300" b="1" spc="100" kern="0" dirty="0">
+                <a:solidFill>
+                  <a:schemeClr val="accent1"/>
+                </a:solidFill>
+              </a:rPr>
+              <a:t>КОДЫ ОТВЕТОВ</a:t>
+            </a:r>
+            <a:endParaRPr lang="en-US" sz="1300" dirty="0"/>
+          </a:p>
+        </p:txBody>
+      </p:sp>
+      <p:sp>
+        <p:nvSpPr>
+          <p:cNvPr id="32" name="Метка 200"/>
+          <p:cNvSpPr/>
+          <p:nvPr/>
+        </p:nvSpPr>
+        <p:spPr>
+          <a:xfrm>
+            <a:off x="8001000" y="4864608"/>
+            <a:ext cx="731520" cy="384048"/>
+          </a:xfrm>
+          <a:prstGeom prst="roundRect">
+            <a:avLst>
+              <a:gd name="adj" fmla="val 47619"/>
+            </a:avLst>
+          </a:prstGeom>
+          <a:solidFill>
+            <a:schemeClr val="tx2"/>
+          </a:solidFill>
+          <a:ln/>
+        </p:spPr>
+        <p:txBody>
+          <a:bodyPr wrap="square" lIns="635" tIns="635" rIns="635" bIns="635" rtlCol="0" anchor="ctr"/>
+          <a:lstStyle/>
+          <a:p>
+            <a:pPr algn="ctr" indent="0" marL="0">
+              <a:buNone/>
+            </a:pPr>
+            <a:r>
+              <a:rPr lang="en-US" sz="1300" b="1" dirty="0">
+                <a:solidFill>
+                  <a:schemeClr val="bg1"/>
+                </a:solidFill>
+              </a:rPr>
+              <a:t>200</a:t>
+            </a:r>
+            <a:endParaRPr lang="en-US" sz="1300" dirty="0"/>
+          </a:p>
+        </p:txBody>
+      </p:sp>
+      <p:sp>
+        <p:nvSpPr>
+          <p:cNvPr id="33" name="Метка 201"/>
+          <p:cNvSpPr/>
+          <p:nvPr/>
+        </p:nvSpPr>
+        <p:spPr>
+          <a:xfrm>
+            <a:off x="8851392" y="4864608"/>
+            <a:ext cx="731520" cy="384048"/>
+          </a:xfrm>
+          <a:prstGeom prst="roundRect">
+            <a:avLst>
+              <a:gd name="adj" fmla="val 47619"/>
+            </a:avLst>
+          </a:prstGeom>
+          <a:solidFill>
+            <a:schemeClr val="tx2"/>
+          </a:solidFill>
+          <a:ln/>
+        </p:spPr>
+        <p:txBody>
+          <a:bodyPr wrap="square" lIns="635" tIns="635" rIns="635" bIns="635" rtlCol="0" anchor="ctr"/>
+          <a:lstStyle/>
+          <a:p>
+            <a:pPr algn="ctr" indent="0" marL="0">
+              <a:buNone/>
+            </a:pPr>
+            <a:r>
+              <a:rPr lang="en-US" sz="1300" b="1" dirty="0">
+                <a:solidFill>
+                  <a:schemeClr val="bg1"/>
+                </a:solidFill>
+              </a:rPr>
+              <a:t>201</a:t>
+            </a:r>
+            <a:endParaRPr lang="en-US" sz="1300" dirty="0"/>
+          </a:p>
+        </p:txBody>
+      </p:sp>
+      <p:sp>
+        <p:nvSpPr>
+          <p:cNvPr id="34" name="Метка 204"/>
+          <p:cNvSpPr/>
+          <p:nvPr/>
+        </p:nvSpPr>
+        <p:spPr>
+          <a:xfrm>
+            <a:off x="9701784" y="4864608"/>
+            <a:ext cx="731520" cy="384048"/>
+          </a:xfrm>
+          <a:prstGeom prst="roundRect">
+            <a:avLst>
+              <a:gd name="adj" fmla="val 47619"/>
+            </a:avLst>
+          </a:prstGeom>
+          <a:solidFill>
+            <a:schemeClr val="tx2"/>
+          </a:solidFill>
+          <a:ln/>
+        </p:spPr>
+        <p:txBody>
+          <a:bodyPr wrap="square" lIns="635" tIns="635" rIns="635" bIns="635" rtlCol="0" anchor="ctr"/>
+          <a:lstStyle/>
+          <a:p>
+            <a:pPr algn="ctr" indent="0" marL="0">
+              <a:buNone/>
+            </a:pPr>
+            <a:r>
+              <a:rPr lang="en-US" sz="1300" b="1" dirty="0">
+                <a:solidFill>
+                  <a:schemeClr val="bg1"/>
+                </a:solidFill>
+              </a:rPr>
+              <a:t>204</a:t>
+            </a:r>
+            <a:endParaRPr lang="en-US" sz="1300" dirty="0"/>
+          </a:p>
+        </p:txBody>
+      </p:sp>
+      <p:sp>
+        <p:nvSpPr>
+          <p:cNvPr id="35" name="Метка 400"/>
+          <p:cNvSpPr/>
+          <p:nvPr/>
+        </p:nvSpPr>
+        <p:spPr>
+          <a:xfrm>
+            <a:off x="10552176" y="4864608"/>
+            <a:ext cx="731520" cy="384048"/>
+          </a:xfrm>
+          <a:prstGeom prst="roundRect">
+            <a:avLst>
+              <a:gd name="adj" fmla="val 47619"/>
+            </a:avLst>
+          </a:prstGeom>
+          <a:solidFill>
+            <a:schemeClr val="bg1"/>
+          </a:solidFill>
+          <a:ln/>
+        </p:spPr>
+        <p:txBody>
+          <a:bodyPr wrap="square" lIns="635" tIns="635" rIns="635" bIns="635" rtlCol="0" anchor="ctr"/>
+          <a:lstStyle/>
+          <a:p>
+            <a:pPr algn="ctr" indent="0" marL="0">
+              <a:buNone/>
+            </a:pPr>
+            <a:r>
+              <a:rPr lang="en-US" sz="1300" b="1" dirty="0">
+                <a:solidFill>
+                  <a:schemeClr val="accent1"/>
+                </a:solidFill>
+              </a:rPr>
+              <a:t>400</a:t>
+            </a:r>
+            <a:endParaRPr lang="en-US" sz="1300" dirty="0"/>
+          </a:p>
+        </p:txBody>
+      </p:sp>
+      <p:sp>
+        <p:nvSpPr>
+          <p:cNvPr id="36" name="Метка 401"/>
+          <p:cNvSpPr/>
+          <p:nvPr/>
+        </p:nvSpPr>
+        <p:spPr>
+          <a:xfrm>
+            <a:off x="8001000" y="5367528"/>
+            <a:ext cx="731520" cy="384048"/>
+          </a:xfrm>
+          <a:prstGeom prst="roundRect">
+            <a:avLst>
+              <a:gd name="adj" fmla="val 47619"/>
+            </a:avLst>
+          </a:prstGeom>
+          <a:solidFill>
+            <a:schemeClr val="bg1"/>
+          </a:solidFill>
+          <a:ln/>
+        </p:spPr>
+        <p:txBody>
+          <a:bodyPr wrap="square" lIns="635" tIns="635" rIns="635" bIns="635" rtlCol="0" anchor="ctr"/>
+          <a:lstStyle/>
+          <a:p>
+            <a:pPr algn="ctr" indent="0" marL="0">
+              <a:buNone/>
+            </a:pPr>
+            <a:r>
+              <a:rPr lang="en-US" sz="1300" b="1" dirty="0">
+                <a:solidFill>
+                  <a:schemeClr val="accent1"/>
+                </a:solidFill>
+              </a:rPr>
+              <a:t>401</a:t>
+            </a:r>
+            <a:endParaRPr lang="en-US" sz="1300" dirty="0"/>
+          </a:p>
+        </p:txBody>
+      </p:sp>
+      <p:sp>
+        <p:nvSpPr>
+          <p:cNvPr id="37" name="Метка 404"/>
+          <p:cNvSpPr/>
+          <p:nvPr/>
+        </p:nvSpPr>
+        <p:spPr>
+          <a:xfrm>
+            <a:off x="8851392" y="5367528"/>
+            <a:ext cx="731520" cy="384048"/>
+          </a:xfrm>
+          <a:prstGeom prst="roundRect">
+            <a:avLst>
+              <a:gd name="adj" fmla="val 47619"/>
+            </a:avLst>
+          </a:prstGeom>
+          <a:solidFill>
+            <a:schemeClr val="bg1"/>
+          </a:solidFill>
+          <a:ln/>
+        </p:spPr>
+        <p:txBody>
+          <a:bodyPr wrap="square" lIns="635" tIns="635" rIns="635" bIns="635" rtlCol="0" anchor="ctr"/>
+          <a:lstStyle/>
+          <a:p>
+            <a:pPr algn="ctr" indent="0" marL="0">
+              <a:buNone/>
+            </a:pPr>
+            <a:r>
+              <a:rPr lang="en-US" sz="1300" b="1" dirty="0">
+                <a:solidFill>
+                  <a:schemeClr val="accent1"/>
+                </a:solidFill>
+              </a:rPr>
+              <a:t>404</a:t>
+            </a:r>
+            <a:endParaRPr lang="en-US" sz="1300" dirty="0"/>
+          </a:p>
+        </p:txBody>
+      </p:sp>
+      <p:sp>
+        <p:nvSpPr>
+          <p:cNvPr id="38" name="Метка 500"/>
+          <p:cNvSpPr/>
+          <p:nvPr/>
+        </p:nvSpPr>
+        <p:spPr>
+          <a:xfrm>
+            <a:off x="9701784" y="5367528"/>
+            <a:ext cx="731520" cy="384048"/>
+          </a:xfrm>
+          <a:prstGeom prst="roundRect">
+            <a:avLst>
+              <a:gd name="adj" fmla="val 47619"/>
+            </a:avLst>
+          </a:prstGeom>
+          <a:solidFill>
+            <a:schemeClr val="bg1"/>
+          </a:solidFill>
+          <a:ln/>
+        </p:spPr>
+        <p:txBody>
+          <a:bodyPr wrap="square" lIns="635" tIns="635" rIns="635" bIns="635" rtlCol="0" anchor="ctr"/>
+          <a:lstStyle/>
+          <a:p>
+            <a:pPr algn="ctr" indent="0" marL="0">
+              <a:buNone/>
+            </a:pPr>
+            <a:r>
+              <a:rPr lang="en-US" sz="1300" b="1" dirty="0">
+                <a:solidFill>
+                  <a:schemeClr val="accent1"/>
+                </a:solidFill>
+              </a:rPr>
+              <a:t>500</a:t>
+            </a:r>
+            <a:endParaRPr lang="en-US" sz="1300" dirty="0"/>
           </a:p>
         </p:txBody>
       </p:sp>
@@ -5033,7 +5693,7 @@
                   <a:schemeClr val="tx2"/>
                 </a:solidFill>
               </a:rPr>
-              <a:t>Профиль и безопасность</a:t>
+              <a:t>Демонстрация: каждое действие видно в журнале сервера</a:t>
             </a:r>
             <a:endParaRPr lang="en-US" sz="3200" dirty="0"/>
           </a:p>
@@ -5041,7 +5701,7 @@
       </p:sp>
       <p:pic>
         <p:nvPicPr>
-          <p:cNvPr id="3" name="Скриншот 10_profile" descr="Профиль">    </p:cNvPr>
+          <p:cNvPr id="3" name="Скриншот 26_server_address" descr="Адрес сервера">    </p:cNvPr>
           <p:cNvPicPr>
             <a:picLocks noChangeAspect="1"/>
           </p:cNvPicPr>
@@ -5056,7 +5716,7 @@
         <p:spPr>
           <a:xfrm>
             <a:off x="548640" y="1325880"/>
-            <a:ext cx="2153937" cy="4526280"/>
+            <a:ext cx="2132180" cy="4480560"/>
           </a:xfrm>
           <a:prstGeom prst="rect">
             <a:avLst/>
@@ -5071,8 +5731,8 @@
         </p:nvSpPr>
         <p:spPr>
           <a:xfrm>
-            <a:off x="365760" y="5943600"/>
-            <a:ext cx="2519697" cy="320040"/>
+            <a:off x="365760" y="5897880"/>
+            <a:ext cx="2497940" cy="320040"/>
           </a:xfrm>
           <a:prstGeom prst="rect">
             <a:avLst/>
@@ -5093,7 +5753,7 @@
                   <a:schemeClr val="accent6"/>
                 </a:solidFill>
               </a:rPr>
-              <a:t>Профиль</a:t>
+              <a:t>Адрес сервера</a:t>
             </a:r>
             <a:endParaRPr lang="en-US" sz="1200" dirty="0"/>
           </a:p>
@@ -5101,7 +5761,7 @@
       </p:sp>
       <p:pic>
         <p:nvPicPr>
-          <p:cNvPr id="5" name="Скриншот 25_delete_account" descr="Удаление аккаунта">    </p:cNvPr>
+          <p:cNvPr id="5" name="Скриншот 13_notes" descr="Заметки">    </p:cNvPr>
           <p:cNvPicPr>
             <a:picLocks noChangeAspect="1"/>
           </p:cNvPicPr>
@@ -5115,8 +5775,8 @@
         </p:blipFill>
         <p:spPr>
           <a:xfrm>
-            <a:off x="3068337" y="1325880"/>
-            <a:ext cx="2153937" cy="4526280"/>
+            <a:off x="3000860" y="1325880"/>
+            <a:ext cx="2132180" cy="4480560"/>
           </a:xfrm>
           <a:prstGeom prst="rect">
             <a:avLst/>
@@ -5131,8 +5791,8 @@
         </p:nvSpPr>
         <p:spPr>
           <a:xfrm>
-            <a:off x="2885457" y="5943600"/>
-            <a:ext cx="2519697" cy="320040"/>
+            <a:off x="2817980" y="5897880"/>
+            <a:ext cx="2497940" cy="320040"/>
           </a:xfrm>
           <a:prstGeom prst="rect">
             <a:avLst/>
@@ -5153,7 +5813,7 @@
                   <a:schemeClr val="accent6"/>
                 </a:solidFill>
               </a:rPr>
-              <a:t>Удаление аккаунта</a:t>
+              <a:t>Заметки</a:t>
             </a:r>
             <a:endParaRPr lang="en-US" sz="1200" dirty="0"/>
           </a:p>
@@ -5161,39 +5821,25 @@
       </p:sp>
       <p:sp>
         <p:nvSpPr>
-          <p:cNvPr id="7" name="Text 3"/>
-          <p:cNvSpPr txBox="1"/>
-          <p:nvPr/>
-        </p:nvSpPr>
-        <p:spPr>
-          <a:xfrm>
-            <a:off x="5770914" y="1371600"/>
-            <a:ext cx="5029200" cy="411480"/>
-          </a:xfrm>
-          <a:prstGeom prst="rect">
-            <a:avLst/>
-          </a:prstGeom>
-          <a:noFill/>
-          <a:ln/>
-        </p:spPr>
-        <p:txBody>
-          <a:bodyPr wrap="square" lIns="0" tIns="0" rIns="0" bIns="0" rtlCol="0" anchor="t"/>
-          <a:lstStyle/>
-          <a:p>
-            <a:pPr indent="0" marL="0">
-              <a:buNone/>
-            </a:pPr>
-            <a:r>
-              <a:rPr lang="en-US" sz="2000" b="1" dirty="0">
-                <a:solidFill>
-                  <a:schemeClr val="tx2"/>
-                </a:solidFill>
-              </a:rPr>
-              <a:t>Профиль</a:t>
-            </a:r>
-            <a:endParaRPr lang="en-US" sz="2000" dirty="0"/>
-          </a:p>
-        </p:txBody>
+          <p:cNvPr id="7" name="Журнал сервера"/>
+          <p:cNvSpPr/>
+          <p:nvPr/>
+        </p:nvSpPr>
+        <p:spPr>
+          <a:xfrm>
+            <a:off x="5544520" y="1325880"/>
+            <a:ext cx="6095792" cy="2514600"/>
+          </a:xfrm>
+          <a:prstGeom prst="roundRect">
+            <a:avLst>
+              <a:gd name="adj" fmla="val 4364"/>
+            </a:avLst>
+          </a:prstGeom>
+          <a:solidFill>
+            <a:schemeClr val="tx1"/>
+          </a:solidFill>
+          <a:ln/>
+        </p:spPr>
       </p:sp>
       <p:sp>
         <p:nvSpPr>
@@ -5203,8 +5849,8 @@
         </p:nvSpPr>
         <p:spPr>
           <a:xfrm>
-            <a:off x="5770914" y="1828800"/>
-            <a:ext cx="5869398" cy="1737360"/>
+            <a:off x="5773120" y="1463040"/>
+            <a:ext cx="5638592" cy="274320"/>
           </a:xfrm>
           <a:prstGeom prst="rect">
             <a:avLst/>
@@ -5216,134 +5862,178 @@
           <a:bodyPr wrap="square" lIns="0" tIns="0" rIns="0" bIns="0" rtlCol="0" anchor="t"/>
           <a:lstStyle/>
           <a:p>
-            <a:pPr marL="342900" indent="-342900">
+            <a:pPr indent="0" marL="0">
+              <a:buNone/>
+            </a:pPr>
+            <a:r>
+              <a:rPr lang="en-US" sz="1200" b="1" spc="100" kern="0" dirty="0">
+                <a:solidFill>
+                  <a:schemeClr val="accent4"/>
+                </a:solidFill>
+              </a:rPr>
+              <a:t>ОКНО СЕРВЕРА НА НОУТБУКЕ</a:t>
+            </a:r>
+            <a:endParaRPr lang="en-US" sz="1200" dirty="0"/>
+          </a:p>
+        </p:txBody>
+      </p:sp>
+      <p:sp>
+        <p:nvSpPr>
+          <p:cNvPr id="9" name="Text 5"/>
+          <p:cNvSpPr txBox="1"/>
+          <p:nvPr/>
+        </p:nvSpPr>
+        <p:spPr>
+          <a:xfrm>
+            <a:off x="5773120" y="1828800"/>
+            <a:ext cx="5638592" cy="1874520"/>
+          </a:xfrm>
+          <a:prstGeom prst="rect">
+            <a:avLst/>
+          </a:prstGeom>
+          <a:noFill/>
+          <a:ln/>
+        </p:spPr>
+        <p:txBody>
+          <a:bodyPr wrap="square" lIns="0" tIns="0" rIns="0" bIns="0" rtlCol="0" anchor="t"/>
+          <a:lstStyle/>
+          <a:p>
+            <a:pPr indent="0" marL="0">
               <a:spcAft>
-                <a:spcPts val="600"/>
+                <a:spcPts val="200"/>
               </a:spcAft>
-              <a:buSzPct val="100000"/>
-              <a:buChar char="•"/>
-            </a:pPr>
-            <a:r>
-              <a:rPr lang="en-US" sz="1500" dirty="0">
-                <a:solidFill>
-                  <a:schemeClr val="tx1"/>
-                </a:solidFill>
-              </a:rPr>
-              <a:t>Редактирование имени, email и цвета аватара</a:t>
-            </a:r>
-            <a:endParaRPr lang="en-US" sz="1500" dirty="0"/>
-          </a:p>
-          <a:p>
-            <a:pPr marL="342900" indent="-342900">
+              <a:buNone/>
+            </a:pPr>
+            <a:r>
+              <a:rPr lang="en-US" sz="1400" dirty="0">
+                <a:solidFill>
+                  <a:schemeClr val="bg1"/>
+                </a:solidFill>
+                <a:latin typeface="Courier New" pitchFamily="34" charset="0"/>
+                <a:ea typeface="Courier New" pitchFamily="34" charset="-122"/>
+                <a:cs typeface="Courier New" pitchFamily="34" charset="-120"/>
+              </a:rPr>
+              <a:t>POST   /api/auth/login  → 200</a:t>
+            </a:r>
+            <a:endParaRPr lang="en-US" sz="1400" dirty="0"/>
+          </a:p>
+          <a:p>
+            <a:pPr indent="0" marL="0">
               <a:spcAft>
-                <a:spcPts val="600"/>
+                <a:spcPts val="200"/>
               </a:spcAft>
-              <a:buSzPct val="100000"/>
-              <a:buChar char="•"/>
-            </a:pPr>
-            <a:r>
-              <a:rPr lang="en-US" sz="1500" dirty="0">
-                <a:solidFill>
-                  <a:schemeClr val="tx1"/>
-                </a:solidFill>
-              </a:rPr>
-              <a:t>Смена пароля с проверкой текущего</a:t>
-            </a:r>
-            <a:endParaRPr lang="en-US" sz="1500" dirty="0"/>
-          </a:p>
-          <a:p>
-            <a:pPr marL="342900" indent="-342900">
+              <a:buNone/>
+            </a:pPr>
+            <a:r>
+              <a:rPr lang="en-US" sz="1400" dirty="0">
+                <a:solidFill>
+                  <a:schemeClr val="bg1"/>
+                </a:solidFill>
+                <a:latin typeface="Courier New" pitchFamily="34" charset="0"/>
+                <a:ea typeface="Courier New" pitchFamily="34" charset="-122"/>
+                <a:cs typeface="Courier New" pitchFamily="34" charset="-120"/>
+              </a:rPr>
+              <a:t>POST   /api/notes       → 201</a:t>
+            </a:r>
+            <a:endParaRPr lang="en-US" sz="1400" dirty="0"/>
+          </a:p>
+          <a:p>
+            <a:pPr indent="0" marL="0">
               <a:spcAft>
-                <a:spcPts val="600"/>
+                <a:spcPts val="200"/>
               </a:spcAft>
-              <a:buSzPct val="100000"/>
-              <a:buChar char="•"/>
-            </a:pPr>
-            <a:r>
-              <a:rPr lang="en-US" sz="1500" dirty="0">
-                <a:solidFill>
-                  <a:schemeClr val="tx1"/>
-                </a:solidFill>
-              </a:rPr>
-              <a:t>Тема оформления и ежедневное напоминание</a:t>
-            </a:r>
-            <a:endParaRPr lang="en-US" sz="1500" dirty="0"/>
-          </a:p>
-          <a:p>
-            <a:pPr marL="342900" indent="-342900">
+              <a:buNone/>
+            </a:pPr>
+            <a:r>
+              <a:rPr lang="en-US" sz="1400" dirty="0">
+                <a:solidFill>
+                  <a:schemeClr val="bg1"/>
+                </a:solidFill>
+                <a:latin typeface="Courier New" pitchFamily="34" charset="0"/>
+                <a:ea typeface="Courier New" pitchFamily="34" charset="-122"/>
+                <a:cs typeface="Courier New" pitchFamily="34" charset="-120"/>
+              </a:rPr>
+              <a:t>PUT    /api/notes/1     → 204</a:t>
+            </a:r>
+            <a:endParaRPr lang="en-US" sz="1400" dirty="0"/>
+          </a:p>
+          <a:p>
+            <a:pPr indent="0" marL="0">
               <a:spcAft>
-                <a:spcPts val="600"/>
+                <a:spcPts val="200"/>
               </a:spcAft>
-              <a:buSzPct val="100000"/>
-              <a:buChar char="•"/>
-            </a:pPr>
-            <a:r>
-              <a:rPr lang="en-US" sz="1500" dirty="0">
-                <a:solidFill>
-                  <a:schemeClr val="tx1"/>
-                </a:solidFill>
-              </a:rPr>
-              <a:t>Удаление аккаунта с подтверждением паролем</a:t>
-            </a:r>
-            <a:endParaRPr lang="en-US" sz="1500" dirty="0"/>
-          </a:p>
-        </p:txBody>
-      </p:sp>
-      <p:sp>
-        <p:nvSpPr>
-          <p:cNvPr id="9" name="Безопасность"/>
+              <a:buNone/>
+            </a:pPr>
+            <a:r>
+              <a:rPr lang="en-US" sz="1400" dirty="0">
+                <a:solidFill>
+                  <a:schemeClr val="bg1"/>
+                </a:solidFill>
+                <a:latin typeface="Courier New" pitchFamily="34" charset="0"/>
+                <a:ea typeface="Courier New" pitchFamily="34" charset="-122"/>
+                <a:cs typeface="Courier New" pitchFamily="34" charset="-120"/>
+              </a:rPr>
+              <a:t>DELETE /api/notes/1     → 204</a:t>
+            </a:r>
+            <a:endParaRPr lang="en-US" sz="1400" dirty="0"/>
+          </a:p>
+          <a:p>
+            <a:pPr indent="0" marL="0">
+              <a:spcAft>
+                <a:spcPts val="200"/>
+              </a:spcAft>
+              <a:buNone/>
+            </a:pPr>
+            <a:r>
+              <a:rPr lang="en-US" sz="1400" dirty="0">
+                <a:solidFill>
+                  <a:schemeClr val="accent4"/>
+                </a:solidFill>
+                <a:latin typeface="Courier New" pitchFamily="34" charset="0"/>
+                <a:ea typeface="Courier New" pitchFamily="34" charset="-122"/>
+                <a:cs typeface="Courier New" pitchFamily="34" charset="-120"/>
+              </a:rPr>
+              <a:t>GET    /api/notes       → 401</a:t>
+            </a:r>
+            <a:endParaRPr lang="en-US" sz="1400" dirty="0"/>
+          </a:p>
+        </p:txBody>
+      </p:sp>
+      <p:sp>
+        <p:nvSpPr>
+          <p:cNvPr id="10" name="Номер 1"/>
           <p:cNvSpPr/>
           <p:nvPr/>
         </p:nvSpPr>
         <p:spPr>
           <a:xfrm>
-            <a:off x="5770914" y="3749040"/>
-            <a:ext cx="5869398" cy="2103120"/>
-          </a:xfrm>
-          <a:prstGeom prst="roundRect">
-            <a:avLst>
-              <a:gd name="adj" fmla="val 5217"/>
-            </a:avLst>
+            <a:off x="5544520" y="4069080"/>
+            <a:ext cx="384048" cy="384048"/>
+          </a:xfrm>
+          <a:prstGeom prst="ellipse">
+            <a:avLst/>
           </a:prstGeom>
           <a:solidFill>
-            <a:schemeClr val="tx2"/>
+            <a:schemeClr val="accent1"/>
           </a:solidFill>
           <a:ln/>
         </p:spPr>
-      </p:sp>
-      <p:sp>
-        <p:nvSpPr>
-          <p:cNvPr id="10" name="Text 6"/>
-          <p:cNvSpPr txBox="1"/>
-          <p:nvPr/>
-        </p:nvSpPr>
-        <p:spPr>
-          <a:xfrm>
-            <a:off x="6045234" y="3931920"/>
-            <a:ext cx="2743200" cy="731520"/>
-          </a:xfrm>
-          <a:prstGeom prst="rect">
-            <a:avLst/>
-          </a:prstGeom>
-          <a:noFill/>
-          <a:ln/>
-        </p:spPr>
-        <p:txBody>
-          <a:bodyPr wrap="square" lIns="0" tIns="0" rIns="0" bIns="0" rtlCol="0" anchor="t"/>
-          <a:lstStyle/>
-          <a:p>
-            <a:pPr indent="0" marL="0">
-              <a:buNone/>
-            </a:pPr>
-            <a:r>
-              <a:rPr lang="en-US" sz="4000" b="1" dirty="0">
-                <a:solidFill>
-                  <a:schemeClr val="accent4"/>
-                </a:solidFill>
-              </a:rPr>
-              <a:t>100 000</a:t>
-            </a:r>
-            <a:endParaRPr lang="en-US" sz="4000" dirty="0"/>
+        <p:txBody>
+          <a:bodyPr wrap="square" lIns="0" tIns="0" rIns="0" bIns="0" rtlCol="0" anchor="ctr"/>
+          <a:lstStyle/>
+          <a:p>
+            <a:pPr algn="ctr" indent="0" marL="0">
+              <a:buNone/>
+            </a:pPr>
+            <a:r>
+              <a:rPr lang="en-US" sz="1300" b="1" dirty="0">
+                <a:solidFill>
+                  <a:schemeClr val="bg1"/>
+                </a:solidFill>
+              </a:rPr>
+              <a:t>1</a:t>
+            </a:r>
+            <a:endParaRPr lang="en-US" sz="1300" dirty="0"/>
           </a:p>
         </p:txBody>
       </p:sp>
@@ -5355,8 +6045,8 @@
         </p:nvSpPr>
         <p:spPr>
           <a:xfrm>
-            <a:off x="6045234" y="4663440"/>
-            <a:ext cx="2926080" cy="365760"/>
+            <a:off x="6093160" y="4069080"/>
+            <a:ext cx="5547152" cy="384048"/>
           </a:xfrm>
           <a:prstGeom prst="rect">
             <a:avLst/>
@@ -5365,19 +6055,93 @@
           <a:ln/>
         </p:spPr>
         <p:txBody>
-          <a:bodyPr wrap="square" lIns="0" tIns="0" rIns="0" bIns="0" rtlCol="0" anchor="t"/>
+          <a:bodyPr wrap="square" lIns="0" tIns="0" rIns="0" bIns="0" rtlCol="0" anchor="ctr"/>
           <a:lstStyle/>
           <a:p>
             <a:pPr indent="0" marL="0">
               <a:buNone/>
             </a:pPr>
             <a:r>
-              <a:rPr lang="en-US" sz="1400" b="1" dirty="0">
+              <a:rPr lang="en-US" sz="1400" dirty="0">
+                <a:solidFill>
+                  <a:schemeClr val="tx1"/>
+                </a:solidFill>
+              </a:rPr>
+              <a:t>Запустить сервер, телефон в той же сети Wi-Fi</a:t>
+            </a:r>
+            <a:endParaRPr lang="en-US" sz="1400" dirty="0"/>
+          </a:p>
+        </p:txBody>
+      </p:sp>
+      <p:sp>
+        <p:nvSpPr>
+          <p:cNvPr id="12" name="Номер 2"/>
+          <p:cNvSpPr/>
+          <p:nvPr/>
+        </p:nvSpPr>
+        <p:spPr>
+          <a:xfrm>
+            <a:off x="5544520" y="4599432"/>
+            <a:ext cx="384048" cy="384048"/>
+          </a:xfrm>
+          <a:prstGeom prst="ellipse">
+            <a:avLst/>
+          </a:prstGeom>
+          <a:solidFill>
+            <a:schemeClr val="accent1"/>
+          </a:solidFill>
+          <a:ln/>
+        </p:spPr>
+        <p:txBody>
+          <a:bodyPr wrap="square" lIns="0" tIns="0" rIns="0" bIns="0" rtlCol="0" anchor="ctr"/>
+          <a:lstStyle/>
+          <a:p>
+            <a:pPr algn="ctr" indent="0" marL="0">
+              <a:buNone/>
+            </a:pPr>
+            <a:r>
+              <a:rPr lang="en-US" sz="1300" b="1" dirty="0">
                 <a:solidFill>
                   <a:schemeClr val="bg1"/>
                 </a:solidFill>
               </a:rPr>
-              <a:t>итераций PBKDF2-HMAC-SHA256</a:t>
+              <a:t>2</a:t>
+            </a:r>
+            <a:endParaRPr lang="en-US" sz="1300" dirty="0"/>
+          </a:p>
+        </p:txBody>
+      </p:sp>
+      <p:sp>
+        <p:nvSpPr>
+          <p:cNvPr id="13" name="Text 9"/>
+          <p:cNvSpPr txBox="1"/>
+          <p:nvPr/>
+        </p:nvSpPr>
+        <p:spPr>
+          <a:xfrm>
+            <a:off x="6093160" y="4599432"/>
+            <a:ext cx="5547152" cy="384048"/>
+          </a:xfrm>
+          <a:prstGeom prst="rect">
+            <a:avLst/>
+          </a:prstGeom>
+          <a:noFill/>
+          <a:ln/>
+        </p:spPr>
+        <p:txBody>
+          <a:bodyPr wrap="square" lIns="0" tIns="0" rIns="0" bIns="0" rtlCol="0" anchor="ctr"/>
+          <a:lstStyle/>
+          <a:p>
+            <a:pPr indent="0" marL="0">
+              <a:buNone/>
+            </a:pPr>
+            <a:r>
+              <a:rPr lang="en-US" sz="1400" dirty="0">
+                <a:solidFill>
+                  <a:schemeClr val="tx1"/>
+                </a:solidFill>
+              </a:rPr>
+              <a:t>Создать, изменить и удалить заметку</a:t>
             </a:r>
             <a:endParaRPr lang="en-US" sz="1400" dirty="0"/>
           </a:p>
@@ -5385,14 +6149,52 @@
       </p:sp>
       <p:sp>
         <p:nvSpPr>
-          <p:cNvPr id="12" name="Text 8"/>
+          <p:cNvPr id="14" name="Номер 3"/>
+          <p:cNvSpPr/>
+          <p:nvPr/>
+        </p:nvSpPr>
+        <p:spPr>
+          <a:xfrm>
+            <a:off x="5544520" y="5129784"/>
+            <a:ext cx="384048" cy="384048"/>
+          </a:xfrm>
+          <a:prstGeom prst="ellipse">
+            <a:avLst/>
+          </a:prstGeom>
+          <a:solidFill>
+            <a:schemeClr val="accent1"/>
+          </a:solidFill>
+          <a:ln/>
+        </p:spPr>
+        <p:txBody>
+          <a:bodyPr wrap="square" lIns="0" tIns="0" rIns="0" bIns="0" rtlCol="0" anchor="ctr"/>
+          <a:lstStyle/>
+          <a:p>
+            <a:pPr algn="ctr" indent="0" marL="0">
+              <a:buNone/>
+            </a:pPr>
+            <a:r>
+              <a:rPr lang="en-US" sz="1300" b="1" dirty="0">
+                <a:solidFill>
+                  <a:schemeClr val="bg1"/>
+                </a:solidFill>
+              </a:rPr>
+              <a:t>3</a:t>
+            </a:r>
+            <a:endParaRPr lang="en-US" sz="1300" dirty="0"/>
+          </a:p>
+        </p:txBody>
+      </p:sp>
+      <p:sp>
+        <p:nvSpPr>
+          <p:cNvPr id="15" name="Text 11"/>
           <p:cNvSpPr txBox="1"/>
           <p:nvPr/>
         </p:nvSpPr>
         <p:spPr>
           <a:xfrm>
-            <a:off x="8879874" y="3977640"/>
-            <a:ext cx="2531838" cy="1737360"/>
+            <a:off x="6093160" y="5129784"/>
+            <a:ext cx="5547152" cy="384048"/>
           </a:xfrm>
           <a:prstGeom prst="rect">
             <a:avLst/>
@@ -5408,14 +6210,88 @@
               <a:buNone/>
             </a:pPr>
             <a:r>
-              <a:rPr lang="en-US" sz="1300" dirty="0">
+              <a:rPr lang="en-US" sz="1400" dirty="0">
+                <a:solidFill>
+                  <a:schemeClr val="tx1"/>
+                </a:solidFill>
+              </a:rPr>
+              <a:t>В журнале: POST → 201, PUT и DELETE → 204</a:t>
+            </a:r>
+            <a:endParaRPr lang="en-US" sz="1400" dirty="0"/>
+          </a:p>
+        </p:txBody>
+      </p:sp>
+      <p:sp>
+        <p:nvSpPr>
+          <p:cNvPr id="16" name="Номер 4"/>
+          <p:cNvSpPr/>
+          <p:nvPr/>
+        </p:nvSpPr>
+        <p:spPr>
+          <a:xfrm>
+            <a:off x="5544520" y="5660136"/>
+            <a:ext cx="384048" cy="384048"/>
+          </a:xfrm>
+          <a:prstGeom prst="ellipse">
+            <a:avLst/>
+          </a:prstGeom>
+          <a:solidFill>
+            <a:schemeClr val="accent1"/>
+          </a:solidFill>
+          <a:ln/>
+        </p:spPr>
+        <p:txBody>
+          <a:bodyPr wrap="square" lIns="0" tIns="0" rIns="0" bIns="0" rtlCol="0" anchor="ctr"/>
+          <a:lstStyle/>
+          <a:p>
+            <a:pPr algn="ctr" indent="0" marL="0">
+              <a:buNone/>
+            </a:pPr>
+            <a:r>
+              <a:rPr lang="en-US" sz="1300" b="1" dirty="0">
                 <a:solidFill>
                   <a:schemeClr val="bg1"/>
                 </a:solidFill>
               </a:rPr>
-              <a:t>Соль 16 байт. Старые хэши SHA-256 пересчитываются при входе. Расчёт в фоновом изоляте не тормозит интерфейс.</a:t>
+              <a:t>4</a:t>
             </a:r>
             <a:endParaRPr lang="en-US" sz="1300" dirty="0"/>
+          </a:p>
+        </p:txBody>
+      </p:sp>
+      <p:sp>
+        <p:nvSpPr>
+          <p:cNvPr id="17" name="Text 13"/>
+          <p:cNvSpPr txBox="1"/>
+          <p:nvPr/>
+        </p:nvSpPr>
+        <p:spPr>
+          <a:xfrm>
+            <a:off x="6093160" y="5660136"/>
+            <a:ext cx="5547152" cy="384048"/>
+          </a:xfrm>
+          <a:prstGeom prst="rect">
+            <a:avLst/>
+          </a:prstGeom>
+          <a:noFill/>
+          <a:ln/>
+        </p:spPr>
+        <p:txBody>
+          <a:bodyPr wrap="square" lIns="0" tIns="0" rIns="0" bIns="0" rtlCol="0" anchor="ctr"/>
+          <a:lstStyle/>
+          <a:p>
+            <a:pPr indent="0" marL="0">
+              <a:buNone/>
+            </a:pPr>
+            <a:r>
+              <a:rPr lang="en-US" sz="1400" dirty="0">
+                <a:solidFill>
+                  <a:schemeClr val="tx1"/>
+                </a:solidFill>
+              </a:rPr>
+              <a:t>Выключить сервер: «Нет связи с сервером»</a:t>
+            </a:r>
+            <a:endParaRPr lang="en-US" sz="1400" dirty="0"/>
           </a:p>
         </p:txBody>
       </p:sp>
@@ -5521,7 +6397,7 @@
                   <a:schemeClr val="tx2"/>
                 </a:solidFill>
               </a:rPr>
-              <a:t>UI/UX: одна система на телефоне и компьютере</a:t>
+              <a:t>Профиль и безопасность</a:t>
             </a:r>
             <a:endParaRPr lang="en-US" sz="3200" dirty="0"/>
           </a:p>
@@ -5529,7 +6405,7 @@
       </p:sp>
       <p:pic>
         <p:nvPicPr>
-          <p:cNvPr id="3" name="Скриншот Windows" descr="Главная в окне Windows">    </p:cNvPr>
+          <p:cNvPr id="3" name="Скриншот 10_profile" descr="Профиль">    </p:cNvPr>
           <p:cNvPicPr>
             <a:picLocks noChangeAspect="1"/>
           </p:cNvPicPr>
@@ -5544,7 +6420,7 @@
         <p:spPr>
           <a:xfrm>
             <a:off x="548640" y="1325880"/>
-            <a:ext cx="6035040" cy="3805345"/>
+            <a:ext cx="2153937" cy="4526280"/>
           </a:xfrm>
           <a:prstGeom prst="rect">
             <a:avLst/>
@@ -5559,8 +6435,8 @@
         </p:nvSpPr>
         <p:spPr>
           <a:xfrm>
-            <a:off x="548640" y="5314105"/>
-            <a:ext cx="6583680" cy="914400"/>
+            <a:off x="365760" y="5943600"/>
+            <a:ext cx="2519697" cy="320040"/>
           </a:xfrm>
           <a:prstGeom prst="rect">
             <a:avLst/>
@@ -5572,64 +6448,24 @@
           <a:bodyPr wrap="square" lIns="0" tIns="0" rIns="0" bIns="0" rtlCol="0" anchor="t"/>
           <a:lstStyle/>
           <a:p>
-            <a:pPr marL="342900" indent="-342900">
-              <a:spcAft>
-                <a:spcPts val="200"/>
-              </a:spcAft>
-              <a:buSzPct val="100000"/>
-              <a:buChar char="•"/>
-            </a:pPr>
-            <a:r>
-              <a:rPr lang="en-US" sz="1300" dirty="0">
-                <a:solidFill>
-                  <a:schemeClr val="tx1"/>
-                </a:solidFill>
-              </a:rPr>
-              <a:t>Material 3, тёмно-синий и оранжевый</a:t>
-            </a:r>
-            <a:endParaRPr lang="en-US" sz="1300" dirty="0"/>
-          </a:p>
-          <a:p>
-            <a:pPr marL="342900" indent="-342900">
-              <a:spcAft>
-                <a:spcPts val="200"/>
-              </a:spcAft>
-              <a:buSzPct val="100000"/>
-              <a:buChar char="•"/>
-            </a:pPr>
-            <a:r>
-              <a:rPr lang="en-US" sz="1300" dirty="0">
-                <a:solidFill>
-                  <a:schemeClr val="tx1"/>
-                </a:solidFill>
-              </a:rPr>
-              <a:t>Боковая панель вместо нижней от 840 px</a:t>
-            </a:r>
-            <a:endParaRPr lang="en-US" sz="1300" dirty="0"/>
-          </a:p>
-          <a:p>
-            <a:pPr marL="342900" indent="-342900">
-              <a:spcAft>
-                <a:spcPts val="200"/>
-              </a:spcAft>
-              <a:buSzPct val="100000"/>
-              <a:buChar char="•"/>
-            </a:pPr>
-            <a:r>
-              <a:rPr lang="en-US" sz="1300" dirty="0">
-                <a:solidFill>
-                  <a:schemeClr val="tx1"/>
-                </a:solidFill>
-              </a:rPr>
-              <a:t>Пустые состояния и подтверждение необратимых действий</a:t>
-            </a:r>
-            <a:endParaRPr lang="en-US" sz="1300" dirty="0"/>
+            <a:pPr algn="ctr" indent="0" marL="0">
+              <a:buNone/>
+            </a:pPr>
+            <a:r>
+              <a:rPr lang="en-US" sz="1200" dirty="0">
+                <a:solidFill>
+                  <a:schemeClr val="accent6"/>
+                </a:solidFill>
+              </a:rPr>
+              <a:t>Профиль</a:t>
+            </a:r>
+            <a:endParaRPr lang="en-US" sz="1200" dirty="0"/>
           </a:p>
         </p:txBody>
       </p:sp>
       <p:pic>
         <p:nvPicPr>
-          <p:cNvPr id="5" name="Скриншот 20_home_dark" descr="Тёмная тема">    </p:cNvPr>
+          <p:cNvPr id="5" name="Скриншот 25_delete_account" descr="Удаление аккаунта">    </p:cNvPr>
           <p:cNvPicPr>
             <a:picLocks noChangeAspect="1"/>
           </p:cNvPicPr>
@@ -5643,8 +6479,8 @@
         </p:blipFill>
         <p:spPr>
           <a:xfrm>
-            <a:off x="7447537" y="1325880"/>
-            <a:ext cx="1936368" cy="4069080"/>
+            <a:off x="3068337" y="1325880"/>
+            <a:ext cx="2153937" cy="4526280"/>
           </a:xfrm>
           <a:prstGeom prst="rect">
             <a:avLst/>
@@ -5659,8 +6495,8 @@
         </p:nvSpPr>
         <p:spPr>
           <a:xfrm>
-            <a:off x="7264657" y="5486400"/>
-            <a:ext cx="2302128" cy="320040"/>
+            <a:off x="2885457" y="5943600"/>
+            <a:ext cx="2519697" cy="320040"/>
           </a:xfrm>
           <a:prstGeom prst="rect">
             <a:avLst/>
@@ -5681,46 +6517,22 @@
                   <a:schemeClr val="accent6"/>
                 </a:solidFill>
               </a:rPr>
-              <a:t>Тёмная тема</a:t>
+              <a:t>Удаление аккаунта</a:t>
             </a:r>
             <a:endParaRPr lang="en-US" sz="1200" dirty="0"/>
           </a:p>
         </p:txBody>
       </p:sp>
-      <p:pic>
-        <p:nvPicPr>
-          <p:cNvPr id="7" name="Скриншот 21_stats_dark" descr="Графики">    </p:cNvPr>
-          <p:cNvPicPr>
-            <a:picLocks noChangeAspect="1"/>
-          </p:cNvPicPr>
-          <p:nvPr/>
-        </p:nvPicPr>
-        <p:blipFill>
-          <a:blip r:embed="rId3"/>
-          <a:stretch>
-            <a:fillRect/>
-          </a:stretch>
-        </p:blipFill>
-        <p:spPr>
-          <a:xfrm>
-            <a:off x="9703944" y="1325880"/>
-            <a:ext cx="1936368" cy="4069080"/>
-          </a:xfrm>
-          <a:prstGeom prst="rect">
-            <a:avLst/>
-          </a:prstGeom>
-        </p:spPr>
-      </p:pic>
-      <p:sp>
-        <p:nvSpPr>
-          <p:cNvPr id="8" name="Text 3"/>
+      <p:sp>
+        <p:nvSpPr>
+          <p:cNvPr id="7" name="Text 3"/>
           <p:cNvSpPr txBox="1"/>
           <p:nvPr/>
         </p:nvSpPr>
         <p:spPr>
           <a:xfrm>
-            <a:off x="9521064" y="5486400"/>
-            <a:ext cx="2302128" cy="320040"/>
+            <a:off x="5770914" y="1371600"/>
+            <a:ext cx="5029200" cy="411480"/>
           </a:xfrm>
           <a:prstGeom prst="rect">
             <a:avLst/>
@@ -5732,18 +6544,242 @@
           <a:bodyPr wrap="square" lIns="0" tIns="0" rIns="0" bIns="0" rtlCol="0" anchor="t"/>
           <a:lstStyle/>
           <a:p>
-            <a:pPr algn="ctr" indent="0" marL="0">
-              <a:buNone/>
-            </a:pPr>
-            <a:r>
-              <a:rPr lang="en-US" sz="1200" dirty="0">
-                <a:solidFill>
-                  <a:schemeClr val="accent6"/>
-                </a:solidFill>
-              </a:rPr>
-              <a:t>Графики</a:t>
-            </a:r>
-            <a:endParaRPr lang="en-US" sz="1200" dirty="0"/>
+            <a:pPr indent="0" marL="0">
+              <a:buNone/>
+            </a:pPr>
+            <a:r>
+              <a:rPr lang="en-US" sz="2000" b="1" dirty="0">
+                <a:solidFill>
+                  <a:schemeClr val="tx2"/>
+                </a:solidFill>
+              </a:rPr>
+              <a:t>Профиль</a:t>
+            </a:r>
+            <a:endParaRPr lang="en-US" sz="2000" dirty="0"/>
+          </a:p>
+        </p:txBody>
+      </p:sp>
+      <p:sp>
+        <p:nvSpPr>
+          <p:cNvPr id="8" name="Text 4"/>
+          <p:cNvSpPr txBox="1"/>
+          <p:nvPr/>
+        </p:nvSpPr>
+        <p:spPr>
+          <a:xfrm>
+            <a:off x="5770914" y="1828800"/>
+            <a:ext cx="5869398" cy="1737360"/>
+          </a:xfrm>
+          <a:prstGeom prst="rect">
+            <a:avLst/>
+          </a:prstGeom>
+          <a:noFill/>
+          <a:ln/>
+        </p:spPr>
+        <p:txBody>
+          <a:bodyPr wrap="square" lIns="0" tIns="0" rIns="0" bIns="0" rtlCol="0" anchor="t"/>
+          <a:lstStyle/>
+          <a:p>
+            <a:pPr marL="342900" indent="-342900">
+              <a:spcAft>
+                <a:spcPts val="600"/>
+              </a:spcAft>
+              <a:buSzPct val="100000"/>
+              <a:buChar char="•"/>
+            </a:pPr>
+            <a:r>
+              <a:rPr lang="en-US" sz="1500" dirty="0">
+                <a:solidFill>
+                  <a:schemeClr val="tx1"/>
+                </a:solidFill>
+              </a:rPr>
+              <a:t>Редактирование имени, email и цвета аватара</a:t>
+            </a:r>
+            <a:endParaRPr lang="en-US" sz="1500" dirty="0"/>
+          </a:p>
+          <a:p>
+            <a:pPr marL="342900" indent="-342900">
+              <a:spcAft>
+                <a:spcPts val="600"/>
+              </a:spcAft>
+              <a:buSzPct val="100000"/>
+              <a:buChar char="•"/>
+            </a:pPr>
+            <a:r>
+              <a:rPr lang="en-US" sz="1500" dirty="0">
+                <a:solidFill>
+                  <a:schemeClr val="tx1"/>
+                </a:solidFill>
+              </a:rPr>
+              <a:t>Смена пароля с проверкой текущего</a:t>
+            </a:r>
+            <a:endParaRPr lang="en-US" sz="1500" dirty="0"/>
+          </a:p>
+          <a:p>
+            <a:pPr marL="342900" indent="-342900">
+              <a:spcAft>
+                <a:spcPts val="600"/>
+              </a:spcAft>
+              <a:buSzPct val="100000"/>
+              <a:buChar char="•"/>
+            </a:pPr>
+            <a:r>
+              <a:rPr lang="en-US" sz="1500" dirty="0">
+                <a:solidFill>
+                  <a:schemeClr val="tx1"/>
+                </a:solidFill>
+              </a:rPr>
+              <a:t>Тема оформления и ежедневное напоминание</a:t>
+            </a:r>
+            <a:endParaRPr lang="en-US" sz="1500" dirty="0"/>
+          </a:p>
+          <a:p>
+            <a:pPr marL="342900" indent="-342900">
+              <a:spcAft>
+                <a:spcPts val="600"/>
+              </a:spcAft>
+              <a:buSzPct val="100000"/>
+              <a:buChar char="•"/>
+            </a:pPr>
+            <a:r>
+              <a:rPr lang="en-US" sz="1500" dirty="0">
+                <a:solidFill>
+                  <a:schemeClr val="tx1"/>
+                </a:solidFill>
+              </a:rPr>
+              <a:t>Удаление аккаунта с подтверждением паролем</a:t>
+            </a:r>
+            <a:endParaRPr lang="en-US" sz="1500" dirty="0"/>
+          </a:p>
+        </p:txBody>
+      </p:sp>
+      <p:sp>
+        <p:nvSpPr>
+          <p:cNvPr id="9" name="Безопасность"/>
+          <p:cNvSpPr/>
+          <p:nvPr/>
+        </p:nvSpPr>
+        <p:spPr>
+          <a:xfrm>
+            <a:off x="5770914" y="3749040"/>
+            <a:ext cx="5869398" cy="2103120"/>
+          </a:xfrm>
+          <a:prstGeom prst="roundRect">
+            <a:avLst>
+              <a:gd name="adj" fmla="val 5217"/>
+            </a:avLst>
+          </a:prstGeom>
+          <a:solidFill>
+            <a:schemeClr val="tx2"/>
+          </a:solidFill>
+          <a:ln/>
+        </p:spPr>
+      </p:sp>
+      <p:sp>
+        <p:nvSpPr>
+          <p:cNvPr id="10" name="Text 6"/>
+          <p:cNvSpPr txBox="1"/>
+          <p:nvPr/>
+        </p:nvSpPr>
+        <p:spPr>
+          <a:xfrm>
+            <a:off x="6045234" y="3931920"/>
+            <a:ext cx="2743200" cy="731520"/>
+          </a:xfrm>
+          <a:prstGeom prst="rect">
+            <a:avLst/>
+          </a:prstGeom>
+          <a:noFill/>
+          <a:ln/>
+        </p:spPr>
+        <p:txBody>
+          <a:bodyPr wrap="square" lIns="0" tIns="0" rIns="0" bIns="0" rtlCol="0" anchor="t"/>
+          <a:lstStyle/>
+          <a:p>
+            <a:pPr indent="0" marL="0">
+              <a:buNone/>
+            </a:pPr>
+            <a:r>
+              <a:rPr lang="en-US" sz="4000" b="1" dirty="0">
+                <a:solidFill>
+                  <a:schemeClr val="accent4"/>
+                </a:solidFill>
+              </a:rPr>
+              <a:t>100 000</a:t>
+            </a:r>
+            <a:endParaRPr lang="en-US" sz="4000" dirty="0"/>
+          </a:p>
+        </p:txBody>
+      </p:sp>
+      <p:sp>
+        <p:nvSpPr>
+          <p:cNvPr id="11" name="Text 7"/>
+          <p:cNvSpPr txBox="1"/>
+          <p:nvPr/>
+        </p:nvSpPr>
+        <p:spPr>
+          <a:xfrm>
+            <a:off x="6045234" y="4663440"/>
+            <a:ext cx="2926080" cy="365760"/>
+          </a:xfrm>
+          <a:prstGeom prst="rect">
+            <a:avLst/>
+          </a:prstGeom>
+          <a:noFill/>
+          <a:ln/>
+        </p:spPr>
+        <p:txBody>
+          <a:bodyPr wrap="square" lIns="0" tIns="0" rIns="0" bIns="0" rtlCol="0" anchor="t"/>
+          <a:lstStyle/>
+          <a:p>
+            <a:pPr indent="0" marL="0">
+              <a:buNone/>
+            </a:pPr>
+            <a:r>
+              <a:rPr lang="en-US" sz="1400" b="1" dirty="0">
+                <a:solidFill>
+                  <a:schemeClr val="bg1"/>
+                </a:solidFill>
+              </a:rPr>
+              <a:t>итераций PBKDF2-HMAC-SHA256</a:t>
+            </a:r>
+            <a:endParaRPr lang="en-US" sz="1400" dirty="0"/>
+          </a:p>
+        </p:txBody>
+      </p:sp>
+      <p:sp>
+        <p:nvSpPr>
+          <p:cNvPr id="12" name="Text 8"/>
+          <p:cNvSpPr txBox="1"/>
+          <p:nvPr/>
+        </p:nvSpPr>
+        <p:spPr>
+          <a:xfrm>
+            <a:off x="8879874" y="3977640"/>
+            <a:ext cx="2531838" cy="1737360"/>
+          </a:xfrm>
+          <a:prstGeom prst="rect">
+            <a:avLst/>
+          </a:prstGeom>
+          <a:noFill/>
+          <a:ln/>
+        </p:spPr>
+        <p:txBody>
+          <a:bodyPr wrap="square" lIns="0" tIns="0" rIns="0" bIns="0" rtlCol="0" anchor="ctr"/>
+          <a:lstStyle/>
+          <a:p>
+            <a:pPr indent="0" marL="0">
+              <a:buNone/>
+            </a:pPr>
+            <a:r>
+              <a:rPr lang="en-US" sz="1300" dirty="0">
+                <a:solidFill>
+                  <a:schemeClr val="bg1"/>
+                </a:solidFill>
+              </a:rPr>
+              <a:t>Соль 16 байт. Токен входа — 32 случайных байта, в базе только его SHA-256, действует 30 дней, удаляется при выходе.</a:t>
+            </a:r>
+            <a:endParaRPr lang="en-US" sz="1300" dirty="0"/>
           </a:p>
         </p:txBody>
       </p:sp>
@@ -5849,44 +6885,46 @@
                   <a:schemeClr val="tx2"/>
                 </a:solidFill>
               </a:rPr>
-              <a:t>Тестирование: 97 автотестов и 24 исправленные ошибки</a:t>
+              <a:t>UI/UX: одна система на телефоне и компьютере</a:t>
             </a:r>
             <a:endParaRPr lang="en-US" sz="3200" dirty="0"/>
           </a:p>
         </p:txBody>
       </p:sp>
-      <p:sp>
-        <p:nvSpPr>
-          <p:cNvPr id="3" name="Факт модульных и виджет-тестов"/>
-          <p:cNvSpPr/>
-          <p:nvPr/>
-        </p:nvSpPr>
+      <p:pic>
+        <p:nvPicPr>
+          <p:cNvPr id="3" name="Скриншот Windows" descr="Главная в окне Windows">    </p:cNvPr>
+          <p:cNvPicPr>
+            <a:picLocks noChangeAspect="1"/>
+          </p:cNvPicPr>
+          <p:nvPr/>
+        </p:nvPicPr>
+        <p:blipFill>
+          <a:blip r:embed="rId1"/>
+          <a:stretch>
+            <a:fillRect/>
+          </a:stretch>
+        </p:blipFill>
         <p:spPr>
           <a:xfrm>
             <a:off x="548640" y="1325880"/>
-            <a:ext cx="2606040" cy="1463040"/>
-          </a:xfrm>
-          <a:prstGeom prst="roundRect">
-            <a:avLst>
-              <a:gd name="adj" fmla="val 7500"/>
-            </a:avLst>
-          </a:prstGeom>
-          <a:solidFill>
-            <a:schemeClr val="bg2"/>
-          </a:solidFill>
-          <a:ln/>
-        </p:spPr>
-      </p:sp>
-      <p:sp>
-        <p:nvSpPr>
-          <p:cNvPr id="4" name="Text 2"/>
+            <a:ext cx="6035040" cy="3805345"/>
+          </a:xfrm>
+          <a:prstGeom prst="rect">
+            <a:avLst/>
+          </a:prstGeom>
+        </p:spPr>
+      </p:pic>
+      <p:sp>
+        <p:nvSpPr>
+          <p:cNvPr id="4" name="Text 1"/>
           <p:cNvSpPr txBox="1"/>
           <p:nvPr/>
         </p:nvSpPr>
         <p:spPr>
           <a:xfrm>
-            <a:off x="777240" y="1417320"/>
-            <a:ext cx="2194560" cy="777240"/>
+            <a:off x="548640" y="5314105"/>
+            <a:ext cx="6583680" cy="914400"/>
           </a:xfrm>
           <a:prstGeom prst="rect">
             <a:avLst/>
@@ -5898,31 +6936,95 @@
           <a:bodyPr wrap="square" lIns="0" tIns="0" rIns="0" bIns="0" rtlCol="0" anchor="t"/>
           <a:lstStyle/>
           <a:p>
-            <a:pPr indent="0" marL="0">
-              <a:buNone/>
-            </a:pPr>
-            <a:r>
-              <a:rPr lang="en-US" sz="4400" b="1" dirty="0">
-                <a:solidFill>
-                  <a:schemeClr val="accent1"/>
-                </a:solidFill>
-              </a:rPr>
-              <a:t>97</a:t>
-            </a:r>
-            <a:endParaRPr lang="en-US" sz="4400" dirty="0"/>
-          </a:p>
-        </p:txBody>
-      </p:sp>
-      <p:sp>
-        <p:nvSpPr>
-          <p:cNvPr id="5" name="Text 3"/>
+            <a:pPr marL="342900" indent="-342900">
+              <a:spcAft>
+                <a:spcPts val="200"/>
+              </a:spcAft>
+              <a:buSzPct val="100000"/>
+              <a:buChar char="•"/>
+            </a:pPr>
+            <a:r>
+              <a:rPr lang="en-US" sz="1300" dirty="0">
+                <a:solidFill>
+                  <a:schemeClr val="tx1"/>
+                </a:solidFill>
+              </a:rPr>
+              <a:t>Material 3, тёмно-синий и оранжевый</a:t>
+            </a:r>
+            <a:endParaRPr lang="en-US" sz="1300" dirty="0"/>
+          </a:p>
+          <a:p>
+            <a:pPr marL="342900" indent="-342900">
+              <a:spcAft>
+                <a:spcPts val="200"/>
+              </a:spcAft>
+              <a:buSzPct val="100000"/>
+              <a:buChar char="•"/>
+            </a:pPr>
+            <a:r>
+              <a:rPr lang="en-US" sz="1300" dirty="0">
+                <a:solidFill>
+                  <a:schemeClr val="tx1"/>
+                </a:solidFill>
+              </a:rPr>
+              <a:t>Боковая панель вместо нижней от 840 px</a:t>
+            </a:r>
+            <a:endParaRPr lang="en-US" sz="1300" dirty="0"/>
+          </a:p>
+          <a:p>
+            <a:pPr marL="342900" indent="-342900">
+              <a:spcAft>
+                <a:spcPts val="200"/>
+              </a:spcAft>
+              <a:buSzPct val="100000"/>
+              <a:buChar char="•"/>
+            </a:pPr>
+            <a:r>
+              <a:rPr lang="en-US" sz="1300" dirty="0">
+                <a:solidFill>
+                  <a:schemeClr val="tx1"/>
+                </a:solidFill>
+              </a:rPr>
+              <a:t>Пустые состояния и подтверждение необратимых действий</a:t>
+            </a:r>
+            <a:endParaRPr lang="en-US" sz="1300" dirty="0"/>
+          </a:p>
+        </p:txBody>
+      </p:sp>
+      <p:pic>
+        <p:nvPicPr>
+          <p:cNvPr id="5" name="Скриншот 20_home_dark" descr="Тёмная тема">    </p:cNvPr>
+          <p:cNvPicPr>
+            <a:picLocks noChangeAspect="1"/>
+          </p:cNvPicPr>
+          <p:nvPr/>
+        </p:nvPicPr>
+        <p:blipFill>
+          <a:blip r:embed="rId2"/>
+          <a:stretch>
+            <a:fillRect/>
+          </a:stretch>
+        </p:blipFill>
+        <p:spPr>
+          <a:xfrm>
+            <a:off x="7447537" y="1325880"/>
+            <a:ext cx="1936368" cy="4069080"/>
+          </a:xfrm>
+          <a:prstGeom prst="rect">
+            <a:avLst/>
+          </a:prstGeom>
+        </p:spPr>
+      </p:pic>
+      <p:sp>
+        <p:nvSpPr>
+          <p:cNvPr id="6" name="Text 2"/>
           <p:cNvSpPr txBox="1"/>
           <p:nvPr/>
         </p:nvSpPr>
         <p:spPr>
           <a:xfrm>
-            <a:off x="777240" y="2194560"/>
-            <a:ext cx="2240280" cy="502920"/>
+            <a:off x="7264657" y="5486400"/>
+            <a:ext cx="2302128" cy="320040"/>
           </a:xfrm>
           <a:prstGeom prst="rect">
             <a:avLst/>
@@ -5934,53 +7036,55 @@
           <a:bodyPr wrap="square" lIns="0" tIns="0" rIns="0" bIns="0" rtlCol="0" anchor="t"/>
           <a:lstStyle/>
           <a:p>
-            <a:pPr indent="0" marL="0">
-              <a:buNone/>
-            </a:pPr>
-            <a:r>
-              <a:rPr lang="en-US" sz="1300" dirty="0">
-                <a:solidFill>
-                  <a:schemeClr val="tx1"/>
-                </a:solidFill>
-              </a:rPr>
-              <a:t>модульных и виджет-тестов</a:t>
-            </a:r>
-            <a:endParaRPr lang="en-US" sz="1300" dirty="0"/>
-          </a:p>
-        </p:txBody>
-      </p:sp>
-      <p:sp>
-        <p:nvSpPr>
-          <p:cNvPr id="6" name="Факт тест-кейсов"/>
-          <p:cNvSpPr/>
-          <p:nvPr/>
-        </p:nvSpPr>
-        <p:spPr>
-          <a:xfrm>
-            <a:off x="3364992" y="1325880"/>
-            <a:ext cx="2606040" cy="1463040"/>
-          </a:xfrm>
-          <a:prstGeom prst="roundRect">
-            <a:avLst>
-              <a:gd name="adj" fmla="val 7500"/>
-            </a:avLst>
-          </a:prstGeom>
-          <a:solidFill>
-            <a:schemeClr val="bg2"/>
-          </a:solidFill>
-          <a:ln/>
-        </p:spPr>
-      </p:sp>
-      <p:sp>
-        <p:nvSpPr>
-          <p:cNvPr id="7" name="Text 5"/>
+            <a:pPr algn="ctr" indent="0" marL="0">
+              <a:buNone/>
+            </a:pPr>
+            <a:r>
+              <a:rPr lang="en-US" sz="1200" dirty="0">
+                <a:solidFill>
+                  <a:schemeClr val="accent6"/>
+                </a:solidFill>
+              </a:rPr>
+              <a:t>Тёмная тема</a:t>
+            </a:r>
+            <a:endParaRPr lang="en-US" sz="1200" dirty="0"/>
+          </a:p>
+        </p:txBody>
+      </p:sp>
+      <p:pic>
+        <p:nvPicPr>
+          <p:cNvPr id="7" name="Скриншот 21_stats_dark" descr="Графики">    </p:cNvPr>
+          <p:cNvPicPr>
+            <a:picLocks noChangeAspect="1"/>
+          </p:cNvPicPr>
+          <p:nvPr/>
+        </p:nvPicPr>
+        <p:blipFill>
+          <a:blip r:embed="rId3"/>
+          <a:stretch>
+            <a:fillRect/>
+          </a:stretch>
+        </p:blipFill>
+        <p:spPr>
+          <a:xfrm>
+            <a:off x="9703944" y="1325880"/>
+            <a:ext cx="1936368" cy="4069080"/>
+          </a:xfrm>
+          <a:prstGeom prst="rect">
+            <a:avLst/>
+          </a:prstGeom>
+        </p:spPr>
+      </p:pic>
+      <p:sp>
+        <p:nvSpPr>
+          <p:cNvPr id="8" name="Text 3"/>
           <p:cNvSpPr txBox="1"/>
           <p:nvPr/>
         </p:nvSpPr>
         <p:spPr>
           <a:xfrm>
-            <a:off x="3593592" y="1417320"/>
-            <a:ext cx="2194560" cy="777240"/>
+            <a:off x="9521064" y="5486400"/>
+            <a:ext cx="2302128" cy="320040"/>
           </a:xfrm>
           <a:prstGeom prst="rect">
             <a:avLst/>
@@ -5992,612 +7096,18 @@
           <a:bodyPr wrap="square" lIns="0" tIns="0" rIns="0" bIns="0" rtlCol="0" anchor="t"/>
           <a:lstStyle/>
           <a:p>
-            <a:pPr indent="0" marL="0">
-              <a:buNone/>
-            </a:pPr>
-            <a:r>
-              <a:rPr lang="en-US" sz="4400" b="1" dirty="0">
-                <a:solidFill>
-                  <a:schemeClr val="accent1"/>
-                </a:solidFill>
-              </a:rPr>
-              <a:t>36</a:t>
-            </a:r>
-            <a:endParaRPr lang="en-US" sz="4400" dirty="0"/>
-          </a:p>
-        </p:txBody>
-      </p:sp>
-      <p:sp>
-        <p:nvSpPr>
-          <p:cNvPr id="8" name="Text 6"/>
-          <p:cNvSpPr txBox="1"/>
-          <p:nvPr/>
-        </p:nvSpPr>
-        <p:spPr>
-          <a:xfrm>
-            <a:off x="3593592" y="2194560"/>
-            <a:ext cx="2240280" cy="502920"/>
-          </a:xfrm>
-          <a:prstGeom prst="rect">
-            <a:avLst/>
-          </a:prstGeom>
-          <a:noFill/>
-          <a:ln/>
-        </p:spPr>
-        <p:txBody>
-          <a:bodyPr wrap="square" lIns="0" tIns="0" rIns="0" bIns="0" rtlCol="0" anchor="t"/>
-          <a:lstStyle/>
-          <a:p>
-            <a:pPr indent="0" marL="0">
-              <a:buNone/>
-            </a:pPr>
-            <a:r>
-              <a:rPr lang="en-US" sz="1300" dirty="0">
-                <a:solidFill>
-                  <a:schemeClr val="tx1"/>
-                </a:solidFill>
-              </a:rPr>
-              <a:t>тест-кейсов</a:t>
-            </a:r>
-            <a:endParaRPr lang="en-US" sz="1300" dirty="0"/>
-          </a:p>
-        </p:txBody>
-      </p:sp>
-      <p:sp>
-        <p:nvSpPr>
-          <p:cNvPr id="9" name="Факт снимков экранов проверено"/>
-          <p:cNvSpPr/>
-          <p:nvPr/>
-        </p:nvSpPr>
-        <p:spPr>
-          <a:xfrm>
-            <a:off x="6181344" y="1325880"/>
-            <a:ext cx="2606040" cy="1463040"/>
-          </a:xfrm>
-          <a:prstGeom prst="roundRect">
-            <a:avLst>
-              <a:gd name="adj" fmla="val 7500"/>
-            </a:avLst>
-          </a:prstGeom>
-          <a:solidFill>
-            <a:schemeClr val="bg2"/>
-          </a:solidFill>
-          <a:ln/>
-        </p:spPr>
-      </p:sp>
-      <p:sp>
-        <p:nvSpPr>
-          <p:cNvPr id="10" name="Text 8"/>
-          <p:cNvSpPr txBox="1"/>
-          <p:nvPr/>
-        </p:nvSpPr>
-        <p:spPr>
-          <a:xfrm>
-            <a:off x="6409944" y="1417320"/>
-            <a:ext cx="2194560" cy="777240"/>
-          </a:xfrm>
-          <a:prstGeom prst="rect">
-            <a:avLst/>
-          </a:prstGeom>
-          <a:noFill/>
-          <a:ln/>
-        </p:spPr>
-        <p:txBody>
-          <a:bodyPr wrap="square" lIns="0" tIns="0" rIns="0" bIns="0" rtlCol="0" anchor="t"/>
-          <a:lstStyle/>
-          <a:p>
-            <a:pPr indent="0" marL="0">
-              <a:buNone/>
-            </a:pPr>
-            <a:r>
-              <a:rPr lang="en-US" sz="4400" b="1" dirty="0">
-                <a:solidFill>
-                  <a:schemeClr val="accent1"/>
-                </a:solidFill>
-              </a:rPr>
-              <a:t>280</a:t>
-            </a:r>
-            <a:endParaRPr lang="en-US" sz="4400" dirty="0"/>
-          </a:p>
-        </p:txBody>
-      </p:sp>
-      <p:sp>
-        <p:nvSpPr>
-          <p:cNvPr id="11" name="Text 9"/>
-          <p:cNvSpPr txBox="1"/>
-          <p:nvPr/>
-        </p:nvSpPr>
-        <p:spPr>
-          <a:xfrm>
-            <a:off x="6409944" y="2194560"/>
-            <a:ext cx="2240280" cy="502920"/>
-          </a:xfrm>
-          <a:prstGeom prst="rect">
-            <a:avLst/>
-          </a:prstGeom>
-          <a:noFill/>
-          <a:ln/>
-        </p:spPr>
-        <p:txBody>
-          <a:bodyPr wrap="square" lIns="0" tIns="0" rIns="0" bIns="0" rtlCol="0" anchor="t"/>
-          <a:lstStyle/>
-          <a:p>
-            <a:pPr indent="0" marL="0">
-              <a:buNone/>
-            </a:pPr>
-            <a:r>
-              <a:rPr lang="en-US" sz="1300" dirty="0">
-                <a:solidFill>
-                  <a:schemeClr val="tx1"/>
-                </a:solidFill>
-              </a:rPr>
-              <a:t>снимков экранов проверено</a:t>
-            </a:r>
-            <a:endParaRPr lang="en-US" sz="1300" dirty="0"/>
-          </a:p>
-        </p:txBody>
-      </p:sp>
-      <p:sp>
-        <p:nvSpPr>
-          <p:cNvPr id="12" name="Факт ошибки найдены и исправлены"/>
-          <p:cNvSpPr/>
-          <p:nvPr/>
-        </p:nvSpPr>
-        <p:spPr>
-          <a:xfrm>
-            <a:off x="8997696" y="1325880"/>
-            <a:ext cx="2606040" cy="1463040"/>
-          </a:xfrm>
-          <a:prstGeom prst="roundRect">
-            <a:avLst>
-              <a:gd name="adj" fmla="val 7500"/>
-            </a:avLst>
-          </a:prstGeom>
-          <a:solidFill>
-            <a:schemeClr val="bg2"/>
-          </a:solidFill>
-          <a:ln/>
-        </p:spPr>
-      </p:sp>
-      <p:sp>
-        <p:nvSpPr>
-          <p:cNvPr id="13" name="Text 11"/>
-          <p:cNvSpPr txBox="1"/>
-          <p:nvPr/>
-        </p:nvSpPr>
-        <p:spPr>
-          <a:xfrm>
-            <a:off x="9226296" y="1417320"/>
-            <a:ext cx="2194560" cy="777240"/>
-          </a:xfrm>
-          <a:prstGeom prst="rect">
-            <a:avLst/>
-          </a:prstGeom>
-          <a:noFill/>
-          <a:ln/>
-        </p:spPr>
-        <p:txBody>
-          <a:bodyPr wrap="square" lIns="0" tIns="0" rIns="0" bIns="0" rtlCol="0" anchor="t"/>
-          <a:lstStyle/>
-          <a:p>
-            <a:pPr indent="0" marL="0">
-              <a:buNone/>
-            </a:pPr>
-            <a:r>
-              <a:rPr lang="en-US" sz="4400" b="1" dirty="0">
-                <a:solidFill>
-                  <a:schemeClr val="accent1"/>
-                </a:solidFill>
-              </a:rPr>
-              <a:t>24</a:t>
-            </a:r>
-            <a:endParaRPr lang="en-US" sz="4400" dirty="0"/>
-          </a:p>
-        </p:txBody>
-      </p:sp>
-      <p:sp>
-        <p:nvSpPr>
-          <p:cNvPr id="14" name="Text 12"/>
-          <p:cNvSpPr txBox="1"/>
-          <p:nvPr/>
-        </p:nvSpPr>
-        <p:spPr>
-          <a:xfrm>
-            <a:off x="9226296" y="2194560"/>
-            <a:ext cx="2240280" cy="502920"/>
-          </a:xfrm>
-          <a:prstGeom prst="rect">
-            <a:avLst/>
-          </a:prstGeom>
-          <a:noFill/>
-          <a:ln/>
-        </p:spPr>
-        <p:txBody>
-          <a:bodyPr wrap="square" lIns="0" tIns="0" rIns="0" bIns="0" rtlCol="0" anchor="t"/>
-          <a:lstStyle/>
-          <a:p>
-            <a:pPr indent="0" marL="0">
-              <a:buNone/>
-            </a:pPr>
-            <a:r>
-              <a:rPr lang="en-US" sz="1300" dirty="0">
-                <a:solidFill>
-                  <a:schemeClr val="tx1"/>
-                </a:solidFill>
-              </a:rPr>
-              <a:t>ошибки найдены и исправлены</a:t>
-            </a:r>
-            <a:endParaRPr lang="en-US" sz="1300" dirty="0"/>
-          </a:p>
-        </p:txBody>
-      </p:sp>
-      <p:graphicFrame>
-        <p:nvGraphicFramePr>
-          <p:cNvPr id="15" name="Диаграмма тестов" descr=""/>
-          <p:cNvGraphicFramePr/>
-          <p:nvPr/>
-        </p:nvGraphicFramePr>
-        <p:xfrm>
-          <a:off x="548640" y="3017520"/>
-          <a:ext cx="6035040" cy="3108960"/>
-        </p:xfrm>
-        <a:graphic xmlns:a="http://schemas.openxmlformats.org/drawingml/2006/main">
-          <a:graphicData uri="http://schemas.openxmlformats.org/drawingml/2006/chart">
-            <c:chart xmlns:c="http://schemas.openxmlformats.org/drawingml/2006/chart" r:id="rId1"/>
-          </a:graphicData>
-        </a:graphic>
-      </p:graphicFrame>
-      <p:sp>
-        <p:nvSpPr>
-          <p:cNvPr id="16" name="CI"/>
-          <p:cNvSpPr/>
-          <p:nvPr/>
-        </p:nvSpPr>
-        <p:spPr>
-          <a:xfrm>
-            <a:off x="6949440" y="3017520"/>
-            <a:ext cx="4690872" cy="3108960"/>
-          </a:xfrm>
-          <a:prstGeom prst="roundRect">
-            <a:avLst>
-              <a:gd name="adj" fmla="val 3529"/>
-            </a:avLst>
-          </a:prstGeom>
-          <a:solidFill>
-            <a:schemeClr val="tx2"/>
-          </a:solidFill>
-          <a:ln/>
-        </p:spPr>
-      </p:sp>
-      <p:sp>
-        <p:nvSpPr>
-          <p:cNvPr id="17" name="Text 14"/>
-          <p:cNvSpPr txBox="1"/>
-          <p:nvPr/>
-        </p:nvSpPr>
-        <p:spPr>
-          <a:xfrm>
-            <a:off x="7178040" y="3200400"/>
-            <a:ext cx="4297680" cy="274320"/>
-          </a:xfrm>
-          <a:prstGeom prst="rect">
-            <a:avLst/>
-          </a:prstGeom>
-          <a:noFill/>
-          <a:ln/>
-        </p:spPr>
-        <p:txBody>
-          <a:bodyPr wrap="square" lIns="0" tIns="0" rIns="0" bIns="0" rtlCol="0" anchor="t"/>
-          <a:lstStyle/>
-          <a:p>
-            <a:pPr indent="0" marL="0">
-              <a:buNone/>
-            </a:pPr>
-            <a:r>
-              <a:rPr lang="en-US" sz="1300" b="1" spc="100" kern="0" dirty="0">
-                <a:solidFill>
-                  <a:schemeClr val="accent4"/>
-                </a:solidFill>
-              </a:rPr>
-              <a:t>GITHUB ACTIONS НА КАЖДОЕ ИЗМЕНЕНИЕ</a:t>
-            </a:r>
-            <a:endParaRPr lang="en-US" sz="1300" dirty="0"/>
-          </a:p>
-        </p:txBody>
-      </p:sp>
-      <p:sp>
-        <p:nvSpPr>
-          <p:cNvPr id="18" name="Номер 1"/>
-          <p:cNvSpPr/>
-          <p:nvPr/>
-        </p:nvSpPr>
-        <p:spPr>
-          <a:xfrm>
-            <a:off x="7178040" y="3657600"/>
-            <a:ext cx="384048" cy="384048"/>
-          </a:xfrm>
-          <a:prstGeom prst="ellipse">
-            <a:avLst/>
-          </a:prstGeom>
-          <a:solidFill>
-            <a:schemeClr val="accent1"/>
-          </a:solidFill>
-          <a:ln/>
-        </p:spPr>
-        <p:txBody>
-          <a:bodyPr wrap="square" lIns="0" tIns="0" rIns="0" bIns="0" rtlCol="0" anchor="ctr"/>
-          <a:lstStyle/>
-          <a:p>
             <a:pPr algn="ctr" indent="0" marL="0">
               <a:buNone/>
             </a:pPr>
             <a:r>
-              <a:rPr lang="en-US" sz="1300" b="1" dirty="0">
-                <a:solidFill>
-                  <a:schemeClr val="bg1"/>
-                </a:solidFill>
-              </a:rPr>
-              <a:t>1</a:t>
-            </a:r>
-            <a:endParaRPr lang="en-US" sz="1300" dirty="0"/>
-          </a:p>
-        </p:txBody>
-      </p:sp>
-      <p:sp>
-        <p:nvSpPr>
-          <p:cNvPr id="19" name="Text 16"/>
-          <p:cNvSpPr txBox="1"/>
-          <p:nvPr/>
-        </p:nvSpPr>
-        <p:spPr>
-          <a:xfrm>
-            <a:off x="7726680" y="3657600"/>
-            <a:ext cx="3749040" cy="384048"/>
-          </a:xfrm>
-          <a:prstGeom prst="rect">
-            <a:avLst/>
-          </a:prstGeom>
-          <a:noFill/>
-          <a:ln/>
-        </p:spPr>
-        <p:txBody>
-          <a:bodyPr wrap="square" lIns="0" tIns="0" rIns="0" bIns="0" rtlCol="0" anchor="ctr"/>
-          <a:lstStyle/>
-          <a:p>
-            <a:pPr indent="0" marL="0">
-              <a:buNone/>
-            </a:pPr>
-            <a:r>
-              <a:rPr lang="en-US" sz="1400" dirty="0">
-                <a:solidFill>
-                  <a:schemeClr val="bg1"/>
-                </a:solidFill>
-              </a:rPr>
-              <a:t>Форматирование и flutter analyze</a:t>
-            </a:r>
-            <a:endParaRPr lang="en-US" sz="1400" dirty="0"/>
-          </a:p>
-        </p:txBody>
-      </p:sp>
-      <p:sp>
-        <p:nvSpPr>
-          <p:cNvPr id="20" name="Номер 2"/>
-          <p:cNvSpPr/>
-          <p:nvPr/>
-        </p:nvSpPr>
-        <p:spPr>
-          <a:xfrm>
-            <a:off x="7178040" y="4224528"/>
-            <a:ext cx="384048" cy="384048"/>
-          </a:xfrm>
-          <a:prstGeom prst="ellipse">
-            <a:avLst/>
-          </a:prstGeom>
-          <a:solidFill>
-            <a:schemeClr val="accent1"/>
-          </a:solidFill>
-          <a:ln/>
-        </p:spPr>
-        <p:txBody>
-          <a:bodyPr wrap="square" lIns="0" tIns="0" rIns="0" bIns="0" rtlCol="0" anchor="ctr"/>
-          <a:lstStyle/>
-          <a:p>
-            <a:pPr algn="ctr" indent="0" marL="0">
-              <a:buNone/>
-            </a:pPr>
-            <a:r>
-              <a:rPr lang="en-US" sz="1300" b="1" dirty="0">
-                <a:solidFill>
-                  <a:schemeClr val="bg1"/>
-                </a:solidFill>
-              </a:rPr>
-              <a:t>2</a:t>
-            </a:r>
-            <a:endParaRPr lang="en-US" sz="1300" dirty="0"/>
-          </a:p>
-        </p:txBody>
-      </p:sp>
-      <p:sp>
-        <p:nvSpPr>
-          <p:cNvPr id="21" name="Text 18"/>
-          <p:cNvSpPr txBox="1"/>
-          <p:nvPr/>
-        </p:nvSpPr>
-        <p:spPr>
-          <a:xfrm>
-            <a:off x="7726680" y="4224528"/>
-            <a:ext cx="3749040" cy="384048"/>
-          </a:xfrm>
-          <a:prstGeom prst="rect">
-            <a:avLst/>
-          </a:prstGeom>
-          <a:noFill/>
-          <a:ln/>
-        </p:spPr>
-        <p:txBody>
-          <a:bodyPr wrap="square" lIns="0" tIns="0" rIns="0" bIns="0" rtlCol="0" anchor="ctr"/>
-          <a:lstStyle/>
-          <a:p>
-            <a:pPr indent="0" marL="0">
-              <a:buNone/>
-            </a:pPr>
-            <a:r>
-              <a:rPr lang="en-US" sz="1400" dirty="0">
-                <a:solidFill>
-                  <a:schemeClr val="bg1"/>
-                </a:solidFill>
-              </a:rPr>
-              <a:t>Все модульные и виджет-тесты</a:t>
-            </a:r>
-            <a:endParaRPr lang="en-US" sz="1400" dirty="0"/>
-          </a:p>
-        </p:txBody>
-      </p:sp>
-      <p:sp>
-        <p:nvSpPr>
-          <p:cNvPr id="22" name="Номер 3"/>
-          <p:cNvSpPr/>
-          <p:nvPr/>
-        </p:nvSpPr>
-        <p:spPr>
-          <a:xfrm>
-            <a:off x="7178040" y="4791456"/>
-            <a:ext cx="384048" cy="384048"/>
-          </a:xfrm>
-          <a:prstGeom prst="ellipse">
-            <a:avLst/>
-          </a:prstGeom>
-          <a:solidFill>
-            <a:schemeClr val="accent1"/>
-          </a:solidFill>
-          <a:ln/>
-        </p:spPr>
-        <p:txBody>
-          <a:bodyPr wrap="square" lIns="0" tIns="0" rIns="0" bIns="0" rtlCol="0" anchor="ctr"/>
-          <a:lstStyle/>
-          <a:p>
-            <a:pPr algn="ctr" indent="0" marL="0">
-              <a:buNone/>
-            </a:pPr>
-            <a:r>
-              <a:rPr lang="en-US" sz="1300" b="1" dirty="0">
-                <a:solidFill>
-                  <a:schemeClr val="bg1"/>
-                </a:solidFill>
-              </a:rPr>
-              <a:t>3</a:t>
-            </a:r>
-            <a:endParaRPr lang="en-US" sz="1300" dirty="0"/>
-          </a:p>
-        </p:txBody>
-      </p:sp>
-      <p:sp>
-        <p:nvSpPr>
-          <p:cNvPr id="23" name="Text 20"/>
-          <p:cNvSpPr txBox="1"/>
-          <p:nvPr/>
-        </p:nvSpPr>
-        <p:spPr>
-          <a:xfrm>
-            <a:off x="7726680" y="4791456"/>
-            <a:ext cx="3749040" cy="384048"/>
-          </a:xfrm>
-          <a:prstGeom prst="rect">
-            <a:avLst/>
-          </a:prstGeom>
-          <a:noFill/>
-          <a:ln/>
-        </p:spPr>
-        <p:txBody>
-          <a:bodyPr wrap="square" lIns="0" tIns="0" rIns="0" bIns="0" rtlCol="0" anchor="ctr"/>
-          <a:lstStyle/>
-          <a:p>
-            <a:pPr indent="0" marL="0">
-              <a:buNone/>
-            </a:pPr>
-            <a:r>
-              <a:rPr lang="en-US" sz="1400" dirty="0">
-                <a:solidFill>
-                  <a:schemeClr val="bg1"/>
-                </a:solidFill>
-              </a:rPr>
-              <a:t>Интеграционный тест в Linux</a:t>
-            </a:r>
-            <a:endParaRPr lang="en-US" sz="1400" dirty="0"/>
-          </a:p>
-        </p:txBody>
-      </p:sp>
-      <p:sp>
-        <p:nvSpPr>
-          <p:cNvPr id="24" name="Номер 4"/>
-          <p:cNvSpPr/>
-          <p:nvPr/>
-        </p:nvSpPr>
-        <p:spPr>
-          <a:xfrm>
-            <a:off x="7178040" y="5358384"/>
-            <a:ext cx="384048" cy="384048"/>
-          </a:xfrm>
-          <a:prstGeom prst="ellipse">
-            <a:avLst/>
-          </a:prstGeom>
-          <a:solidFill>
-            <a:schemeClr val="accent1"/>
-          </a:solidFill>
-          <a:ln/>
-        </p:spPr>
-        <p:txBody>
-          <a:bodyPr wrap="square" lIns="0" tIns="0" rIns="0" bIns="0" rtlCol="0" anchor="ctr"/>
-          <a:lstStyle/>
-          <a:p>
-            <a:pPr algn="ctr" indent="0" marL="0">
-              <a:buNone/>
-            </a:pPr>
-            <a:r>
-              <a:rPr lang="en-US" sz="1300" b="1" dirty="0">
-                <a:solidFill>
-                  <a:schemeClr val="bg1"/>
-                </a:solidFill>
-              </a:rPr>
-              <a:t>4</a:t>
-            </a:r>
-            <a:endParaRPr lang="en-US" sz="1300" dirty="0"/>
-          </a:p>
-        </p:txBody>
-      </p:sp>
-      <p:sp>
-        <p:nvSpPr>
-          <p:cNvPr id="25" name="Text 22"/>
-          <p:cNvSpPr txBox="1"/>
-          <p:nvPr/>
-        </p:nvSpPr>
-        <p:spPr>
-          <a:xfrm>
-            <a:off x="7726680" y="5358384"/>
-            <a:ext cx="3749040" cy="384048"/>
-          </a:xfrm>
-          <a:prstGeom prst="rect">
-            <a:avLst/>
-          </a:prstGeom>
-          <a:noFill/>
-          <a:ln/>
-        </p:spPr>
-        <p:txBody>
-          <a:bodyPr wrap="square" lIns="0" tIns="0" rIns="0" bIns="0" rtlCol="0" anchor="ctr"/>
-          <a:lstStyle/>
-          <a:p>
-            <a:pPr indent="0" marL="0">
-              <a:buNone/>
-            </a:pPr>
-            <a:r>
-              <a:rPr lang="en-US" sz="1400" dirty="0">
-                <a:solidFill>
-                  <a:schemeClr val="bg1"/>
-                </a:solidFill>
-              </a:rPr>
-              <a:t>Сборка APK и версии для Windows</a:t>
-            </a:r>
-            <a:endParaRPr lang="en-US" sz="1400" dirty="0"/>
+              <a:rPr lang="en-US" sz="1200" dirty="0">
+                <a:solidFill>
+                  <a:schemeClr val="accent6"/>
+                </a:solidFill>
+              </a:rPr>
+              <a:t>Графики</a:t>
+            </a:r>
+            <a:endParaRPr lang="en-US" sz="1200" dirty="0"/>
           </a:p>
         </p:txBody>
       </p:sp>
@@ -6703,7 +7213,7 @@
                   <a:schemeClr val="tx2"/>
                 </a:solidFill>
               </a:rPr>
-              <a:t>Курсовая работа и релизная сборка</a:t>
+              <a:t>Тестирование: 137 автотестов и 27 исправленных ошибок</a:t>
             </a:r>
             <a:endParaRPr lang="en-US" sz="3200" dirty="0"/>
           </a:p>
@@ -6711,18 +7221,18 @@
       </p:sp>
       <p:sp>
         <p:nvSpPr>
-          <p:cNvPr id="3" name="Раздел Введение"/>
+          <p:cNvPr id="3" name="Факт модульных и виджет-тестов"/>
           <p:cNvSpPr/>
           <p:nvPr/>
         </p:nvSpPr>
         <p:spPr>
           <a:xfrm>
             <a:off x="548640" y="1325880"/>
-            <a:ext cx="3246120" cy="987552"/>
+            <a:ext cx="2606040" cy="1463040"/>
           </a:xfrm>
           <a:prstGeom prst="roundRect">
             <a:avLst>
-              <a:gd name="adj" fmla="val 11111"/>
+              <a:gd name="adj" fmla="val 7500"/>
             </a:avLst>
           </a:prstGeom>
           <a:solidFill>
@@ -6739,8 +7249,8 @@
         </p:nvSpPr>
         <p:spPr>
           <a:xfrm>
-            <a:off x="749808" y="1444752"/>
-            <a:ext cx="2834640" cy="347472"/>
+            <a:off x="777240" y="1417320"/>
+            <a:ext cx="2194560" cy="777240"/>
           </a:xfrm>
           <a:prstGeom prst="rect">
             <a:avLst/>
@@ -6756,14 +7266,14 @@
               <a:buNone/>
             </a:pPr>
             <a:r>
-              <a:rPr lang="en-US" sz="1600" b="1" dirty="0">
-                <a:solidFill>
-                  <a:schemeClr val="tx2"/>
-                </a:solidFill>
-              </a:rPr>
-              <a:t>Введение</a:t>
-            </a:r>
-            <a:endParaRPr lang="en-US" sz="1600" dirty="0"/>
+              <a:rPr lang="en-US" sz="4400" b="1" dirty="0">
+                <a:solidFill>
+                  <a:schemeClr val="accent1"/>
+                </a:solidFill>
+              </a:rPr>
+              <a:t>137</a:t>
+            </a:r>
+            <a:endParaRPr lang="en-US" sz="4400" dirty="0"/>
           </a:p>
         </p:txBody>
       </p:sp>
@@ -6775,8 +7285,8 @@
         </p:nvSpPr>
         <p:spPr>
           <a:xfrm>
-            <a:off x="749808" y="1801368"/>
-            <a:ext cx="2880360" cy="457200"/>
+            <a:off x="777240" y="2194560"/>
+            <a:ext cx="2240280" cy="502920"/>
           </a:xfrm>
           <a:prstGeom prst="rect">
             <a:avLst/>
@@ -6792,31 +7302,31 @@
               <a:buNone/>
             </a:pPr>
             <a:r>
-              <a:rPr lang="en-US" sz="1200" dirty="0">
+              <a:rPr lang="en-US" sz="1300" dirty="0">
                 <a:solidFill>
                   <a:schemeClr val="tx1"/>
                 </a:solidFill>
               </a:rPr>
-              <a:t>актуальность, цель, 8 задач</a:t>
-            </a:r>
-            <a:endParaRPr lang="en-US" sz="1200" dirty="0"/>
-          </a:p>
-        </p:txBody>
-      </p:sp>
-      <p:sp>
-        <p:nvSpPr>
-          <p:cNvPr id="6" name="Раздел Глава 1"/>
+              <a:t>модульных и виджет-тестов</a:t>
+            </a:r>
+            <a:endParaRPr lang="en-US" sz="1300" dirty="0"/>
+          </a:p>
+        </p:txBody>
+      </p:sp>
+      <p:sp>
+        <p:nvSpPr>
+          <p:cNvPr id="6" name="Факт тест-кейсов"/>
           <p:cNvSpPr/>
           <p:nvPr/>
         </p:nvSpPr>
         <p:spPr>
           <a:xfrm>
-            <a:off x="3977640" y="1325880"/>
-            <a:ext cx="3246120" cy="987552"/>
+            <a:off x="3364992" y="1325880"/>
+            <a:ext cx="2606040" cy="1463040"/>
           </a:xfrm>
           <a:prstGeom prst="roundRect">
             <a:avLst>
-              <a:gd name="adj" fmla="val 11111"/>
+              <a:gd name="adj" fmla="val 7500"/>
             </a:avLst>
           </a:prstGeom>
           <a:solidFill>
@@ -6833,8 +7343,8 @@
         </p:nvSpPr>
         <p:spPr>
           <a:xfrm>
-            <a:off x="4178808" y="1444752"/>
-            <a:ext cx="2834640" cy="347472"/>
+            <a:off x="3593592" y="1417320"/>
+            <a:ext cx="2194560" cy="777240"/>
           </a:xfrm>
           <a:prstGeom prst="rect">
             <a:avLst/>
@@ -6850,14 +7360,14 @@
               <a:buNone/>
             </a:pPr>
             <a:r>
-              <a:rPr lang="en-US" sz="1600" b="1" dirty="0">
-                <a:solidFill>
-                  <a:schemeClr val="tx2"/>
-                </a:solidFill>
-              </a:rPr>
-              <a:t>Глава 1</a:t>
-            </a:r>
-            <a:endParaRPr lang="en-US" sz="1600" dirty="0"/>
+              <a:rPr lang="en-US" sz="4400" b="1" dirty="0">
+                <a:solidFill>
+                  <a:schemeClr val="accent1"/>
+                </a:solidFill>
+              </a:rPr>
+              <a:t>45</a:t>
+            </a:r>
+            <a:endParaRPr lang="en-US" sz="4400" dirty="0"/>
           </a:p>
         </p:txBody>
       </p:sp>
@@ -6869,8 +7379,8 @@
         </p:nvSpPr>
         <p:spPr>
           <a:xfrm>
-            <a:off x="4178808" y="1801368"/>
-            <a:ext cx="2880360" cy="457200"/>
+            <a:off x="3593592" y="2194560"/>
+            <a:ext cx="2240280" cy="502920"/>
           </a:xfrm>
           <a:prstGeom prst="rect">
             <a:avLst/>
@@ -6886,31 +7396,31 @@
               <a:buNone/>
             </a:pPr>
             <a:r>
-              <a:rPr lang="en-US" sz="1200" dirty="0">
+              <a:rPr lang="en-US" sz="1300" dirty="0">
                 <a:solidFill>
                   <a:schemeClr val="tx1"/>
                 </a:solidFill>
               </a:rPr>
-              <a:t>предметная область, аналоги, выбор технологий</a:t>
-            </a:r>
-            <a:endParaRPr lang="en-US" sz="1200" dirty="0"/>
-          </a:p>
-        </p:txBody>
-      </p:sp>
-      <p:sp>
-        <p:nvSpPr>
-          <p:cNvPr id="9" name="Раздел Глава 2"/>
+              <a:t>тест-кейсов</a:t>
+            </a:r>
+            <a:endParaRPr lang="en-US" sz="1300" dirty="0"/>
+          </a:p>
+        </p:txBody>
+      </p:sp>
+      <p:sp>
+        <p:nvSpPr>
+          <p:cNvPr id="9" name="Факт снимков экранов проверено"/>
           <p:cNvSpPr/>
           <p:nvPr/>
         </p:nvSpPr>
         <p:spPr>
           <a:xfrm>
-            <a:off x="548640" y="2468880"/>
-            <a:ext cx="3246120" cy="987552"/>
+            <a:off x="6181344" y="1325880"/>
+            <a:ext cx="2606040" cy="1463040"/>
           </a:xfrm>
           <a:prstGeom prst="roundRect">
             <a:avLst>
-              <a:gd name="adj" fmla="val 11111"/>
+              <a:gd name="adj" fmla="val 7500"/>
             </a:avLst>
           </a:prstGeom>
           <a:solidFill>
@@ -6927,8 +7437,8 @@
         </p:nvSpPr>
         <p:spPr>
           <a:xfrm>
-            <a:off x="749808" y="2587752"/>
-            <a:ext cx="2834640" cy="347472"/>
+            <a:off x="6409944" y="1417320"/>
+            <a:ext cx="2194560" cy="777240"/>
           </a:xfrm>
           <a:prstGeom prst="rect">
             <a:avLst/>
@@ -6944,14 +7454,14 @@
               <a:buNone/>
             </a:pPr>
             <a:r>
-              <a:rPr lang="en-US" sz="1600" b="1" dirty="0">
-                <a:solidFill>
-                  <a:schemeClr val="tx2"/>
-                </a:solidFill>
-              </a:rPr>
-              <a:t>Глава 2</a:t>
-            </a:r>
-            <a:endParaRPr lang="en-US" sz="1600" dirty="0"/>
+              <a:rPr lang="en-US" sz="4400" b="1" dirty="0">
+                <a:solidFill>
+                  <a:schemeClr val="accent1"/>
+                </a:solidFill>
+              </a:rPr>
+              <a:t>280</a:t>
+            </a:r>
+            <a:endParaRPr lang="en-US" sz="4400" dirty="0"/>
           </a:p>
         </p:txBody>
       </p:sp>
@@ -6963,8 +7473,8 @@
         </p:nvSpPr>
         <p:spPr>
           <a:xfrm>
-            <a:off x="749808" y="2944368"/>
-            <a:ext cx="2880360" cy="457200"/>
+            <a:off x="6409944" y="2194560"/>
+            <a:ext cx="2240280" cy="502920"/>
           </a:xfrm>
           <a:prstGeom prst="rect">
             <a:avLst/>
@@ -6980,31 +7490,31 @@
               <a:buNone/>
             </a:pPr>
             <a:r>
-              <a:rPr lang="en-US" sz="1200" dirty="0">
+              <a:rPr lang="en-US" sz="1300" dirty="0">
                 <a:solidFill>
                   <a:schemeClr val="tx1"/>
                 </a:solidFill>
               </a:rPr>
-              <a:t>архитектура, ER-диаграмма, алгоритм, экраны, тесты</a:t>
-            </a:r>
-            <a:endParaRPr lang="en-US" sz="1200" dirty="0"/>
-          </a:p>
-        </p:txBody>
-      </p:sp>
-      <p:sp>
-        <p:nvSpPr>
-          <p:cNvPr id="12" name="Раздел Заключение"/>
+              <a:t>снимков экранов проверено</a:t>
+            </a:r>
+            <a:endParaRPr lang="en-US" sz="1300" dirty="0"/>
+          </a:p>
+        </p:txBody>
+      </p:sp>
+      <p:sp>
+        <p:nvSpPr>
+          <p:cNvPr id="12" name="Факт ошибок найдено и исправлено"/>
           <p:cNvSpPr/>
           <p:nvPr/>
         </p:nvSpPr>
         <p:spPr>
           <a:xfrm>
-            <a:off x="3977640" y="2468880"/>
-            <a:ext cx="3246120" cy="987552"/>
+            <a:off x="8997696" y="1325880"/>
+            <a:ext cx="2606040" cy="1463040"/>
           </a:xfrm>
           <a:prstGeom prst="roundRect">
             <a:avLst>
-              <a:gd name="adj" fmla="val 11111"/>
+              <a:gd name="adj" fmla="val 7500"/>
             </a:avLst>
           </a:prstGeom>
           <a:solidFill>
@@ -7021,8 +7531,8 @@
         </p:nvSpPr>
         <p:spPr>
           <a:xfrm>
-            <a:off x="4178808" y="2587752"/>
-            <a:ext cx="2834640" cy="347472"/>
+            <a:off x="9226296" y="1417320"/>
+            <a:ext cx="2194560" cy="777240"/>
           </a:xfrm>
           <a:prstGeom prst="rect">
             <a:avLst/>
@@ -7038,14 +7548,14 @@
               <a:buNone/>
             </a:pPr>
             <a:r>
-              <a:rPr lang="en-US" sz="1600" b="1" dirty="0">
-                <a:solidFill>
-                  <a:schemeClr val="tx2"/>
-                </a:solidFill>
-              </a:rPr>
-              <a:t>Заключение</a:t>
-            </a:r>
-            <a:endParaRPr lang="en-US" sz="1600" dirty="0"/>
+              <a:rPr lang="en-US" sz="4400" b="1" dirty="0">
+                <a:solidFill>
+                  <a:schemeClr val="accent1"/>
+                </a:solidFill>
+              </a:rPr>
+              <a:t>27</a:t>
+            </a:r>
+            <a:endParaRPr lang="en-US" sz="4400" dirty="0"/>
           </a:p>
         </p:txBody>
       </p:sp>
@@ -7057,8 +7567,8 @@
         </p:nvSpPr>
         <p:spPr>
           <a:xfrm>
-            <a:off x="4178808" y="2944368"/>
-            <a:ext cx="2880360" cy="457200"/>
+            <a:off x="9226296" y="2194560"/>
+            <a:ext cx="2240280" cy="502920"/>
           </a:xfrm>
           <a:prstGeom prst="rect">
             <a:avLst/>
@@ -7074,266 +7584,47 @@
               <a:buNone/>
             </a:pPr>
             <a:r>
-              <a:rPr lang="en-US" sz="1200" dirty="0">
+              <a:rPr lang="en-US" sz="1300" dirty="0">
                 <a:solidFill>
                   <a:schemeClr val="tx1"/>
                 </a:solidFill>
               </a:rPr>
-              <a:t>результаты по каждой задаче</a:t>
-            </a:r>
-            <a:endParaRPr lang="en-US" sz="1200" dirty="0"/>
-          </a:p>
-        </p:txBody>
-      </p:sp>
-      <p:sp>
-        <p:nvSpPr>
-          <p:cNvPr id="15" name="Раздел Литература"/>
+              <a:t>ошибок найдено и исправлено</a:t>
+            </a:r>
+            <a:endParaRPr lang="en-US" sz="1300" dirty="0"/>
+          </a:p>
+        </p:txBody>
+      </p:sp>
+      <p:graphicFrame>
+        <p:nvGraphicFramePr>
+          <p:cNvPr id="15" name="Диаграмма тестов" descr=""/>
+          <p:cNvGraphicFramePr/>
+          <p:nvPr/>
+        </p:nvGraphicFramePr>
+        <p:xfrm>
+          <a:off x="548640" y="2971800"/>
+          <a:ext cx="6035040" cy="3200400"/>
+        </p:xfrm>
+        <a:graphic xmlns:a="http://schemas.openxmlformats.org/drawingml/2006/main">
+          <a:graphicData uri="http://schemas.openxmlformats.org/drawingml/2006/chart">
+            <c:chart xmlns:c="http://schemas.openxmlformats.org/drawingml/2006/chart" r:id="rId1"/>
+          </a:graphicData>
+        </a:graphic>
+      </p:graphicFrame>
+      <p:sp>
+        <p:nvSpPr>
+          <p:cNvPr id="16" name="CI"/>
           <p:cNvSpPr/>
           <p:nvPr/>
         </p:nvSpPr>
         <p:spPr>
           <a:xfrm>
-            <a:off x="548640" y="3611880"/>
-            <a:ext cx="3246120" cy="987552"/>
+            <a:off x="6949440" y="3017520"/>
+            <a:ext cx="4690872" cy="3108960"/>
           </a:xfrm>
           <a:prstGeom prst="roundRect">
             <a:avLst>
-              <a:gd name="adj" fmla="val 11111"/>
-            </a:avLst>
-          </a:prstGeom>
-          <a:solidFill>
-            <a:schemeClr val="bg2"/>
-          </a:solidFill>
-          <a:ln/>
-        </p:spPr>
-      </p:sp>
-      <p:sp>
-        <p:nvSpPr>
-          <p:cNvPr id="16" name="Text 14"/>
-          <p:cNvSpPr txBox="1"/>
-          <p:nvPr/>
-        </p:nvSpPr>
-        <p:spPr>
-          <a:xfrm>
-            <a:off x="749808" y="3730752"/>
-            <a:ext cx="2834640" cy="347472"/>
-          </a:xfrm>
-          <a:prstGeom prst="rect">
-            <a:avLst/>
-          </a:prstGeom>
-          <a:noFill/>
-          <a:ln/>
-        </p:spPr>
-        <p:txBody>
-          <a:bodyPr wrap="square" lIns="0" tIns="0" rIns="0" bIns="0" rtlCol="0" anchor="t"/>
-          <a:lstStyle/>
-          <a:p>
-            <a:pPr indent="0" marL="0">
-              <a:buNone/>
-            </a:pPr>
-            <a:r>
-              <a:rPr lang="en-US" sz="1600" b="1" dirty="0">
-                <a:solidFill>
-                  <a:schemeClr val="tx2"/>
-                </a:solidFill>
-              </a:rPr>
-              <a:t>Литература</a:t>
-            </a:r>
-            <a:endParaRPr lang="en-US" sz="1600" dirty="0"/>
-          </a:p>
-        </p:txBody>
-      </p:sp>
-      <p:sp>
-        <p:nvSpPr>
-          <p:cNvPr id="17" name="Text 15"/>
-          <p:cNvSpPr txBox="1"/>
-          <p:nvPr/>
-        </p:nvSpPr>
-        <p:spPr>
-          <a:xfrm>
-            <a:off x="749808" y="4087368"/>
-            <a:ext cx="2880360" cy="457200"/>
-          </a:xfrm>
-          <a:prstGeom prst="rect">
-            <a:avLst/>
-          </a:prstGeom>
-          <a:noFill/>
-          <a:ln/>
-        </p:spPr>
-        <p:txBody>
-          <a:bodyPr wrap="square" lIns="0" tIns="0" rIns="0" bIns="0" rtlCol="0" anchor="t"/>
-          <a:lstStyle/>
-          <a:p>
-            <a:pPr indent="0" marL="0">
-              <a:buNone/>
-            </a:pPr>
-            <a:r>
-              <a:rPr lang="en-US" sz="1200" dirty="0">
-                <a:solidFill>
-                  <a:schemeClr val="tx1"/>
-                </a:solidFill>
-              </a:rPr>
-              <a:t>43 источника по ГОСТ</a:t>
-            </a:r>
-            <a:endParaRPr lang="en-US" sz="1200" dirty="0"/>
-          </a:p>
-        </p:txBody>
-      </p:sp>
-      <p:sp>
-        <p:nvSpPr>
-          <p:cNvPr id="18" name="Раздел Приложения А–И"/>
-          <p:cNvSpPr/>
-          <p:nvPr/>
-        </p:nvSpPr>
-        <p:spPr>
-          <a:xfrm>
-            <a:off x="3977640" y="3611880"/>
-            <a:ext cx="3246120" cy="987552"/>
-          </a:xfrm>
-          <a:prstGeom prst="roundRect">
-            <a:avLst>
-              <a:gd name="adj" fmla="val 11111"/>
-            </a:avLst>
-          </a:prstGeom>
-          <a:solidFill>
-            <a:schemeClr val="bg2"/>
-          </a:solidFill>
-          <a:ln/>
-        </p:spPr>
-      </p:sp>
-      <p:sp>
-        <p:nvSpPr>
-          <p:cNvPr id="19" name="Text 17"/>
-          <p:cNvSpPr txBox="1"/>
-          <p:nvPr/>
-        </p:nvSpPr>
-        <p:spPr>
-          <a:xfrm>
-            <a:off x="4178808" y="3730752"/>
-            <a:ext cx="2834640" cy="347472"/>
-          </a:xfrm>
-          <a:prstGeom prst="rect">
-            <a:avLst/>
-          </a:prstGeom>
-          <a:noFill/>
-          <a:ln/>
-        </p:spPr>
-        <p:txBody>
-          <a:bodyPr wrap="square" lIns="0" tIns="0" rIns="0" bIns="0" rtlCol="0" anchor="t"/>
-          <a:lstStyle/>
-          <a:p>
-            <a:pPr indent="0" marL="0">
-              <a:buNone/>
-            </a:pPr>
-            <a:r>
-              <a:rPr lang="en-US" sz="1600" b="1" dirty="0">
-                <a:solidFill>
-                  <a:schemeClr val="tx2"/>
-                </a:solidFill>
-              </a:rPr>
-              <a:t>Приложения А–И</a:t>
-            </a:r>
-            <a:endParaRPr lang="en-US" sz="1600" dirty="0"/>
-          </a:p>
-        </p:txBody>
-      </p:sp>
-      <p:sp>
-        <p:nvSpPr>
-          <p:cNvPr id="20" name="Text 18"/>
-          <p:cNvSpPr txBox="1"/>
-          <p:nvPr/>
-        </p:nvSpPr>
-        <p:spPr>
-          <a:xfrm>
-            <a:off x="4178808" y="4087368"/>
-            <a:ext cx="2880360" cy="457200"/>
-          </a:xfrm>
-          <a:prstGeom prst="rect">
-            <a:avLst/>
-          </a:prstGeom>
-          <a:noFill/>
-          <a:ln/>
-        </p:spPr>
-        <p:txBody>
-          <a:bodyPr wrap="square" lIns="0" tIns="0" rIns="0" bIns="0" rtlCol="0" anchor="t"/>
-          <a:lstStyle/>
-          <a:p>
-            <a:pPr indent="0" marL="0">
-              <a:buNone/>
-            </a:pPr>
-            <a:r>
-              <a:rPr lang="en-US" sz="1200" dirty="0">
-                <a:solidFill>
-                  <a:schemeClr val="tx1"/>
-                </a:solidFill>
-              </a:rPr>
-              <a:t>код ключевых модулей</a:t>
-            </a:r>
-            <a:endParaRPr lang="en-US" sz="1200" dirty="0"/>
-          </a:p>
-        </p:txBody>
-      </p:sp>
-      <p:sp>
-        <p:nvSpPr>
-          <p:cNvPr id="21" name="Text 19"/>
-          <p:cNvSpPr txBox="1"/>
-          <p:nvPr/>
-        </p:nvSpPr>
-        <p:spPr>
-          <a:xfrm>
-            <a:off x="548640" y="4846320"/>
-            <a:ext cx="6675120" cy="365760"/>
-          </a:xfrm>
-          <a:prstGeom prst="rect">
-            <a:avLst/>
-          </a:prstGeom>
-          <a:noFill/>
-          <a:ln/>
-        </p:spPr>
-        <p:txBody>
-          <a:bodyPr wrap="square" lIns="0" tIns="0" rIns="0" bIns="0" rtlCol="0" anchor="t"/>
-          <a:lstStyle/>
-          <a:p>
-            <a:pPr indent="0" marL="0">
-              <a:buNone/>
-            </a:pPr>
-            <a:r>
-              <a:rPr lang="en-US" sz="1400" b="1" dirty="0">
-                <a:solidFill>
-                  <a:schemeClr val="accent1"/>
-                </a:solidFill>
-              </a:rPr>
-              <a:t>80 страниц</a:t>
-            </a:r>
-            <a:pPr indent="0" marL="0">
-              <a:buNone/>
-            </a:pPr>
-            <a:r>
-              <a:rPr lang="en-US" sz="1400" dirty="0">
-                <a:solidFill>
-                  <a:schemeClr val="accent6"/>
-                </a:solidFill>
-              </a:rPr>
-              <a:t> · Times New Roman 14, интервал 1,5 · DOCX и PDF</a:t>
-            </a:r>
-            <a:endParaRPr lang="en-US" sz="1400" dirty="0"/>
-          </a:p>
-        </p:txBody>
-      </p:sp>
-      <p:sp>
-        <p:nvSpPr>
-          <p:cNvPr id="22" name="Релиз"/>
-          <p:cNvSpPr/>
-          <p:nvPr/>
-        </p:nvSpPr>
-        <p:spPr>
-          <a:xfrm>
-            <a:off x="7589520" y="1325880"/>
-            <a:ext cx="4050792" cy="4526280"/>
-          </a:xfrm>
-          <a:prstGeom prst="roundRect">
-            <a:avLst>
-              <a:gd name="adj" fmla="val 2709"/>
+              <a:gd name="adj" fmla="val 3529"/>
             </a:avLst>
           </a:prstGeom>
           <a:solidFill>
@@ -7342,40 +7633,16 @@
           <a:ln/>
         </p:spPr>
       </p:sp>
-      <p:pic>
-        <p:nvPicPr>
-          <p:cNvPr id="23" name="Иконка" descr="Иконка «Маршрут»">    </p:cNvPr>
-          <p:cNvPicPr>
-            <a:picLocks noChangeAspect="1"/>
-          </p:cNvPicPr>
-          <p:nvPr/>
-        </p:nvPicPr>
-        <p:blipFill>
-          <a:blip r:embed="rId1"/>
-          <a:stretch>
-            <a:fillRect/>
-          </a:stretch>
-        </p:blipFill>
-        <p:spPr>
-          <a:xfrm>
-            <a:off x="7863840" y="1600200"/>
-            <a:ext cx="822960" cy="822960"/>
-          </a:xfrm>
-          <a:prstGeom prst="rect">
-            <a:avLst/>
-          </a:prstGeom>
-        </p:spPr>
-      </p:pic>
-      <p:sp>
-        <p:nvSpPr>
-          <p:cNvPr id="24" name="Text 21"/>
+      <p:sp>
+        <p:nvSpPr>
+          <p:cNvPr id="17" name="Text 14"/>
           <p:cNvSpPr txBox="1"/>
           <p:nvPr/>
         </p:nvSpPr>
         <p:spPr>
           <a:xfrm>
-            <a:off x="8869680" y="1737360"/>
-            <a:ext cx="2560320" cy="548640"/>
+            <a:off x="7178040" y="3200400"/>
+            <a:ext cx="4297680" cy="274320"/>
           </a:xfrm>
           <a:prstGeom prst="rect">
             <a:avLst/>
@@ -7384,21 +7651,281 @@
           <a:ln/>
         </p:spPr>
         <p:txBody>
+          <a:bodyPr wrap="square" lIns="0" tIns="0" rIns="0" bIns="0" rtlCol="0" anchor="t"/>
+          <a:lstStyle/>
+          <a:p>
+            <a:pPr indent="0" marL="0">
+              <a:buNone/>
+            </a:pPr>
+            <a:r>
+              <a:rPr lang="en-US" sz="1300" b="1" spc="100" kern="0" dirty="0">
+                <a:solidFill>
+                  <a:schemeClr val="accent4"/>
+                </a:solidFill>
+              </a:rPr>
+              <a:t>GITHUB ACTIONS НА КАЖДОЕ ИЗМЕНЕНИЕ</a:t>
+            </a:r>
+            <a:endParaRPr lang="en-US" sz="1300" dirty="0"/>
+          </a:p>
+        </p:txBody>
+      </p:sp>
+      <p:sp>
+        <p:nvSpPr>
+          <p:cNvPr id="18" name="Номер 1"/>
+          <p:cNvSpPr/>
+          <p:nvPr/>
+        </p:nvSpPr>
+        <p:spPr>
+          <a:xfrm>
+            <a:off x="7178040" y="3657600"/>
+            <a:ext cx="384048" cy="384048"/>
+          </a:xfrm>
+          <a:prstGeom prst="ellipse">
+            <a:avLst/>
+          </a:prstGeom>
+          <a:solidFill>
+            <a:schemeClr val="accent1"/>
+          </a:solidFill>
+          <a:ln/>
+        </p:spPr>
+        <p:txBody>
           <a:bodyPr wrap="square" lIns="0" tIns="0" rIns="0" bIns="0" rtlCol="0" anchor="ctr"/>
           <a:lstStyle/>
           <a:p>
+            <a:pPr algn="ctr" indent="0" marL="0">
+              <a:buNone/>
+            </a:pPr>
+            <a:r>
+              <a:rPr lang="en-US" sz="1300" b="1" dirty="0">
+                <a:solidFill>
+                  <a:schemeClr val="bg1"/>
+                </a:solidFill>
+              </a:rPr>
+              <a:t>1</a:t>
+            </a:r>
+            <a:endParaRPr lang="en-US" sz="1300" dirty="0"/>
+          </a:p>
+        </p:txBody>
+      </p:sp>
+      <p:sp>
+        <p:nvSpPr>
+          <p:cNvPr id="19" name="Text 16"/>
+          <p:cNvSpPr txBox="1"/>
+          <p:nvPr/>
+        </p:nvSpPr>
+        <p:spPr>
+          <a:xfrm>
+            <a:off x="7726680" y="3657600"/>
+            <a:ext cx="3749040" cy="384048"/>
+          </a:xfrm>
+          <a:prstGeom prst="rect">
+            <a:avLst/>
+          </a:prstGeom>
+          <a:noFill/>
+          <a:ln/>
+        </p:spPr>
+        <p:txBody>
+          <a:bodyPr wrap="square" lIns="0" tIns="0" rIns="0" bIns="0" rtlCol="0" anchor="ctr"/>
+          <a:lstStyle/>
+          <a:p>
             <a:pPr indent="0" marL="0">
               <a:buNone/>
             </a:pPr>
             <a:r>
-              <a:rPr lang="en-US" sz="2400" b="1" dirty="0">
+              <a:rPr lang="en-US" sz="1400" dirty="0">
                 <a:solidFill>
                   <a:schemeClr val="bg1"/>
                 </a:solidFill>
               </a:rPr>
-              <a:t>Релиз</a:t>
-            </a:r>
-            <a:endParaRPr lang="en-US" sz="2400" dirty="0"/>
+              <a:t>Формат, flutter analyze, все тесты</a:t>
+            </a:r>
+            <a:endParaRPr lang="en-US" sz="1400" dirty="0"/>
+          </a:p>
+        </p:txBody>
+      </p:sp>
+      <p:sp>
+        <p:nvSpPr>
+          <p:cNvPr id="20" name="Номер 2"/>
+          <p:cNvSpPr/>
+          <p:nvPr/>
+        </p:nvSpPr>
+        <p:spPr>
+          <a:xfrm>
+            <a:off x="7178040" y="4224528"/>
+            <a:ext cx="384048" cy="384048"/>
+          </a:xfrm>
+          <a:prstGeom prst="ellipse">
+            <a:avLst/>
+          </a:prstGeom>
+          <a:solidFill>
+            <a:schemeClr val="accent1"/>
+          </a:solidFill>
+          <a:ln/>
+        </p:spPr>
+        <p:txBody>
+          <a:bodyPr wrap="square" lIns="0" tIns="0" rIns="0" bIns="0" rtlCol="0" anchor="ctr"/>
+          <a:lstStyle/>
+          <a:p>
+            <a:pPr algn="ctr" indent="0" marL="0">
+              <a:buNone/>
+            </a:pPr>
+            <a:r>
+              <a:rPr lang="en-US" sz="1300" b="1" dirty="0">
+                <a:solidFill>
+                  <a:schemeClr val="bg1"/>
+                </a:solidFill>
+              </a:rPr>
+              <a:t>2</a:t>
+            </a:r>
+            <a:endParaRPr lang="en-US" sz="1300" dirty="0"/>
+          </a:p>
+        </p:txBody>
+      </p:sp>
+      <p:sp>
+        <p:nvSpPr>
+          <p:cNvPr id="21" name="Text 18"/>
+          <p:cNvSpPr txBox="1"/>
+          <p:nvPr/>
+        </p:nvSpPr>
+        <p:spPr>
+          <a:xfrm>
+            <a:off x="7726680" y="4224528"/>
+            <a:ext cx="3749040" cy="384048"/>
+          </a:xfrm>
+          <a:prstGeom prst="rect">
+            <a:avLst/>
+          </a:prstGeom>
+          <a:noFill/>
+          <a:ln/>
+        </p:spPr>
+        <p:txBody>
+          <a:bodyPr wrap="square" lIns="0" tIns="0" rIns="0" bIns="0" rtlCol="0" anchor="ctr"/>
+          <a:lstStyle/>
+          <a:p>
+            <a:pPr indent="0" marL="0">
+              <a:buNone/>
+            </a:pPr>
+            <a:r>
+              <a:rPr lang="en-US" sz="1400" dirty="0">
+                <a:solidFill>
+                  <a:schemeClr val="bg1"/>
+                </a:solidFill>
+              </a:rPr>
+              <a:t>Интеграционный тест с HTTP-сервером</a:t>
+            </a:r>
+            <a:endParaRPr lang="en-US" sz="1400" dirty="0"/>
+          </a:p>
+        </p:txBody>
+      </p:sp>
+      <p:sp>
+        <p:nvSpPr>
+          <p:cNvPr id="22" name="Номер 3"/>
+          <p:cNvSpPr/>
+          <p:nvPr/>
+        </p:nvSpPr>
+        <p:spPr>
+          <a:xfrm>
+            <a:off x="7178040" y="4791456"/>
+            <a:ext cx="384048" cy="384048"/>
+          </a:xfrm>
+          <a:prstGeom prst="ellipse">
+            <a:avLst/>
+          </a:prstGeom>
+          <a:solidFill>
+            <a:schemeClr val="accent1"/>
+          </a:solidFill>
+          <a:ln/>
+        </p:spPr>
+        <p:txBody>
+          <a:bodyPr wrap="square" lIns="0" tIns="0" rIns="0" bIns="0" rtlCol="0" anchor="ctr"/>
+          <a:lstStyle/>
+          <a:p>
+            <a:pPr algn="ctr" indent="0" marL="0">
+              <a:buNone/>
+            </a:pPr>
+            <a:r>
+              <a:rPr lang="en-US" sz="1300" b="1" dirty="0">
+                <a:solidFill>
+                  <a:schemeClr val="bg1"/>
+                </a:solidFill>
+              </a:rPr>
+              <a:t>3</a:t>
+            </a:r>
+            <a:endParaRPr lang="en-US" sz="1300" dirty="0"/>
+          </a:p>
+        </p:txBody>
+      </p:sp>
+      <p:sp>
+        <p:nvSpPr>
+          <p:cNvPr id="23" name="Text 20"/>
+          <p:cNvSpPr txBox="1"/>
+          <p:nvPr/>
+        </p:nvSpPr>
+        <p:spPr>
+          <a:xfrm>
+            <a:off x="7726680" y="4791456"/>
+            <a:ext cx="3749040" cy="384048"/>
+          </a:xfrm>
+          <a:prstGeom prst="rect">
+            <a:avLst/>
+          </a:prstGeom>
+          <a:noFill/>
+          <a:ln/>
+        </p:spPr>
+        <p:txBody>
+          <a:bodyPr wrap="square" lIns="0" tIns="0" rIns="0" bIns="0" rtlCol="0" anchor="ctr"/>
+          <a:lstStyle/>
+          <a:p>
+            <a:pPr indent="0" marL="0">
+              <a:buNone/>
+            </a:pPr>
+            <a:r>
+              <a:rPr lang="en-US" sz="1400" dirty="0">
+                <a:solidFill>
+                  <a:schemeClr val="bg1"/>
+                </a:solidFill>
+              </a:rPr>
+              <a:t>Сборки: APK, IPA для iPhone, Windows</a:t>
+            </a:r>
+            <a:endParaRPr lang="en-US" sz="1400" dirty="0"/>
+          </a:p>
+        </p:txBody>
+      </p:sp>
+      <p:sp>
+        <p:nvSpPr>
+          <p:cNvPr id="24" name="Номер 4"/>
+          <p:cNvSpPr/>
+          <p:nvPr/>
+        </p:nvSpPr>
+        <p:spPr>
+          <a:xfrm>
+            <a:off x="7178040" y="5358384"/>
+            <a:ext cx="384048" cy="384048"/>
+          </a:xfrm>
+          <a:prstGeom prst="ellipse">
+            <a:avLst/>
+          </a:prstGeom>
+          <a:solidFill>
+            <a:schemeClr val="accent1"/>
+          </a:solidFill>
+          <a:ln/>
+        </p:spPr>
+        <p:txBody>
+          <a:bodyPr wrap="square" lIns="0" tIns="0" rIns="0" bIns="0" rtlCol="0" anchor="ctr"/>
+          <a:lstStyle/>
+          <a:p>
+            <a:pPr algn="ctr" indent="0" marL="0">
+              <a:buNone/>
+            </a:pPr>
+            <a:r>
+              <a:rPr lang="en-US" sz="1300" b="1" dirty="0">
+                <a:solidFill>
+                  <a:schemeClr val="bg1"/>
+                </a:solidFill>
+              </a:rPr>
+              <a:t>4</a:t>
+            </a:r>
+            <a:endParaRPr lang="en-US" sz="1300" dirty="0"/>
           </a:p>
         </p:txBody>
       </p:sp>
@@ -7410,8 +7937,8 @@
         </p:nvSpPr>
         <p:spPr>
           <a:xfrm>
-            <a:off x="7863840" y="2697480"/>
-            <a:ext cx="3566160" cy="2926080"/>
+            <a:off x="7726680" y="5358384"/>
+            <a:ext cx="3749040" cy="384048"/>
           </a:xfrm>
           <a:prstGeom prst="rect">
             <a:avLst/>
@@ -7420,96 +7947,19 @@
           <a:ln/>
         </p:spPr>
         <p:txBody>
-          <a:bodyPr wrap="square" lIns="0" tIns="0" rIns="0" bIns="0" rtlCol="0" anchor="t"/>
+          <a:bodyPr wrap="square" lIns="0" tIns="0" rIns="0" bIns="0" rtlCol="0" anchor="ctr"/>
           <a:lstStyle/>
           <a:p>
             <a:pPr indent="0" marL="0">
-              <a:spcAft>
-                <a:spcPts val="600"/>
-              </a:spcAft>
               <a:buNone/>
             </a:pPr>
             <a:r>
               <a:rPr lang="en-US" sz="1400" dirty="0">
                 <a:solidFill>
-                  <a:schemeClr val="accent4"/>
-                </a:solidFill>
-                <a:latin typeface="Courier New" pitchFamily="34" charset="0"/>
-                <a:ea typeface="Courier New" pitchFamily="34" charset="-122"/>
-                <a:cs typeface="Courier New" pitchFamily="34" charset="-120"/>
-              </a:rPr>
-              <a:t>flutter build apk --release</a:t>
-            </a:r>
-            <a:endParaRPr lang="en-US" sz="1400" dirty="0"/>
-          </a:p>
-          <a:p>
-            <a:pPr indent="0" marL="0">
-              <a:spcAft>
-                <a:spcPts val="600"/>
-              </a:spcAft>
-              <a:buNone/>
-            </a:pPr>
-            <a:r>
-              <a:rPr lang="en-US" sz="800" dirty="0">
-                <a:solidFill>
                   <a:schemeClr val="bg1"/>
                 </a:solidFill>
               </a:rPr>
-              <a:t> </a:t>
-            </a:r>
-            <a:endParaRPr lang="en-US" sz="1400" dirty="0"/>
-          </a:p>
-          <a:p>
-            <a:pPr marL="342900" indent="-342900">
-              <a:spcAft>
-                <a:spcPts val="600"/>
-              </a:spcAft>
-              <a:buSzPct val="100000"/>
-              <a:buChar char="•"/>
-            </a:pPr>
-            <a:r>
-              <a:rPr lang="en-US" sz="1400" dirty="0">
-                <a:solidFill>
-                  <a:schemeClr val="bg1"/>
-                </a:solidFill>
-              </a:rPr>
-              <a:t>APK для Android и архив для Windows собирает GitHub Actions</a:t>
-            </a:r>
-            <a:endParaRPr lang="en-US" sz="1400" dirty="0"/>
-          </a:p>
-          <a:p>
-            <a:pPr marL="342900" indent="-342900">
-              <a:spcAft>
-                <a:spcPts val="600"/>
-              </a:spcAft>
-              <a:buSzPct val="100000"/>
-              <a:buChar char="•"/>
-            </a:pPr>
-            <a:r>
-              <a:rPr lang="en-US" sz="1400" dirty="0">
-                <a:solidFill>
-                  <a:schemeClr val="bg1"/>
-                </a:solidFill>
-              </a:rPr>
-              <a:t>Своя иконка и название «Маршрут»</a:t>
-            </a:r>
-            <a:endParaRPr lang="en-US" sz="1400" dirty="0"/>
-          </a:p>
-          <a:p>
-            <a:pPr marL="342900" indent="-342900">
-              <a:spcAft>
-                <a:spcPts val="600"/>
-              </a:spcAft>
-              <a:buSzPct val="100000"/>
-              <a:buChar char="•"/>
-            </a:pPr>
-            <a:r>
-              <a:rPr lang="en-US" sz="1400" dirty="0">
-                <a:solidFill>
-                  <a:schemeClr val="bg1"/>
-                </a:solidFill>
-              </a:rPr>
-              <a:t>Запуск без ключей и облака</a:t>
+              <a:t>Программа-сервер API для Windows</a:t>
             </a:r>
             <a:endParaRPr lang="en-US" sz="1400" dirty="0"/>
           </a:p>
@@ -7588,6 +8038,920 @@
       <p:sp>
         <p:nvSpPr>
           <p:cNvPr id="2" name="Text 0"/>
+          <p:cNvSpPr/>
+          <p:nvPr>
+            <p:ph idx="100" type="title" hasCustomPrompt="1"/>
+          </p:nvPr>
+        </p:nvSpPr>
+        <p:spPr>
+          <a:xfrm>
+            <a:off x="548640" y="320040"/>
+            <a:ext cx="11064240" cy="731520"/>
+          </a:xfrm>
+          <a:prstGeom prst="rect">
+            <a:avLst/>
+          </a:prstGeom>
+          <a:noFill/>
+          <a:ln/>
+        </p:spPr>
+        <p:txBody>
+          <a:bodyPr wrap="square" lIns="0" tIns="0" rIns="0" bIns="0" rtlCol="0" anchor="ctr"/>
+          <a:lstStyle/>
+          <a:p>
+            <a:pPr algn="l" indent="0" marL="0">
+              <a:buNone/>
+            </a:pPr>
+            <a:r>
+              <a:rPr lang="en-US" sz="3200" b="1" dirty="0">
+                <a:solidFill>
+                  <a:schemeClr val="tx2"/>
+                </a:solidFill>
+              </a:rPr>
+              <a:t>Курсовая работа и релизная сборка</a:t>
+            </a:r>
+            <a:endParaRPr lang="en-US" sz="3200" dirty="0"/>
+          </a:p>
+        </p:txBody>
+      </p:sp>
+      <p:sp>
+        <p:nvSpPr>
+          <p:cNvPr id="3" name="Раздел Введение"/>
+          <p:cNvSpPr/>
+          <p:nvPr/>
+        </p:nvSpPr>
+        <p:spPr>
+          <a:xfrm>
+            <a:off x="548640" y="1325880"/>
+            <a:ext cx="3246120" cy="987552"/>
+          </a:xfrm>
+          <a:prstGeom prst="roundRect">
+            <a:avLst>
+              <a:gd name="adj" fmla="val 11111"/>
+            </a:avLst>
+          </a:prstGeom>
+          <a:solidFill>
+            <a:schemeClr val="bg2"/>
+          </a:solidFill>
+          <a:ln/>
+        </p:spPr>
+      </p:sp>
+      <p:sp>
+        <p:nvSpPr>
+          <p:cNvPr id="4" name="Text 2"/>
+          <p:cNvSpPr txBox="1"/>
+          <p:nvPr/>
+        </p:nvSpPr>
+        <p:spPr>
+          <a:xfrm>
+            <a:off x="749808" y="1444752"/>
+            <a:ext cx="2834640" cy="347472"/>
+          </a:xfrm>
+          <a:prstGeom prst="rect">
+            <a:avLst/>
+          </a:prstGeom>
+          <a:noFill/>
+          <a:ln/>
+        </p:spPr>
+        <p:txBody>
+          <a:bodyPr wrap="square" lIns="0" tIns="0" rIns="0" bIns="0" rtlCol="0" anchor="t"/>
+          <a:lstStyle/>
+          <a:p>
+            <a:pPr indent="0" marL="0">
+              <a:buNone/>
+            </a:pPr>
+            <a:r>
+              <a:rPr lang="en-US" sz="1600" b="1" dirty="0">
+                <a:solidFill>
+                  <a:schemeClr val="tx2"/>
+                </a:solidFill>
+              </a:rPr>
+              <a:t>Введение</a:t>
+            </a:r>
+            <a:endParaRPr lang="en-US" sz="1600" dirty="0"/>
+          </a:p>
+        </p:txBody>
+      </p:sp>
+      <p:sp>
+        <p:nvSpPr>
+          <p:cNvPr id="5" name="Text 3"/>
+          <p:cNvSpPr txBox="1"/>
+          <p:nvPr/>
+        </p:nvSpPr>
+        <p:spPr>
+          <a:xfrm>
+            <a:off x="749808" y="1801368"/>
+            <a:ext cx="2880360" cy="457200"/>
+          </a:xfrm>
+          <a:prstGeom prst="rect">
+            <a:avLst/>
+          </a:prstGeom>
+          <a:noFill/>
+          <a:ln/>
+        </p:spPr>
+        <p:txBody>
+          <a:bodyPr wrap="square" lIns="0" tIns="0" rIns="0" bIns="0" rtlCol="0" anchor="t"/>
+          <a:lstStyle/>
+          <a:p>
+            <a:pPr indent="0" marL="0">
+              <a:buNone/>
+            </a:pPr>
+            <a:r>
+              <a:rPr lang="en-US" sz="1200" dirty="0">
+                <a:solidFill>
+                  <a:schemeClr val="tx1"/>
+                </a:solidFill>
+              </a:rPr>
+              <a:t>актуальность, цель, 9 задач</a:t>
+            </a:r>
+            <a:endParaRPr lang="en-US" sz="1200" dirty="0"/>
+          </a:p>
+        </p:txBody>
+      </p:sp>
+      <p:sp>
+        <p:nvSpPr>
+          <p:cNvPr id="6" name="Раздел Глава 1"/>
+          <p:cNvSpPr/>
+          <p:nvPr/>
+        </p:nvSpPr>
+        <p:spPr>
+          <a:xfrm>
+            <a:off x="3977640" y="1325880"/>
+            <a:ext cx="3246120" cy="987552"/>
+          </a:xfrm>
+          <a:prstGeom prst="roundRect">
+            <a:avLst>
+              <a:gd name="adj" fmla="val 11111"/>
+            </a:avLst>
+          </a:prstGeom>
+          <a:solidFill>
+            <a:schemeClr val="bg2"/>
+          </a:solidFill>
+          <a:ln/>
+        </p:spPr>
+      </p:sp>
+      <p:sp>
+        <p:nvSpPr>
+          <p:cNvPr id="7" name="Text 5"/>
+          <p:cNvSpPr txBox="1"/>
+          <p:nvPr/>
+        </p:nvSpPr>
+        <p:spPr>
+          <a:xfrm>
+            <a:off x="4178808" y="1444752"/>
+            <a:ext cx="2834640" cy="347472"/>
+          </a:xfrm>
+          <a:prstGeom prst="rect">
+            <a:avLst/>
+          </a:prstGeom>
+          <a:noFill/>
+          <a:ln/>
+        </p:spPr>
+        <p:txBody>
+          <a:bodyPr wrap="square" lIns="0" tIns="0" rIns="0" bIns="0" rtlCol="0" anchor="t"/>
+          <a:lstStyle/>
+          <a:p>
+            <a:pPr indent="0" marL="0">
+              <a:buNone/>
+            </a:pPr>
+            <a:r>
+              <a:rPr lang="en-US" sz="1600" b="1" dirty="0">
+                <a:solidFill>
+                  <a:schemeClr val="tx2"/>
+                </a:solidFill>
+              </a:rPr>
+              <a:t>Глава 1</a:t>
+            </a:r>
+            <a:endParaRPr lang="en-US" sz="1600" dirty="0"/>
+          </a:p>
+        </p:txBody>
+      </p:sp>
+      <p:sp>
+        <p:nvSpPr>
+          <p:cNvPr id="8" name="Text 6"/>
+          <p:cNvSpPr txBox="1"/>
+          <p:nvPr/>
+        </p:nvSpPr>
+        <p:spPr>
+          <a:xfrm>
+            <a:off x="4178808" y="1801368"/>
+            <a:ext cx="2880360" cy="457200"/>
+          </a:xfrm>
+          <a:prstGeom prst="rect">
+            <a:avLst/>
+          </a:prstGeom>
+          <a:noFill/>
+          <a:ln/>
+        </p:spPr>
+        <p:txBody>
+          <a:bodyPr wrap="square" lIns="0" tIns="0" rIns="0" bIns="0" rtlCol="0" anchor="t"/>
+          <a:lstStyle/>
+          <a:p>
+            <a:pPr indent="0" marL="0">
+              <a:buNone/>
+            </a:pPr>
+            <a:r>
+              <a:rPr lang="en-US" sz="1200" dirty="0">
+                <a:solidFill>
+                  <a:schemeClr val="tx1"/>
+                </a:solidFill>
+              </a:rPr>
+              <a:t>предметная область, аналоги, выбор технологий</a:t>
+            </a:r>
+            <a:endParaRPr lang="en-US" sz="1200" dirty="0"/>
+          </a:p>
+        </p:txBody>
+      </p:sp>
+      <p:sp>
+        <p:nvSpPr>
+          <p:cNvPr id="9" name="Раздел Глава 2"/>
+          <p:cNvSpPr/>
+          <p:nvPr/>
+        </p:nvSpPr>
+        <p:spPr>
+          <a:xfrm>
+            <a:off x="548640" y="2468880"/>
+            <a:ext cx="3246120" cy="987552"/>
+          </a:xfrm>
+          <a:prstGeom prst="roundRect">
+            <a:avLst>
+              <a:gd name="adj" fmla="val 11111"/>
+            </a:avLst>
+          </a:prstGeom>
+          <a:solidFill>
+            <a:schemeClr val="bg2"/>
+          </a:solidFill>
+          <a:ln/>
+        </p:spPr>
+      </p:sp>
+      <p:sp>
+        <p:nvSpPr>
+          <p:cNvPr id="10" name="Text 8"/>
+          <p:cNvSpPr txBox="1"/>
+          <p:nvPr/>
+        </p:nvSpPr>
+        <p:spPr>
+          <a:xfrm>
+            <a:off x="749808" y="2587752"/>
+            <a:ext cx="2834640" cy="347472"/>
+          </a:xfrm>
+          <a:prstGeom prst="rect">
+            <a:avLst/>
+          </a:prstGeom>
+          <a:noFill/>
+          <a:ln/>
+        </p:spPr>
+        <p:txBody>
+          <a:bodyPr wrap="square" lIns="0" tIns="0" rIns="0" bIns="0" rtlCol="0" anchor="t"/>
+          <a:lstStyle/>
+          <a:p>
+            <a:pPr indent="0" marL="0">
+              <a:buNone/>
+            </a:pPr>
+            <a:r>
+              <a:rPr lang="en-US" sz="1600" b="1" dirty="0">
+                <a:solidFill>
+                  <a:schemeClr val="tx2"/>
+                </a:solidFill>
+              </a:rPr>
+              <a:t>Глава 2</a:t>
+            </a:r>
+            <a:endParaRPr lang="en-US" sz="1600" dirty="0"/>
+          </a:p>
+        </p:txBody>
+      </p:sp>
+      <p:sp>
+        <p:nvSpPr>
+          <p:cNvPr id="11" name="Text 9"/>
+          <p:cNvSpPr txBox="1"/>
+          <p:nvPr/>
+        </p:nvSpPr>
+        <p:spPr>
+          <a:xfrm>
+            <a:off x="749808" y="2944368"/>
+            <a:ext cx="2880360" cy="457200"/>
+          </a:xfrm>
+          <a:prstGeom prst="rect">
+            <a:avLst/>
+          </a:prstGeom>
+          <a:noFill/>
+          <a:ln/>
+        </p:spPr>
+        <p:txBody>
+          <a:bodyPr wrap="square" lIns="0" tIns="0" rIns="0" bIns="0" rtlCol="0" anchor="t"/>
+          <a:lstStyle/>
+          <a:p>
+            <a:pPr indent="0" marL="0">
+              <a:buNone/>
+            </a:pPr>
+            <a:r>
+              <a:rPr lang="en-US" sz="1200" dirty="0">
+                <a:solidFill>
+                  <a:schemeClr val="tx1"/>
+                </a:solidFill>
+              </a:rPr>
+              <a:t>архитектура, база и API сервера, алгоритм, экраны, тесты</a:t>
+            </a:r>
+            <a:endParaRPr lang="en-US" sz="1200" dirty="0"/>
+          </a:p>
+        </p:txBody>
+      </p:sp>
+      <p:sp>
+        <p:nvSpPr>
+          <p:cNvPr id="12" name="Раздел Заключение"/>
+          <p:cNvSpPr/>
+          <p:nvPr/>
+        </p:nvSpPr>
+        <p:spPr>
+          <a:xfrm>
+            <a:off x="3977640" y="2468880"/>
+            <a:ext cx="3246120" cy="987552"/>
+          </a:xfrm>
+          <a:prstGeom prst="roundRect">
+            <a:avLst>
+              <a:gd name="adj" fmla="val 11111"/>
+            </a:avLst>
+          </a:prstGeom>
+          <a:solidFill>
+            <a:schemeClr val="bg2"/>
+          </a:solidFill>
+          <a:ln/>
+        </p:spPr>
+      </p:sp>
+      <p:sp>
+        <p:nvSpPr>
+          <p:cNvPr id="13" name="Text 11"/>
+          <p:cNvSpPr txBox="1"/>
+          <p:nvPr/>
+        </p:nvSpPr>
+        <p:spPr>
+          <a:xfrm>
+            <a:off x="4178808" y="2587752"/>
+            <a:ext cx="2834640" cy="347472"/>
+          </a:xfrm>
+          <a:prstGeom prst="rect">
+            <a:avLst/>
+          </a:prstGeom>
+          <a:noFill/>
+          <a:ln/>
+        </p:spPr>
+        <p:txBody>
+          <a:bodyPr wrap="square" lIns="0" tIns="0" rIns="0" bIns="0" rtlCol="0" anchor="t"/>
+          <a:lstStyle/>
+          <a:p>
+            <a:pPr indent="0" marL="0">
+              <a:buNone/>
+            </a:pPr>
+            <a:r>
+              <a:rPr lang="en-US" sz="1600" b="1" dirty="0">
+                <a:solidFill>
+                  <a:schemeClr val="tx2"/>
+                </a:solidFill>
+              </a:rPr>
+              <a:t>Заключение</a:t>
+            </a:r>
+            <a:endParaRPr lang="en-US" sz="1600" dirty="0"/>
+          </a:p>
+        </p:txBody>
+      </p:sp>
+      <p:sp>
+        <p:nvSpPr>
+          <p:cNvPr id="14" name="Text 12"/>
+          <p:cNvSpPr txBox="1"/>
+          <p:nvPr/>
+        </p:nvSpPr>
+        <p:spPr>
+          <a:xfrm>
+            <a:off x="4178808" y="2944368"/>
+            <a:ext cx="2880360" cy="457200"/>
+          </a:xfrm>
+          <a:prstGeom prst="rect">
+            <a:avLst/>
+          </a:prstGeom>
+          <a:noFill/>
+          <a:ln/>
+        </p:spPr>
+        <p:txBody>
+          <a:bodyPr wrap="square" lIns="0" tIns="0" rIns="0" bIns="0" rtlCol="0" anchor="t"/>
+          <a:lstStyle/>
+          <a:p>
+            <a:pPr indent="0" marL="0">
+              <a:buNone/>
+            </a:pPr>
+            <a:r>
+              <a:rPr lang="en-US" sz="1200" dirty="0">
+                <a:solidFill>
+                  <a:schemeClr val="tx1"/>
+                </a:solidFill>
+              </a:rPr>
+              <a:t>результаты по каждой задаче</a:t>
+            </a:r>
+            <a:endParaRPr lang="en-US" sz="1200" dirty="0"/>
+          </a:p>
+        </p:txBody>
+      </p:sp>
+      <p:sp>
+        <p:nvSpPr>
+          <p:cNvPr id="15" name="Раздел Литература"/>
+          <p:cNvSpPr/>
+          <p:nvPr/>
+        </p:nvSpPr>
+        <p:spPr>
+          <a:xfrm>
+            <a:off x="548640" y="3611880"/>
+            <a:ext cx="3246120" cy="987552"/>
+          </a:xfrm>
+          <a:prstGeom prst="roundRect">
+            <a:avLst>
+              <a:gd name="adj" fmla="val 11111"/>
+            </a:avLst>
+          </a:prstGeom>
+          <a:solidFill>
+            <a:schemeClr val="bg2"/>
+          </a:solidFill>
+          <a:ln/>
+        </p:spPr>
+      </p:sp>
+      <p:sp>
+        <p:nvSpPr>
+          <p:cNvPr id="16" name="Text 14"/>
+          <p:cNvSpPr txBox="1"/>
+          <p:nvPr/>
+        </p:nvSpPr>
+        <p:spPr>
+          <a:xfrm>
+            <a:off x="749808" y="3730752"/>
+            <a:ext cx="2834640" cy="347472"/>
+          </a:xfrm>
+          <a:prstGeom prst="rect">
+            <a:avLst/>
+          </a:prstGeom>
+          <a:noFill/>
+          <a:ln/>
+        </p:spPr>
+        <p:txBody>
+          <a:bodyPr wrap="square" lIns="0" tIns="0" rIns="0" bIns="0" rtlCol="0" anchor="t"/>
+          <a:lstStyle/>
+          <a:p>
+            <a:pPr indent="0" marL="0">
+              <a:buNone/>
+            </a:pPr>
+            <a:r>
+              <a:rPr lang="en-US" sz="1600" b="1" dirty="0">
+                <a:solidFill>
+                  <a:schemeClr val="tx2"/>
+                </a:solidFill>
+              </a:rPr>
+              <a:t>Литература</a:t>
+            </a:r>
+            <a:endParaRPr lang="en-US" sz="1600" dirty="0"/>
+          </a:p>
+        </p:txBody>
+      </p:sp>
+      <p:sp>
+        <p:nvSpPr>
+          <p:cNvPr id="17" name="Text 15"/>
+          <p:cNvSpPr txBox="1"/>
+          <p:nvPr/>
+        </p:nvSpPr>
+        <p:spPr>
+          <a:xfrm>
+            <a:off x="749808" y="4087368"/>
+            <a:ext cx="2880360" cy="457200"/>
+          </a:xfrm>
+          <a:prstGeom prst="rect">
+            <a:avLst/>
+          </a:prstGeom>
+          <a:noFill/>
+          <a:ln/>
+        </p:spPr>
+        <p:txBody>
+          <a:bodyPr wrap="square" lIns="0" tIns="0" rIns="0" bIns="0" rtlCol="0" anchor="t"/>
+          <a:lstStyle/>
+          <a:p>
+            <a:pPr indent="0" marL="0">
+              <a:buNone/>
+            </a:pPr>
+            <a:r>
+              <a:rPr lang="en-US" sz="1200" dirty="0">
+                <a:solidFill>
+                  <a:schemeClr val="tx1"/>
+                </a:solidFill>
+              </a:rPr>
+              <a:t>50 источников по ГОСТ</a:t>
+            </a:r>
+            <a:endParaRPr lang="en-US" sz="1200" dirty="0"/>
+          </a:p>
+        </p:txBody>
+      </p:sp>
+      <p:sp>
+        <p:nvSpPr>
+          <p:cNvPr id="18" name="Раздел Приложения А–Л"/>
+          <p:cNvSpPr/>
+          <p:nvPr/>
+        </p:nvSpPr>
+        <p:spPr>
+          <a:xfrm>
+            <a:off x="3977640" y="3611880"/>
+            <a:ext cx="3246120" cy="987552"/>
+          </a:xfrm>
+          <a:prstGeom prst="roundRect">
+            <a:avLst>
+              <a:gd name="adj" fmla="val 11111"/>
+            </a:avLst>
+          </a:prstGeom>
+          <a:solidFill>
+            <a:schemeClr val="bg2"/>
+          </a:solidFill>
+          <a:ln/>
+        </p:spPr>
+      </p:sp>
+      <p:sp>
+        <p:nvSpPr>
+          <p:cNvPr id="19" name="Text 17"/>
+          <p:cNvSpPr txBox="1"/>
+          <p:nvPr/>
+        </p:nvSpPr>
+        <p:spPr>
+          <a:xfrm>
+            <a:off x="4178808" y="3730752"/>
+            <a:ext cx="2834640" cy="347472"/>
+          </a:xfrm>
+          <a:prstGeom prst="rect">
+            <a:avLst/>
+          </a:prstGeom>
+          <a:noFill/>
+          <a:ln/>
+        </p:spPr>
+        <p:txBody>
+          <a:bodyPr wrap="square" lIns="0" tIns="0" rIns="0" bIns="0" rtlCol="0" anchor="t"/>
+          <a:lstStyle/>
+          <a:p>
+            <a:pPr indent="0" marL="0">
+              <a:buNone/>
+            </a:pPr>
+            <a:r>
+              <a:rPr lang="en-US" sz="1600" b="1" dirty="0">
+                <a:solidFill>
+                  <a:schemeClr val="tx2"/>
+                </a:solidFill>
+              </a:rPr>
+              <a:t>Приложения А–Л</a:t>
+            </a:r>
+            <a:endParaRPr lang="en-US" sz="1600" dirty="0"/>
+          </a:p>
+        </p:txBody>
+      </p:sp>
+      <p:sp>
+        <p:nvSpPr>
+          <p:cNvPr id="20" name="Text 18"/>
+          <p:cNvSpPr txBox="1"/>
+          <p:nvPr/>
+        </p:nvSpPr>
+        <p:spPr>
+          <a:xfrm>
+            <a:off x="4178808" y="4087368"/>
+            <a:ext cx="2880360" cy="457200"/>
+          </a:xfrm>
+          <a:prstGeom prst="rect">
+            <a:avLst/>
+          </a:prstGeom>
+          <a:noFill/>
+          <a:ln/>
+        </p:spPr>
+        <p:txBody>
+          <a:bodyPr wrap="square" lIns="0" tIns="0" rIns="0" bIns="0" rtlCol="0" anchor="t"/>
+          <a:lstStyle/>
+          <a:p>
+            <a:pPr indent="0" marL="0">
+              <a:buNone/>
+            </a:pPr>
+            <a:r>
+              <a:rPr lang="en-US" sz="1200" dirty="0">
+                <a:solidFill>
+                  <a:schemeClr val="tx1"/>
+                </a:solidFill>
+              </a:rPr>
+              <a:t>код алгоритма, сервера и клиента API</a:t>
+            </a:r>
+            <a:endParaRPr lang="en-US" sz="1200" dirty="0"/>
+          </a:p>
+        </p:txBody>
+      </p:sp>
+      <p:sp>
+        <p:nvSpPr>
+          <p:cNvPr id="21" name="Text 19"/>
+          <p:cNvSpPr txBox="1"/>
+          <p:nvPr/>
+        </p:nvSpPr>
+        <p:spPr>
+          <a:xfrm>
+            <a:off x="548640" y="4846320"/>
+            <a:ext cx="6675120" cy="365760"/>
+          </a:xfrm>
+          <a:prstGeom prst="rect">
+            <a:avLst/>
+          </a:prstGeom>
+          <a:noFill/>
+          <a:ln/>
+        </p:spPr>
+        <p:txBody>
+          <a:bodyPr wrap="square" lIns="0" tIns="0" rIns="0" bIns="0" rtlCol="0" anchor="t"/>
+          <a:lstStyle/>
+          <a:p>
+            <a:pPr indent="0" marL="0">
+              <a:buNone/>
+            </a:pPr>
+            <a:r>
+              <a:rPr lang="en-US" sz="1400" b="1" dirty="0">
+                <a:solidFill>
+                  <a:schemeClr val="accent1"/>
+                </a:solidFill>
+              </a:rPr>
+              <a:t>105 страниц</a:t>
+            </a:r>
+            <a:pPr indent="0" marL="0">
+              <a:buNone/>
+            </a:pPr>
+            <a:r>
+              <a:rPr lang="en-US" sz="1400" dirty="0">
+                <a:solidFill>
+                  <a:schemeClr val="accent6"/>
+                </a:solidFill>
+              </a:rPr>
+              <a:t> · Times New Roman 14, интервал 1,5 · DOCX и PDF</a:t>
+            </a:r>
+            <a:endParaRPr lang="en-US" sz="1400" dirty="0"/>
+          </a:p>
+        </p:txBody>
+      </p:sp>
+      <p:sp>
+        <p:nvSpPr>
+          <p:cNvPr id="22" name="Релиз"/>
+          <p:cNvSpPr/>
+          <p:nvPr/>
+        </p:nvSpPr>
+        <p:spPr>
+          <a:xfrm>
+            <a:off x="7589520" y="1325880"/>
+            <a:ext cx="4050792" cy="4526280"/>
+          </a:xfrm>
+          <a:prstGeom prst="roundRect">
+            <a:avLst>
+              <a:gd name="adj" fmla="val 2709"/>
+            </a:avLst>
+          </a:prstGeom>
+          <a:solidFill>
+            <a:schemeClr val="tx2"/>
+          </a:solidFill>
+          <a:ln/>
+        </p:spPr>
+      </p:sp>
+      <p:pic>
+        <p:nvPicPr>
+          <p:cNvPr id="23" name="Иконка" descr="Иконка «Маршрут»">    </p:cNvPr>
+          <p:cNvPicPr>
+            <a:picLocks noChangeAspect="1"/>
+          </p:cNvPicPr>
+          <p:nvPr/>
+        </p:nvPicPr>
+        <p:blipFill>
+          <a:blip r:embed="rId1"/>
+          <a:stretch>
+            <a:fillRect/>
+          </a:stretch>
+        </p:blipFill>
+        <p:spPr>
+          <a:xfrm>
+            <a:off x="7863840" y="1600200"/>
+            <a:ext cx="822960" cy="822960"/>
+          </a:xfrm>
+          <a:prstGeom prst="rect">
+            <a:avLst/>
+          </a:prstGeom>
+        </p:spPr>
+      </p:pic>
+      <p:sp>
+        <p:nvSpPr>
+          <p:cNvPr id="24" name="Text 21"/>
+          <p:cNvSpPr txBox="1"/>
+          <p:nvPr/>
+        </p:nvSpPr>
+        <p:spPr>
+          <a:xfrm>
+            <a:off x="8869680" y="1737360"/>
+            <a:ext cx="2560320" cy="548640"/>
+          </a:xfrm>
+          <a:prstGeom prst="rect">
+            <a:avLst/>
+          </a:prstGeom>
+          <a:noFill/>
+          <a:ln/>
+        </p:spPr>
+        <p:txBody>
+          <a:bodyPr wrap="square" lIns="0" tIns="0" rIns="0" bIns="0" rtlCol="0" anchor="ctr"/>
+          <a:lstStyle/>
+          <a:p>
+            <a:pPr indent="0" marL="0">
+              <a:buNone/>
+            </a:pPr>
+            <a:r>
+              <a:rPr lang="en-US" sz="2400" b="1" dirty="0">
+                <a:solidFill>
+                  <a:schemeClr val="bg1"/>
+                </a:solidFill>
+              </a:rPr>
+              <a:t>Релиз</a:t>
+            </a:r>
+            <a:endParaRPr lang="en-US" sz="2400" dirty="0"/>
+          </a:p>
+        </p:txBody>
+      </p:sp>
+      <p:sp>
+        <p:nvSpPr>
+          <p:cNvPr id="25" name="Text 22"/>
+          <p:cNvSpPr txBox="1"/>
+          <p:nvPr/>
+        </p:nvSpPr>
+        <p:spPr>
+          <a:xfrm>
+            <a:off x="7863840" y="2697480"/>
+            <a:ext cx="3566160" cy="2926080"/>
+          </a:xfrm>
+          <a:prstGeom prst="rect">
+            <a:avLst/>
+          </a:prstGeom>
+          <a:noFill/>
+          <a:ln/>
+        </p:spPr>
+        <p:txBody>
+          <a:bodyPr wrap="square" lIns="0" tIns="0" rIns="0" bIns="0" rtlCol="0" anchor="t"/>
+          <a:lstStyle/>
+          <a:p>
+            <a:pPr indent="0" marL="0">
+              <a:spcAft>
+                <a:spcPts val="600"/>
+              </a:spcAft>
+              <a:buNone/>
+            </a:pPr>
+            <a:r>
+              <a:rPr lang="en-US" sz="1400" dirty="0">
+                <a:solidFill>
+                  <a:schemeClr val="accent4"/>
+                </a:solidFill>
+                <a:latin typeface="Courier New" pitchFamily="34" charset="0"/>
+                <a:ea typeface="Courier New" pitchFamily="34" charset="-122"/>
+                <a:cs typeface="Courier New" pitchFamily="34" charset="-120"/>
+              </a:rPr>
+              <a:t>flutter build apk --release</a:t>
+            </a:r>
+            <a:endParaRPr lang="en-US" sz="1400" dirty="0"/>
+          </a:p>
+          <a:p>
+            <a:pPr indent="0" marL="0">
+              <a:spcAft>
+                <a:spcPts val="600"/>
+              </a:spcAft>
+              <a:buNone/>
+            </a:pPr>
+            <a:r>
+              <a:rPr lang="en-US" sz="800" dirty="0">
+                <a:solidFill>
+                  <a:schemeClr val="bg1"/>
+                </a:solidFill>
+              </a:rPr>
+              <a:t> </a:t>
+            </a:r>
+            <a:endParaRPr lang="en-US" sz="1400" dirty="0"/>
+          </a:p>
+          <a:p>
+            <a:pPr marL="342900" indent="-342900">
+              <a:spcAft>
+                <a:spcPts val="600"/>
+              </a:spcAft>
+              <a:buSzPct val="100000"/>
+              <a:buChar char="•"/>
+            </a:pPr>
+            <a:r>
+              <a:rPr lang="en-US" sz="1400" dirty="0">
+                <a:solidFill>
+                  <a:schemeClr val="bg1"/>
+                </a:solidFill>
+              </a:rPr>
+              <a:t>GitHub Actions собирает APK для Android, IPA для iPhone, Windows и сервер API</a:t>
+            </a:r>
+            <a:endParaRPr lang="en-US" sz="1400" dirty="0"/>
+          </a:p>
+          <a:p>
+            <a:pPr marL="342900" indent="-342900">
+              <a:spcAft>
+                <a:spcPts val="600"/>
+              </a:spcAft>
+              <a:buSzPct val="100000"/>
+              <a:buChar char="•"/>
+            </a:pPr>
+            <a:r>
+              <a:rPr lang="en-US" sz="1400" dirty="0">
+                <a:solidFill>
+                  <a:schemeClr val="bg1"/>
+                </a:solidFill>
+              </a:rPr>
+              <a:t>iPhone: установка через Sideloadly</a:t>
+            </a:r>
+            <a:endParaRPr lang="en-US" sz="1400" dirty="0"/>
+          </a:p>
+          <a:p>
+            <a:pPr marL="342900" indent="-342900">
+              <a:spcAft>
+                <a:spcPts val="600"/>
+              </a:spcAft>
+              <a:buSzPct val="100000"/>
+              <a:buChar char="•"/>
+            </a:pPr>
+            <a:r>
+              <a:rPr lang="en-US" sz="1400" dirty="0">
+                <a:solidFill>
+                  <a:schemeClr val="bg1"/>
+                </a:solidFill>
+              </a:rPr>
+              <a:t>Без облака и ключей: сервер на своём ноутбуке</a:t>
+            </a:r>
+            <a:endParaRPr lang="en-US" sz="1400" dirty="0"/>
+          </a:p>
+        </p:txBody>
+      </p:sp>
+      <p:sp>
+        <p:nvSpPr>
+          <p:cNvPr id="25" name="Slide Number Placeholder 0"/>
+          <p:cNvSpPr>
+            <a:spLocks noGrp="1"/>
+          </p:cNvSpPr>
+          <p:nvPr>
+            <p:ph type="sldNum" sz="quarter" idx="4294967295"/>
+          </p:nvPr>
+        </p:nvSpPr>
+        <p:spPr>
+          <a:xfrm>
+            <a:off x="11183112" y="6382512"/>
+            <a:ext cx="457200" cy="274320"/>
+          </a:xfrm>
+          <a:prstGeom prst="rect">
+            <a:avLst/>
+          </a:prstGeom>
+          <a:extLst>
+            <a:ext uri="{C572A759-6A51-4108-AA02-DFA0A04FC94B}">
+              <ma14:wrappingTextBoxFlag xmlns:ma14="http://schemas.microsoft.com/office/mac/drawingml/2011/main" val="0"/>
+            </a:ext>
+          </a:extLst>
+        </p:spPr>
+        <p:txBody>
+          <a:bodyPr/>
+          <a:lstStyle>
+            <a:lvl1pPr>
+              <a:defRPr sz="1000">
+                <a:solidFill>
+                  <a:schemeClr val="accent6"/>
+                </a:solidFill>
+              </a:defRPr>
+            </a:lvl1pPr>
+          </a:lstStyle>
+          <a:p>
+            <a:pPr algn="r"/>
+            <a:fld id="{F7021451-1387-4CA6-816F-3879F97B5CBC}" type="slidenum">
+              <a:rPr b="0" lang="en-US"/>
+              <a:t>16</a:t>
+            </a:fld>
+            <a:endParaRPr lang="en-US"/>
+          </a:p>
+        </p:txBody>
+      </p:sp>
+    </p:spTree>
+  </p:cSld>
+  <p:clrMapOvr>
+    <a:masterClrMapping/>
+  </p:clrMapOvr>
+</p:sld>
+</file>
+
+<file path=ppt/slides/slide17.xml><?xml version="1.0" encoding="utf-8"?>
+<p:sld xmlns:a="http://schemas.openxmlformats.org/drawingml/2006/main" xmlns:r="http://schemas.openxmlformats.org/officeDocument/2006/relationships" xmlns:p="http://schemas.openxmlformats.org/presentationml/2006/main">
+  <p:cSld name="Slide 17">
+    <p:spTree>
+      <p:nvGrpSpPr>
+        <p:cNvPr id="1" name=""/>
+        <p:cNvGrpSpPr/>
+        <p:nvPr/>
+      </p:nvGrpSpPr>
+      <p:grpSpPr>
+        <a:xfrm>
+          <a:off x="0" y="0"/>
+          <a:ext cx="0" cy="0"/>
+          <a:chOff x="0" y="0"/>
+          <a:chExt cx="0" cy="0"/>
+        </a:xfrm>
+      </p:grpSpPr>
+      <p:sp>
+        <p:nvSpPr>
+          <p:cNvPr id="2" name="Text 0"/>
           <p:cNvSpPr txBox="1"/>
           <p:nvPr/>
         </p:nvSpPr>
@@ -7763,7 +9127,7 @@
                   <a:schemeClr val="bg1"/>
                 </a:solidFill>
               </a:rPr>
-              <a:t>Clean Architecture: алгоритм на чистом Dart, Riverpod, drift, go_router</a:t>
+              <a:t>Клиент-сервер: приложение Flutter и свой сервер API на Dart с SQLite</a:t>
             </a:r>
             <a:endParaRPr lang="en-US" sz="1700" dirty="0"/>
           </a:p>
@@ -7911,7 +9275,7 @@
                   <a:schemeClr val="bg1"/>
                 </a:solidFill>
               </a:rPr>
-              <a:t>97 тестов, интеграционный тест, CI и релизный APK</a:t>
+              <a:t>137 тестов, CI и сборки для Android, iPhone и Windows</a:t>
             </a:r>
             <a:endParaRPr lang="en-US" sz="1700" dirty="0"/>
           </a:p>
@@ -10927,7 +12291,7 @@
                             <a:schemeClr val="tx1"/>
                           </a:solidFill>
                         </a:rPr>
-                        <a:t>Работа без интернета</a:t>
+                        <a:t>Где хранятся данные</a:t>
                       </a:r>
                       <a:endParaRPr lang="en-US" sz="1400" dirty="0"/>
                     </a:p>
@@ -10988,7 +12352,7 @@
                             <a:schemeClr val="tx1"/>
                           </a:solidFill>
                         </a:rPr>
-                        <a:t>нет</a:t>
+                        <a:t>облако сервиса</a:t>
                       </a:r>
                       <a:endParaRPr lang="en-US" sz="1400" dirty="0"/>
                     </a:p>
@@ -11049,7 +12413,7 @@
                             <a:schemeClr val="tx1"/>
                           </a:solidFill>
                         </a:rPr>
-                        <a:t>нет</a:t>
+                        <a:t>облако сервиса</a:t>
                       </a:r>
                       <a:endParaRPr lang="en-US" sz="1400" dirty="0"/>
                     </a:p>
@@ -11110,7 +12474,7 @@
                             <a:schemeClr val="tx1"/>
                           </a:solidFill>
                         </a:rPr>
-                        <a:t>нет</a:t>
+                        <a:t>облако сервиса</a:t>
                       </a:r>
                       <a:endParaRPr lang="en-US" sz="1400" dirty="0"/>
                     </a:p>
@@ -11171,7 +12535,7 @@
                             <a:schemeClr val="tx1"/>
                           </a:solidFill>
                         </a:rPr>
-                        <a:t>частично</a:t>
+                        <a:t>облако сервиса</a:t>
                       </a:r>
                       <a:endParaRPr lang="en-US" sz="1400" dirty="0"/>
                     </a:p>
@@ -11232,7 +12596,7 @@
                             <a:schemeClr val="tx2"/>
                           </a:solidFill>
                         </a:rPr>
-                        <a:t>да, всё локально</a:t>
+                        <a:t>свой сервер API</a:t>
                       </a:r>
                       <a:endParaRPr lang="en-US" sz="1400" dirty="0"/>
                     </a:p>
@@ -11491,7 +12855,7 @@
                   <a:schemeClr val="tx2"/>
                 </a:solidFill>
               </a:rPr>
-              <a:t>Архитектура: три слоя Clean Architecture</a:t>
+              <a:t>Архитектура: приложение и сервер API</a:t>
             </a:r>
             <a:endParaRPr lang="en-US" sz="3200" dirty="0"/>
           </a:p>
@@ -11499,18 +12863,18 @@
       </p:sp>
       <p:sp>
         <p:nvSpPr>
-          <p:cNvPr id="3" name="Слой Presentation"/>
+          <p:cNvPr id="3" name="Приложение"/>
           <p:cNvSpPr/>
           <p:nvPr/>
         </p:nvSpPr>
         <p:spPr>
           <a:xfrm>
-            <a:off x="548640" y="1371600"/>
-            <a:ext cx="5120640" cy="1280160"/>
+            <a:off x="548640" y="1280160"/>
+            <a:ext cx="4572000" cy="3154680"/>
           </a:xfrm>
           <a:prstGeom prst="roundRect">
             <a:avLst>
-              <a:gd name="adj" fmla="val 8571"/>
+              <a:gd name="adj" fmla="val 3478"/>
             </a:avLst>
           </a:prstGeom>
           <a:solidFill>
@@ -11527,8 +12891,8 @@
         </p:nvSpPr>
         <p:spPr>
           <a:xfrm>
-            <a:off x="822960" y="1554480"/>
-            <a:ext cx="4572000" cy="365760"/>
+            <a:off x="777240" y="1389888"/>
+            <a:ext cx="4206240" cy="365760"/>
           </a:xfrm>
           <a:prstGeom prst="rect">
             <a:avLst/>
@@ -11544,67 +12908,194 @@
               <a:buNone/>
             </a:pPr>
             <a:r>
-              <a:rPr lang="en-US" sz="1900" b="1" dirty="0">
+              <a:rPr lang="en-US" sz="1700" b="1" dirty="0">
                 <a:solidFill>
                   <a:schemeClr val="tx2"/>
                 </a:solidFill>
               </a:rPr>
-              <a:t>Presentation</a:t>
-            </a:r>
-            <a:endParaRPr lang="en-US" sz="1900" dirty="0"/>
-          </a:p>
-        </p:txBody>
-      </p:sp>
-      <p:sp>
-        <p:nvSpPr>
-          <p:cNvPr id="5" name="Text 3"/>
-          <p:cNvSpPr txBox="1"/>
-          <p:nvPr/>
-        </p:nvSpPr>
-        <p:spPr>
-          <a:xfrm>
-            <a:off x="822960" y="1965960"/>
-            <a:ext cx="4663440" cy="640080"/>
-          </a:xfrm>
-          <a:prstGeom prst="rect">
-            <a:avLst/>
-          </a:prstGeom>
-          <a:noFill/>
-          <a:ln/>
-        </p:spPr>
-        <p:txBody>
-          <a:bodyPr wrap="square" lIns="0" tIns="0" rIns="0" bIns="0" rtlCol="0" anchor="t"/>
-          <a:lstStyle/>
-          <a:p>
+              <a:t>Приложение</a:t>
+            </a:r>
             <a:pPr indent="0" marL="0">
               <a:buNone/>
             </a:pPr>
             <a:r>
-              <a:rPr lang="en-US" sz="1400" dirty="0">
-                <a:solidFill>
-                  <a:schemeClr val="tx1"/>
-                </a:solidFill>
-              </a:rPr>
-              <a:t>Экраны Material 3, провайдеры Riverpod, go_router с redirect</a:t>
-            </a:r>
-            <a:endParaRPr lang="en-US" sz="1400" dirty="0"/>
-          </a:p>
-        </p:txBody>
-      </p:sp>
-      <p:sp>
-        <p:nvSpPr>
-          <p:cNvPr id="6" name="Слой Domain · чистый Dart"/>
+              <a:rPr lang="en-US" sz="1300" dirty="0">
+                <a:solidFill>
+                  <a:schemeClr val="accent6"/>
+                </a:solidFill>
+              </a:rPr>
+              <a:t>  Flutter, телефон</a:t>
+            </a:r>
+            <a:endParaRPr lang="en-US" sz="1700" dirty="0"/>
+          </a:p>
+        </p:txBody>
+      </p:sp>
+      <p:sp>
+        <p:nvSpPr>
+          <p:cNvPr id="5" name="Метка Экраны Material 3"/>
           <p:cNvSpPr/>
           <p:nvPr/>
         </p:nvSpPr>
         <p:spPr>
           <a:xfrm>
-            <a:off x="548640" y="2971800"/>
-            <a:ext cx="5120640" cy="1280160"/>
+            <a:off x="777240" y="1847088"/>
+            <a:ext cx="4114800" cy="402336"/>
           </a:xfrm>
           <a:prstGeom prst="roundRect">
             <a:avLst>
-              <a:gd name="adj" fmla="val 8571"/>
+              <a:gd name="adj" fmla="val 45455"/>
+            </a:avLst>
+          </a:prstGeom>
+          <a:solidFill>
+            <a:schemeClr val="bg1"/>
+          </a:solidFill>
+          <a:ln/>
+        </p:spPr>
+        <p:txBody>
+          <a:bodyPr wrap="square" lIns="635" tIns="635" rIns="635" bIns="635" rtlCol="0" anchor="ctr"/>
+          <a:lstStyle/>
+          <a:p>
+            <a:pPr algn="ctr" indent="0" marL="0">
+              <a:buNone/>
+            </a:pPr>
+            <a:r>
+              <a:rPr lang="en-US" sz="1300" b="1" dirty="0">
+                <a:solidFill>
+                  <a:schemeClr val="tx2"/>
+                </a:solidFill>
+              </a:rPr>
+              <a:t>Экраны Material 3</a:t>
+            </a:r>
+            <a:endParaRPr lang="en-US" sz="1300" dirty="0"/>
+          </a:p>
+        </p:txBody>
+      </p:sp>
+      <p:sp>
+        <p:nvSpPr>
+          <p:cNvPr id="6" name="Text 4"/>
+          <p:cNvSpPr txBox="1"/>
+          <p:nvPr/>
+        </p:nvSpPr>
+        <p:spPr>
+          <a:xfrm>
+            <a:off x="2651760" y="2231136"/>
+            <a:ext cx="365760" cy="128016"/>
+          </a:xfrm>
+          <a:prstGeom prst="rect">
+            <a:avLst/>
+          </a:prstGeom>
+          <a:noFill/>
+          <a:ln/>
+        </p:spPr>
+        <p:txBody>
+          <a:bodyPr wrap="square" lIns="0" tIns="0" rIns="0" bIns="0" rtlCol="0" anchor="ctr"/>
+          <a:lstStyle/>
+          <a:p>
+            <a:pPr algn="ctr" indent="0" marL="0">
+              <a:buNone/>
+            </a:pPr>
+            <a:r>
+              <a:rPr lang="en-US" sz="900" dirty="0">
+                <a:solidFill>
+                  <a:schemeClr val="accent1"/>
+                </a:solidFill>
+              </a:rPr>
+              <a:t>↓</a:t>
+            </a:r>
+            <a:endParaRPr lang="en-US" sz="900" dirty="0"/>
+          </a:p>
+        </p:txBody>
+      </p:sp>
+      <p:sp>
+        <p:nvSpPr>
+          <p:cNvPr id="7" name="Метка Провайдеры Riverpod"/>
+          <p:cNvSpPr/>
+          <p:nvPr/>
+        </p:nvSpPr>
+        <p:spPr>
+          <a:xfrm>
+            <a:off x="777240" y="2350008"/>
+            <a:ext cx="4114800" cy="402336"/>
+          </a:xfrm>
+          <a:prstGeom prst="roundRect">
+            <a:avLst>
+              <a:gd name="adj" fmla="val 45455"/>
+            </a:avLst>
+          </a:prstGeom>
+          <a:solidFill>
+            <a:schemeClr val="bg1"/>
+          </a:solidFill>
+          <a:ln/>
+        </p:spPr>
+        <p:txBody>
+          <a:bodyPr wrap="square" lIns="635" tIns="635" rIns="635" bIns="635" rtlCol="0" anchor="ctr"/>
+          <a:lstStyle/>
+          <a:p>
+            <a:pPr algn="ctr" indent="0" marL="0">
+              <a:buNone/>
+            </a:pPr>
+            <a:r>
+              <a:rPr lang="en-US" sz="1300" b="1" dirty="0">
+                <a:solidFill>
+                  <a:schemeClr val="tx2"/>
+                </a:solidFill>
+              </a:rPr>
+              <a:t>Провайдеры Riverpod</a:t>
+            </a:r>
+            <a:endParaRPr lang="en-US" sz="1300" dirty="0"/>
+          </a:p>
+        </p:txBody>
+      </p:sp>
+      <p:sp>
+        <p:nvSpPr>
+          <p:cNvPr id="8" name="Text 6"/>
+          <p:cNvSpPr txBox="1"/>
+          <p:nvPr/>
+        </p:nvSpPr>
+        <p:spPr>
+          <a:xfrm>
+            <a:off x="2651760" y="2734056"/>
+            <a:ext cx="365760" cy="128016"/>
+          </a:xfrm>
+          <a:prstGeom prst="rect">
+            <a:avLst/>
+          </a:prstGeom>
+          <a:noFill/>
+          <a:ln/>
+        </p:spPr>
+        <p:txBody>
+          <a:bodyPr wrap="square" lIns="0" tIns="0" rIns="0" bIns="0" rtlCol="0" anchor="ctr"/>
+          <a:lstStyle/>
+          <a:p>
+            <a:pPr algn="ctr" indent="0" marL="0">
+              <a:buNone/>
+            </a:pPr>
+            <a:r>
+              <a:rPr lang="en-US" sz="900" dirty="0">
+                <a:solidFill>
+                  <a:schemeClr val="accent1"/>
+                </a:solidFill>
+              </a:rPr>
+              <a:t>↓</a:t>
+            </a:r>
+            <a:endParaRPr lang="en-US" sz="900" dirty="0"/>
+          </a:p>
+        </p:txBody>
+      </p:sp>
+      <p:sp>
+        <p:nvSpPr>
+          <p:cNvPr id="9" name="Метка PlanService и алгоритм · domain"/>
+          <p:cNvSpPr/>
+          <p:nvPr/>
+        </p:nvSpPr>
+        <p:spPr>
+          <a:xfrm>
+            <a:off x="777240" y="2852928"/>
+            <a:ext cx="4114800" cy="402336"/>
+          </a:xfrm>
+          <a:prstGeom prst="roundRect">
+            <a:avLst>
+              <a:gd name="adj" fmla="val 45455"/>
             </a:avLst>
           </a:prstGeom>
           <a:solidFill>
@@ -11612,17 +13103,35 @@
           </a:solidFill>
           <a:ln/>
         </p:spPr>
-      </p:sp>
-      <p:sp>
-        <p:nvSpPr>
-          <p:cNvPr id="7" name="Text 5"/>
+        <p:txBody>
+          <a:bodyPr wrap="square" lIns="635" tIns="635" rIns="635" bIns="635" rtlCol="0" anchor="ctr"/>
+          <a:lstStyle/>
+          <a:p>
+            <a:pPr algn="ctr" indent="0" marL="0">
+              <a:buNone/>
+            </a:pPr>
+            <a:r>
+              <a:rPr lang="en-US" sz="1300" b="1" dirty="0">
+                <a:solidFill>
+                  <a:schemeClr val="bg1"/>
+                </a:solidFill>
+              </a:rPr>
+              <a:t>PlanService и алгоритм · domain</a:t>
+            </a:r>
+            <a:endParaRPr lang="en-US" sz="1300" dirty="0"/>
+          </a:p>
+        </p:txBody>
+      </p:sp>
+      <p:sp>
+        <p:nvSpPr>
+          <p:cNvPr id="10" name="Text 8"/>
           <p:cNvSpPr txBox="1"/>
           <p:nvPr/>
         </p:nvSpPr>
         <p:spPr>
           <a:xfrm>
-            <a:off x="822960" y="3154680"/>
-            <a:ext cx="4572000" cy="365760"/>
+            <a:off x="2651760" y="3236976"/>
+            <a:ext cx="365760" cy="128016"/>
           </a:xfrm>
           <a:prstGeom prst="rect">
             <a:avLst/>
@@ -11631,74 +13140,154 @@
           <a:ln/>
         </p:spPr>
         <p:txBody>
-          <a:bodyPr wrap="square" lIns="0" tIns="0" rIns="0" bIns="0" rtlCol="0" anchor="t"/>
-          <a:lstStyle/>
-          <a:p>
-            <a:pPr indent="0" marL="0">
-              <a:buNone/>
-            </a:pPr>
-            <a:r>
-              <a:rPr lang="en-US" sz="1900" b="1" dirty="0">
-                <a:solidFill>
-                  <a:schemeClr val="bg1"/>
-                </a:solidFill>
-              </a:rPr>
-              <a:t>Domain · чистый Dart</a:t>
-            </a:r>
-            <a:endParaRPr lang="en-US" sz="1900" dirty="0"/>
-          </a:p>
-        </p:txBody>
-      </p:sp>
-      <p:sp>
-        <p:nvSpPr>
-          <p:cNvPr id="8" name="Text 6"/>
-          <p:cNvSpPr txBox="1"/>
-          <p:nvPr/>
-        </p:nvSpPr>
-        <p:spPr>
-          <a:xfrm>
-            <a:off x="822960" y="3566160"/>
-            <a:ext cx="4663440" cy="640080"/>
-          </a:xfrm>
-          <a:prstGeom prst="rect">
-            <a:avLst/>
-          </a:prstGeom>
-          <a:noFill/>
-          <a:ln/>
-        </p:spPr>
-        <p:txBody>
-          <a:bodyPr wrap="square" lIns="0" tIns="0" rIns="0" bIns="0" rtlCol="0" anchor="t"/>
-          <a:lstStyle/>
-          <a:p>
-            <a:pPr indent="0" marL="0">
-              <a:buNone/>
-            </a:pPr>
-            <a:r>
-              <a:rPr lang="en-US" sz="1400" dirty="0">
-                <a:solidFill>
-                  <a:schemeClr val="bg1"/>
-                </a:solidFill>
-              </a:rPr>
-              <a:t>Алгоритм плана, сущности, интерфейсы репозиториев. Не зависит от Flutter</a:t>
-            </a:r>
-            <a:endParaRPr lang="en-US" sz="1400" dirty="0"/>
-          </a:p>
-        </p:txBody>
-      </p:sp>
-      <p:sp>
-        <p:nvSpPr>
-          <p:cNvPr id="9" name="Слой Data"/>
+          <a:bodyPr wrap="square" lIns="0" tIns="0" rIns="0" bIns="0" rtlCol="0" anchor="ctr"/>
+          <a:lstStyle/>
+          <a:p>
+            <a:pPr algn="ctr" indent="0" marL="0">
+              <a:buNone/>
+            </a:pPr>
+            <a:r>
+              <a:rPr lang="en-US" sz="900" dirty="0">
+                <a:solidFill>
+                  <a:schemeClr val="accent1"/>
+                </a:solidFill>
+              </a:rPr>
+              <a:t>↓</a:t>
+            </a:r>
+            <a:endParaRPr lang="en-US" sz="900" dirty="0"/>
+          </a:p>
+        </p:txBody>
+      </p:sp>
+      <p:sp>
+        <p:nvSpPr>
+          <p:cNvPr id="11" name="Метка Репозитории API"/>
           <p:cNvSpPr/>
           <p:nvPr/>
         </p:nvSpPr>
         <p:spPr>
           <a:xfrm>
-            <a:off x="548640" y="4572000"/>
-            <a:ext cx="5120640" cy="1280160"/>
+            <a:off x="777240" y="3355848"/>
+            <a:ext cx="4114800" cy="402336"/>
           </a:xfrm>
           <a:prstGeom prst="roundRect">
             <a:avLst>
-              <a:gd name="adj" fmla="val 8571"/>
+              <a:gd name="adj" fmla="val 45455"/>
+            </a:avLst>
+          </a:prstGeom>
+          <a:solidFill>
+            <a:schemeClr val="bg1"/>
+          </a:solidFill>
+          <a:ln/>
+        </p:spPr>
+        <p:txBody>
+          <a:bodyPr wrap="square" lIns="635" tIns="635" rIns="635" bIns="635" rtlCol="0" anchor="ctr"/>
+          <a:lstStyle/>
+          <a:p>
+            <a:pPr algn="ctr" indent="0" marL="0">
+              <a:buNone/>
+            </a:pPr>
+            <a:r>
+              <a:rPr lang="en-US" sz="1300" b="1" dirty="0">
+                <a:solidFill>
+                  <a:schemeClr val="tx2"/>
+                </a:solidFill>
+              </a:rPr>
+              <a:t>Репозитории API</a:t>
+            </a:r>
+            <a:endParaRPr lang="en-US" sz="1300" dirty="0"/>
+          </a:p>
+        </p:txBody>
+      </p:sp>
+      <p:sp>
+        <p:nvSpPr>
+          <p:cNvPr id="12" name="Text 10"/>
+          <p:cNvSpPr txBox="1"/>
+          <p:nvPr/>
+        </p:nvSpPr>
+        <p:spPr>
+          <a:xfrm>
+            <a:off x="2651760" y="3739896"/>
+            <a:ext cx="365760" cy="128016"/>
+          </a:xfrm>
+          <a:prstGeom prst="rect">
+            <a:avLst/>
+          </a:prstGeom>
+          <a:noFill/>
+          <a:ln/>
+        </p:spPr>
+        <p:txBody>
+          <a:bodyPr wrap="square" lIns="0" tIns="0" rIns="0" bIns="0" rtlCol="0" anchor="ctr"/>
+          <a:lstStyle/>
+          <a:p>
+            <a:pPr algn="ctr" indent="0" marL="0">
+              <a:buNone/>
+            </a:pPr>
+            <a:r>
+              <a:rPr lang="en-US" sz="900" dirty="0">
+                <a:solidFill>
+                  <a:schemeClr val="accent1"/>
+                </a:solidFill>
+              </a:rPr>
+              <a:t>↓</a:t>
+            </a:r>
+            <a:endParaRPr lang="en-US" sz="900" dirty="0"/>
+          </a:p>
+        </p:txBody>
+      </p:sp>
+      <p:sp>
+        <p:nvSpPr>
+          <p:cNvPr id="13" name="Метка ApiClient: токен, ожидание 10 с, ошибки"/>
+          <p:cNvSpPr/>
+          <p:nvPr/>
+        </p:nvSpPr>
+        <p:spPr>
+          <a:xfrm>
+            <a:off x="777240" y="3858768"/>
+            <a:ext cx="4114800" cy="402336"/>
+          </a:xfrm>
+          <a:prstGeom prst="roundRect">
+            <a:avLst>
+              <a:gd name="adj" fmla="val 45455"/>
+            </a:avLst>
+          </a:prstGeom>
+          <a:solidFill>
+            <a:schemeClr val="bg1"/>
+          </a:solidFill>
+          <a:ln/>
+        </p:spPr>
+        <p:txBody>
+          <a:bodyPr wrap="square" lIns="635" tIns="635" rIns="635" bIns="635" rtlCol="0" anchor="ctr"/>
+          <a:lstStyle/>
+          <a:p>
+            <a:pPr algn="ctr" indent="0" marL="0">
+              <a:buNone/>
+            </a:pPr>
+            <a:r>
+              <a:rPr lang="en-US" sz="1300" b="1" dirty="0">
+                <a:solidFill>
+                  <a:schemeClr val="tx2"/>
+                </a:solidFill>
+              </a:rPr>
+              <a:t>ApiClient: токен, ожидание 10 с, ошибки</a:t>
+            </a:r>
+            <a:endParaRPr lang="en-US" sz="1300" dirty="0"/>
+          </a:p>
+        </p:txBody>
+      </p:sp>
+      <p:sp>
+        <p:nvSpPr>
+          <p:cNvPr id="14" name="Сервер"/>
+          <p:cNvSpPr/>
+          <p:nvPr/>
+        </p:nvSpPr>
+        <p:spPr>
+          <a:xfrm>
+            <a:off x="7068312" y="1280160"/>
+            <a:ext cx="4572000" cy="3154680"/>
+          </a:xfrm>
+          <a:prstGeom prst="roundRect">
+            <a:avLst>
+              <a:gd name="adj" fmla="val 3478"/>
             </a:avLst>
           </a:prstGeom>
           <a:solidFill>
@@ -11709,14 +13298,14 @@
       </p:sp>
       <p:sp>
         <p:nvSpPr>
-          <p:cNvPr id="10" name="Text 8"/>
+          <p:cNvPr id="15" name="Text 13"/>
           <p:cNvSpPr txBox="1"/>
           <p:nvPr/>
         </p:nvSpPr>
         <p:spPr>
           <a:xfrm>
-            <a:off x="822960" y="4754880"/>
-            <a:ext cx="4572000" cy="365760"/>
+            <a:off x="7296912" y="1389888"/>
+            <a:ext cx="4206240" cy="365760"/>
           </a:xfrm>
           <a:prstGeom prst="rect">
             <a:avLst/>
@@ -11732,139 +13321,42 @@
               <a:buNone/>
             </a:pPr>
             <a:r>
-              <a:rPr lang="en-US" sz="1900" b="1" dirty="0">
+              <a:rPr lang="en-US" sz="1700" b="1" dirty="0">
                 <a:solidFill>
                   <a:schemeClr val="tx2"/>
                 </a:solidFill>
               </a:rPr>
-              <a:t>Data</a:t>
-            </a:r>
-            <a:endParaRPr lang="en-US" sz="1900" dirty="0"/>
-          </a:p>
-        </p:txBody>
-      </p:sp>
-      <p:sp>
-        <p:nvSpPr>
-          <p:cNvPr id="11" name="Text 9"/>
-          <p:cNvSpPr txBox="1"/>
-          <p:nvPr/>
-        </p:nvSpPr>
-        <p:spPr>
-          <a:xfrm>
-            <a:off x="822960" y="5166360"/>
-            <a:ext cx="4663440" cy="640080"/>
-          </a:xfrm>
-          <a:prstGeom prst="rect">
-            <a:avLst/>
-          </a:prstGeom>
-          <a:noFill/>
-          <a:ln/>
-        </p:spPr>
-        <p:txBody>
-          <a:bodyPr wrap="square" lIns="0" tIns="0" rIns="0" bIns="0" rtlCol="0" anchor="t"/>
-          <a:lstStyle/>
-          <a:p>
+              <a:t>Сервер API</a:t>
+            </a:r>
             <a:pPr indent="0" marL="0">
               <a:buNone/>
             </a:pPr>
             <a:r>
-              <a:rPr lang="en-US" sz="1400" dirty="0">
-                <a:solidFill>
-                  <a:schemeClr val="tx1"/>
-                </a:solidFill>
-              </a:rPr>
-              <a:t>drift (SQLite), JSON-каталог тем, настройки, уведомления</a:t>
-            </a:r>
-            <a:endParaRPr lang="en-US" sz="1400" dirty="0"/>
-          </a:p>
-        </p:txBody>
-      </p:sp>
-      <p:sp>
-        <p:nvSpPr>
-          <p:cNvPr id="12" name="Text 10"/>
-          <p:cNvSpPr txBox="1"/>
-          <p:nvPr/>
-        </p:nvSpPr>
-        <p:spPr>
-          <a:xfrm>
-            <a:off x="2377440" y="2651760"/>
-            <a:ext cx="1828800" cy="320040"/>
-          </a:xfrm>
-          <a:prstGeom prst="rect">
-            <a:avLst/>
-          </a:prstGeom>
-          <a:noFill/>
-          <a:ln/>
-        </p:spPr>
-        <p:txBody>
-          <a:bodyPr wrap="square" lIns="0" tIns="0" rIns="0" bIns="0" rtlCol="0" anchor="ctr"/>
-          <a:lstStyle/>
-          <a:p>
-            <a:pPr algn="ctr" indent="0" marL="0">
-              <a:buNone/>
-            </a:pPr>
-            <a:r>
-              <a:rPr lang="en-US" sz="1200" b="1" dirty="0">
-                <a:solidFill>
-                  <a:schemeClr val="accent1"/>
-                </a:solidFill>
-              </a:rPr>
-              <a:t>↓ вызывает</a:t>
-            </a:r>
-            <a:endParaRPr lang="en-US" sz="1200" dirty="0"/>
-          </a:p>
-        </p:txBody>
-      </p:sp>
-      <p:sp>
-        <p:nvSpPr>
-          <p:cNvPr id="13" name="Text 11"/>
-          <p:cNvSpPr txBox="1"/>
-          <p:nvPr/>
-        </p:nvSpPr>
-        <p:spPr>
-          <a:xfrm>
-            <a:off x="1920240" y="4251960"/>
-            <a:ext cx="2743200" cy="320040"/>
-          </a:xfrm>
-          <a:prstGeom prst="rect">
-            <a:avLst/>
-          </a:prstGeom>
-          <a:noFill/>
-          <a:ln/>
-        </p:spPr>
-        <p:txBody>
-          <a:bodyPr wrap="square" lIns="0" tIns="0" rIns="0" bIns="0" rtlCol="0" anchor="ctr"/>
-          <a:lstStyle/>
-          <a:p>
-            <a:pPr algn="ctr" indent="0" marL="0">
-              <a:buNone/>
-            </a:pPr>
-            <a:r>
-              <a:rPr lang="en-US" sz="1200" b="1" dirty="0">
-                <a:solidFill>
-                  <a:schemeClr val="accent1"/>
-                </a:solidFill>
-              </a:rPr>
-              <a:t>↑ реализует интерфейсы</a:t>
-            </a:r>
-            <a:endParaRPr lang="en-US" sz="1200" dirty="0"/>
-          </a:p>
-        </p:txBody>
-      </p:sp>
-      <p:sp>
-        <p:nvSpPr>
-          <p:cNvPr id="14" name="Выбор Состояние"/>
+              <a:rPr lang="en-US" sz="1300" dirty="0">
+                <a:solidFill>
+                  <a:schemeClr val="accent6"/>
+                </a:solidFill>
+              </a:rPr>
+              <a:t>  Dart, shelf, ноутбук</a:t>
+            </a:r>
+            <a:endParaRPr lang="en-US" sz="1700" dirty="0"/>
+          </a:p>
+        </p:txBody>
+      </p:sp>
+      <p:sp>
+        <p:nvSpPr>
+          <p:cNvPr id="16" name="Метка Маршруты shelf_router · 39 адресов"/>
           <p:cNvSpPr/>
           <p:nvPr/>
         </p:nvSpPr>
         <p:spPr>
           <a:xfrm>
-            <a:off x="6035040" y="1371600"/>
-            <a:ext cx="5605272" cy="1051560"/>
+            <a:off x="7296912" y="1847088"/>
+            <a:ext cx="4114800" cy="402336"/>
           </a:xfrm>
           <a:prstGeom prst="roundRect">
             <a:avLst>
-              <a:gd name="adj" fmla="val 10435"/>
+              <a:gd name="adj" fmla="val 45455"/>
             </a:avLst>
           </a:prstGeom>
           <a:solidFill>
@@ -11872,23 +13364,392 @@
           </a:solidFill>
           <a:ln/>
         </p:spPr>
-      </p:sp>
-      <p:sp>
-        <p:nvSpPr>
-          <p:cNvPr id="15" name="Рамка Состояние"/>
+        <p:txBody>
+          <a:bodyPr wrap="square" lIns="635" tIns="635" rIns="635" bIns="635" rtlCol="0" anchor="ctr"/>
+          <a:lstStyle/>
+          <a:p>
+            <a:pPr algn="ctr" indent="0" marL="0">
+              <a:buNone/>
+            </a:pPr>
+            <a:r>
+              <a:rPr lang="en-US" sz="1300" b="1" dirty="0">
+                <a:solidFill>
+                  <a:schemeClr val="tx2"/>
+                </a:solidFill>
+              </a:rPr>
+              <a:t>Маршруты shelf_router · 39 адресов</a:t>
+            </a:r>
+            <a:endParaRPr lang="en-US" sz="1300" dirty="0"/>
+          </a:p>
+        </p:txBody>
+      </p:sp>
+      <p:sp>
+        <p:nvSpPr>
+          <p:cNvPr id="17" name="Text 15"/>
+          <p:cNvSpPr txBox="1"/>
+          <p:nvPr/>
+        </p:nvSpPr>
+        <p:spPr>
+          <a:xfrm>
+            <a:off x="9171432" y="2231136"/>
+            <a:ext cx="365760" cy="128016"/>
+          </a:xfrm>
+          <a:prstGeom prst="rect">
+            <a:avLst/>
+          </a:prstGeom>
+          <a:noFill/>
+          <a:ln/>
+        </p:spPr>
+        <p:txBody>
+          <a:bodyPr wrap="square" lIns="0" tIns="0" rIns="0" bIns="0" rtlCol="0" anchor="ctr"/>
+          <a:lstStyle/>
+          <a:p>
+            <a:pPr algn="ctr" indent="0" marL="0">
+              <a:buNone/>
+            </a:pPr>
+            <a:r>
+              <a:rPr lang="en-US" sz="900" dirty="0">
+                <a:solidFill>
+                  <a:schemeClr val="accent1"/>
+                </a:solidFill>
+              </a:rPr>
+              <a:t>↓</a:t>
+            </a:r>
+            <a:endParaRPr lang="en-US" sz="900" dirty="0"/>
+          </a:p>
+        </p:txBody>
+      </p:sp>
+      <p:sp>
+        <p:nvSpPr>
+          <p:cNvPr id="18" name="Метка Проверка токена, данных и владельца"/>
           <p:cNvSpPr/>
           <p:nvPr/>
         </p:nvSpPr>
         <p:spPr>
           <a:xfrm>
-            <a:off x="6035040" y="1371600"/>
-            <a:ext cx="5605272" cy="1051560"/>
+            <a:off x="7296912" y="2350008"/>
+            <a:ext cx="4114800" cy="402336"/>
           </a:xfrm>
           <a:prstGeom prst="roundRect">
             <a:avLst>
-              <a:gd name="adj" fmla="val 10435"/>
+              <a:gd name="adj" fmla="val 45455"/>
             </a:avLst>
           </a:prstGeom>
+          <a:solidFill>
+            <a:schemeClr val="tx2"/>
+          </a:solidFill>
+          <a:ln/>
+        </p:spPr>
+        <p:txBody>
+          <a:bodyPr wrap="square" lIns="635" tIns="635" rIns="635" bIns="635" rtlCol="0" anchor="ctr"/>
+          <a:lstStyle/>
+          <a:p>
+            <a:pPr algn="ctr" indent="0" marL="0">
+              <a:buNone/>
+            </a:pPr>
+            <a:r>
+              <a:rPr lang="en-US" sz="1300" b="1" dirty="0">
+                <a:solidFill>
+                  <a:schemeClr val="bg1"/>
+                </a:solidFill>
+              </a:rPr>
+              <a:t>Проверка токена, данных и владельца</a:t>
+            </a:r>
+            <a:endParaRPr lang="en-US" sz="1300" dirty="0"/>
+          </a:p>
+        </p:txBody>
+      </p:sp>
+      <p:sp>
+        <p:nvSpPr>
+          <p:cNvPr id="19" name="Text 17"/>
+          <p:cNvSpPr txBox="1"/>
+          <p:nvPr/>
+        </p:nvSpPr>
+        <p:spPr>
+          <a:xfrm>
+            <a:off x="9171432" y="2734056"/>
+            <a:ext cx="365760" cy="128016"/>
+          </a:xfrm>
+          <a:prstGeom prst="rect">
+            <a:avLst/>
+          </a:prstGeom>
+          <a:noFill/>
+          <a:ln/>
+        </p:spPr>
+        <p:txBody>
+          <a:bodyPr wrap="square" lIns="0" tIns="0" rIns="0" bIns="0" rtlCol="0" anchor="ctr"/>
+          <a:lstStyle/>
+          <a:p>
+            <a:pPr algn="ctr" indent="0" marL="0">
+              <a:buNone/>
+            </a:pPr>
+            <a:r>
+              <a:rPr lang="en-US" sz="900" dirty="0">
+                <a:solidFill>
+                  <a:schemeClr val="accent1"/>
+                </a:solidFill>
+              </a:rPr>
+              <a:t>↓</a:t>
+            </a:r>
+            <a:endParaRPr lang="en-US" sz="900" dirty="0"/>
+          </a:p>
+        </p:txBody>
+      </p:sp>
+      <p:sp>
+        <p:nvSpPr>
+          <p:cNvPr id="20" name="Метка Репозитории drift"/>
+          <p:cNvSpPr/>
+          <p:nvPr/>
+        </p:nvSpPr>
+        <p:spPr>
+          <a:xfrm>
+            <a:off x="7296912" y="2852928"/>
+            <a:ext cx="4114800" cy="402336"/>
+          </a:xfrm>
+          <a:prstGeom prst="roundRect">
+            <a:avLst>
+              <a:gd name="adj" fmla="val 45455"/>
+            </a:avLst>
+          </a:prstGeom>
+          <a:solidFill>
+            <a:schemeClr val="bg1"/>
+          </a:solidFill>
+          <a:ln/>
+        </p:spPr>
+        <p:txBody>
+          <a:bodyPr wrap="square" lIns="635" tIns="635" rIns="635" bIns="635" rtlCol="0" anchor="ctr"/>
+          <a:lstStyle/>
+          <a:p>
+            <a:pPr algn="ctr" indent="0" marL="0">
+              <a:buNone/>
+            </a:pPr>
+            <a:r>
+              <a:rPr lang="en-US" sz="1300" b="1" dirty="0">
+                <a:solidFill>
+                  <a:schemeClr val="tx2"/>
+                </a:solidFill>
+              </a:rPr>
+              <a:t>Репозитории drift</a:t>
+            </a:r>
+            <a:endParaRPr lang="en-US" sz="1300" dirty="0"/>
+          </a:p>
+        </p:txBody>
+      </p:sp>
+      <p:sp>
+        <p:nvSpPr>
+          <p:cNvPr id="21" name="Text 19"/>
+          <p:cNvSpPr txBox="1"/>
+          <p:nvPr/>
+        </p:nvSpPr>
+        <p:spPr>
+          <a:xfrm>
+            <a:off x="9171432" y="3236976"/>
+            <a:ext cx="365760" cy="128016"/>
+          </a:xfrm>
+          <a:prstGeom prst="rect">
+            <a:avLst/>
+          </a:prstGeom>
+          <a:noFill/>
+          <a:ln/>
+        </p:spPr>
+        <p:txBody>
+          <a:bodyPr wrap="square" lIns="0" tIns="0" rIns="0" bIns="0" rtlCol="0" anchor="ctr"/>
+          <a:lstStyle/>
+          <a:p>
+            <a:pPr algn="ctr" indent="0" marL="0">
+              <a:buNone/>
+            </a:pPr>
+            <a:r>
+              <a:rPr lang="en-US" sz="900" dirty="0">
+                <a:solidFill>
+                  <a:schemeClr val="accent1"/>
+                </a:solidFill>
+              </a:rPr>
+              <a:t>↓</a:t>
+            </a:r>
+            <a:endParaRPr lang="en-US" sz="900" dirty="0"/>
+          </a:p>
+        </p:txBody>
+      </p:sp>
+      <p:sp>
+        <p:nvSpPr>
+          <p:cNvPr id="22" name="Метка База SQLite · 9 таблиц"/>
+          <p:cNvSpPr/>
+          <p:nvPr/>
+        </p:nvSpPr>
+        <p:spPr>
+          <a:xfrm>
+            <a:off x="7296912" y="3355848"/>
+            <a:ext cx="4114800" cy="402336"/>
+          </a:xfrm>
+          <a:prstGeom prst="roundRect">
+            <a:avLst>
+              <a:gd name="adj" fmla="val 45455"/>
+            </a:avLst>
+          </a:prstGeom>
+          <a:solidFill>
+            <a:schemeClr val="bg1"/>
+          </a:solidFill>
+          <a:ln/>
+        </p:spPr>
+        <p:txBody>
+          <a:bodyPr wrap="square" lIns="635" tIns="635" rIns="635" bIns="635" rtlCol="0" anchor="ctr"/>
+          <a:lstStyle/>
+          <a:p>
+            <a:pPr algn="ctr" indent="0" marL="0">
+              <a:buNone/>
+            </a:pPr>
+            <a:r>
+              <a:rPr lang="en-US" sz="1300" b="1" dirty="0">
+                <a:solidFill>
+                  <a:schemeClr val="tx2"/>
+                </a:solidFill>
+              </a:rPr>
+              <a:t>База SQLite · 9 таблиц</a:t>
+            </a:r>
+            <a:endParaRPr lang="en-US" sz="1300" dirty="0"/>
+          </a:p>
+        </p:txBody>
+      </p:sp>
+      <p:sp>
+        <p:nvSpPr>
+          <p:cNvPr id="23" name="Запрос"/>
+          <p:cNvSpPr/>
+          <p:nvPr/>
+        </p:nvSpPr>
+        <p:spPr>
+          <a:xfrm>
+            <a:off x="5257800" y="2514600"/>
+            <a:ext cx="1673352" cy="0"/>
+          </a:xfrm>
+          <a:prstGeom prst="line">
+            <a:avLst/>
+          </a:prstGeom>
+          <a:noFill/>
+          <a:ln w="31750">
+            <a:solidFill>
+              <a:schemeClr val="accent1"/>
+            </a:solidFill>
+            <a:prstDash val="solid"/>
+            <a:tailEnd type="triangle"/>
+          </a:ln>
+        </p:spPr>
+      </p:sp>
+      <p:sp>
+        <p:nvSpPr>
+          <p:cNvPr id="24" name="Ответ"/>
+          <p:cNvSpPr/>
+          <p:nvPr/>
+        </p:nvSpPr>
+        <p:spPr>
+          <a:xfrm>
+            <a:off x="5257800" y="3429000"/>
+            <a:ext cx="1673352" cy="0"/>
+          </a:xfrm>
+          <a:prstGeom prst="line">
+            <a:avLst/>
+          </a:prstGeom>
+          <a:noFill/>
+          <a:ln w="31750">
+            <a:solidFill>
+              <a:schemeClr val="tx2"/>
+            </a:solidFill>
+            <a:prstDash val="solid"/>
+            <a:headEnd type="triangle"/>
+          </a:ln>
+        </p:spPr>
+      </p:sp>
+      <p:sp>
+        <p:nvSpPr>
+          <p:cNvPr id="25" name="Text 23"/>
+          <p:cNvSpPr txBox="1"/>
+          <p:nvPr/>
+        </p:nvSpPr>
+        <p:spPr>
+          <a:xfrm>
+            <a:off x="5166360" y="1874520"/>
+            <a:ext cx="1856232" cy="566928"/>
+          </a:xfrm>
+          <a:prstGeom prst="rect">
+            <a:avLst/>
+          </a:prstGeom>
+          <a:noFill/>
+          <a:ln/>
+        </p:spPr>
+        <p:txBody>
+          <a:bodyPr wrap="square" lIns="0" tIns="0" rIns="0" bIns="0" rtlCol="0" anchor="b"/>
+          <a:lstStyle/>
+          <a:p>
+            <a:pPr algn="ctr" indent="0" marL="0">
+              <a:buNone/>
+            </a:pPr>
+            <a:r>
+              <a:rPr lang="en-US" sz="1200" b="1" dirty="0">
+                <a:solidFill>
+                  <a:schemeClr val="accent1"/>
+                </a:solidFill>
+              </a:rPr>
+              <a:t>запрос HTTP + JSON, токен Bearer</a:t>
+            </a:r>
+            <a:endParaRPr lang="en-US" sz="1200" dirty="0"/>
+          </a:p>
+        </p:txBody>
+      </p:sp>
+      <p:sp>
+        <p:nvSpPr>
+          <p:cNvPr id="26" name="Text 24"/>
+          <p:cNvSpPr txBox="1"/>
+          <p:nvPr/>
+        </p:nvSpPr>
+        <p:spPr>
+          <a:xfrm>
+            <a:off x="5166360" y="3520440"/>
+            <a:ext cx="1856232" cy="566928"/>
+          </a:xfrm>
+          <a:prstGeom prst="rect">
+            <a:avLst/>
+          </a:prstGeom>
+          <a:noFill/>
+          <a:ln/>
+        </p:spPr>
+        <p:txBody>
+          <a:bodyPr wrap="square" lIns="0" tIns="0" rIns="0" bIns="0" rtlCol="0" anchor="t"/>
+          <a:lstStyle/>
+          <a:p>
+            <a:pPr algn="ctr" indent="0" marL="0">
+              <a:buNone/>
+            </a:pPr>
+            <a:r>
+              <a:rPr lang="en-US" sz="1200" b="1" dirty="0">
+                <a:solidFill>
+                  <a:schemeClr val="tx2"/>
+                </a:solidFill>
+              </a:rPr>
+              <a:t>ответ JSON, код 200 / 201 / 204 / 4xx</a:t>
+            </a:r>
+            <a:endParaRPr lang="en-US" sz="1200" dirty="0"/>
+          </a:p>
+        </p:txBody>
+      </p:sp>
+      <p:sp>
+        <p:nvSpPr>
+          <p:cNvPr id="27" name="Выбор Состояние"/>
+          <p:cNvSpPr/>
+          <p:nvPr/>
+        </p:nvSpPr>
+        <p:spPr>
+          <a:xfrm>
+            <a:off x="548640" y="4617720"/>
+            <a:ext cx="2633472" cy="1554480"/>
+          </a:xfrm>
+          <a:prstGeom prst="roundRect">
+            <a:avLst>
+              <a:gd name="adj" fmla="val 7059"/>
+            </a:avLst>
+          </a:prstGeom>
+          <a:solidFill>
+            <a:schemeClr val="bg1"/>
+          </a:solidFill>
           <a:ln w="12700">
             <a:solidFill>
               <a:srgbClr val="D5DCEC"/>
@@ -11899,14 +13760,14 @@
       </p:sp>
       <p:sp>
         <p:nvSpPr>
-          <p:cNvPr id="16" name="Text 14"/>
+          <p:cNvPr id="28" name="Text 26"/>
           <p:cNvSpPr txBox="1"/>
           <p:nvPr/>
         </p:nvSpPr>
         <p:spPr>
           <a:xfrm>
-            <a:off x="6263640" y="1481328"/>
-            <a:ext cx="5212080" cy="320040"/>
+            <a:off x="731520" y="4727448"/>
+            <a:ext cx="2286000" cy="274320"/>
           </a:xfrm>
           <a:prstGeom prst="rect">
             <a:avLst/>
@@ -11922,113 +13783,108 @@
               <a:buNone/>
             </a:pPr>
             <a:r>
-              <a:rPr lang="en-US" sz="1600" dirty="0">
+              <a:rPr lang="en-US" sz="1300" dirty="0">
                 <a:solidFill>
                   <a:schemeClr val="accent6"/>
                 </a:solidFill>
               </a:rPr>
-              <a:t>Состояние: </a:t>
-            </a:r>
+              <a:t>Состояние</a:t>
+            </a:r>
+            <a:endParaRPr lang="en-US" sz="1300" dirty="0"/>
+          </a:p>
+        </p:txBody>
+      </p:sp>
+      <p:sp>
+        <p:nvSpPr>
+          <p:cNvPr id="29" name="Text 27"/>
+          <p:cNvSpPr txBox="1"/>
+          <p:nvPr/>
+        </p:nvSpPr>
+        <p:spPr>
+          <a:xfrm>
+            <a:off x="731520" y="5001768"/>
+            <a:ext cx="2286000" cy="365760"/>
+          </a:xfrm>
+          <a:prstGeom prst="rect">
+            <a:avLst/>
+          </a:prstGeom>
+          <a:noFill/>
+          <a:ln/>
+        </p:spPr>
+        <p:txBody>
+          <a:bodyPr wrap="square" lIns="0" tIns="0" rIns="0" bIns="0" rtlCol="0" anchor="t"/>
+          <a:lstStyle/>
+          <a:p>
             <a:pPr indent="0" marL="0">
               <a:buNone/>
             </a:pPr>
             <a:r>
-              <a:rPr lang="en-US" sz="1600" b="1" dirty="0">
+              <a:rPr lang="en-US" sz="1700" b="1" dirty="0">
                 <a:solidFill>
                   <a:schemeClr val="accent1"/>
                 </a:solidFill>
               </a:rPr>
               <a:t>Riverpod</a:t>
             </a:r>
+            <a:endParaRPr lang="en-US" sz="1700" dirty="0"/>
+          </a:p>
+        </p:txBody>
+      </p:sp>
+      <p:sp>
+        <p:nvSpPr>
+          <p:cNvPr id="30" name="Text 28"/>
+          <p:cNvSpPr txBox="1"/>
+          <p:nvPr/>
+        </p:nvSpPr>
+        <p:spPr>
+          <a:xfrm>
+            <a:off x="731520" y="5394960"/>
+            <a:ext cx="2331720" cy="731520"/>
+          </a:xfrm>
+          <a:prstGeom prst="rect">
+            <a:avLst/>
+          </a:prstGeom>
+          <a:noFill/>
+          <a:ln/>
+        </p:spPr>
+        <p:txBody>
+          <a:bodyPr wrap="square" lIns="0" tIns="0" rIns="0" bIns="0" rtlCol="0" anchor="t"/>
+          <a:lstStyle/>
+          <a:p>
             <a:pPr indent="0" marL="0">
               <a:buNone/>
             </a:pPr>
             <a:r>
               <a:rPr lang="en-US" sz="1200" dirty="0">
                 <a:solidFill>
-                  <a:schemeClr val="accent6"/>
-                </a:solidFill>
-              </a:rPr>
-              <a:t>  вместо BLoC, Provider</a:t>
-            </a:r>
-            <a:endParaRPr lang="en-US" sz="1600" dirty="0"/>
-          </a:p>
-        </p:txBody>
-      </p:sp>
-      <p:sp>
-        <p:nvSpPr>
-          <p:cNvPr id="17" name="Text 15"/>
-          <p:cNvSpPr txBox="1"/>
-          <p:nvPr/>
-        </p:nvSpPr>
-        <p:spPr>
-          <a:xfrm>
-            <a:off x="6263640" y="1828800"/>
-            <a:ext cx="5212080" cy="548640"/>
-          </a:xfrm>
-          <a:prstGeom prst="rect">
-            <a:avLst/>
-          </a:prstGeom>
-          <a:noFill/>
-          <a:ln/>
-        </p:spPr>
-        <p:txBody>
-          <a:bodyPr wrap="square" lIns="0" tIns="0" rIns="0" bIns="0" rtlCol="0" anchor="t"/>
-          <a:lstStyle/>
-          <a:p>
-            <a:pPr indent="0" marL="0">
-              <a:buNone/>
-            </a:pPr>
-            <a:r>
-              <a:rPr lang="en-US" sz="1300" dirty="0">
-                <a:solidFill>
                   <a:schemeClr val="tx1"/>
                 </a:solidFill>
               </a:rPr>
-              <a:t>Меньше шаблонного кода, чем BLoC; не зависит от BuildContext; зависимости подменяются в тестах</a:t>
-            </a:r>
-            <a:endParaRPr lang="en-US" sz="1300" dirty="0"/>
-          </a:p>
-        </p:txBody>
-      </p:sp>
-      <p:sp>
-        <p:nvSpPr>
-          <p:cNvPr id="18" name="Выбор Хранение"/>
+              <a:t>вместо BLoC и Provider: меньше кода, подмена в тестах</a:t>
+            </a:r>
+            <a:endParaRPr lang="en-US" sz="1200" dirty="0"/>
+          </a:p>
+        </p:txBody>
+      </p:sp>
+      <p:sp>
+        <p:nvSpPr>
+          <p:cNvPr id="31" name="Выбор Данные"/>
           <p:cNvSpPr/>
           <p:nvPr/>
         </p:nvSpPr>
         <p:spPr>
           <a:xfrm>
-            <a:off x="6035040" y="2560320"/>
-            <a:ext cx="5605272" cy="1051560"/>
+            <a:off x="3364992" y="4617720"/>
+            <a:ext cx="2633472" cy="1554480"/>
           </a:xfrm>
           <a:prstGeom prst="roundRect">
             <a:avLst>
-              <a:gd name="adj" fmla="val 10435"/>
+              <a:gd name="adj" fmla="val 7059"/>
             </a:avLst>
           </a:prstGeom>
           <a:solidFill>
             <a:schemeClr val="bg1"/>
           </a:solidFill>
-          <a:ln/>
-        </p:spPr>
-      </p:sp>
-      <p:sp>
-        <p:nvSpPr>
-          <p:cNvPr id="19" name="Рамка Хранение"/>
-          <p:cNvSpPr/>
-          <p:nvPr/>
-        </p:nvSpPr>
-        <p:spPr>
-          <a:xfrm>
-            <a:off x="6035040" y="2560320"/>
-            <a:ext cx="5605272" cy="1051560"/>
-          </a:xfrm>
-          <a:prstGeom prst="roundRect">
-            <a:avLst>
-              <a:gd name="adj" fmla="val 10435"/>
-            </a:avLst>
-          </a:prstGeom>
           <a:ln w="12700">
             <a:solidFill>
               <a:srgbClr val="D5DCEC"/>
@@ -12039,14 +13895,14 @@
       </p:sp>
       <p:sp>
         <p:nvSpPr>
-          <p:cNvPr id="20" name="Text 18"/>
+          <p:cNvPr id="32" name="Text 30"/>
           <p:cNvSpPr txBox="1"/>
           <p:nvPr/>
         </p:nvSpPr>
         <p:spPr>
           <a:xfrm>
-            <a:off x="6263640" y="2670048"/>
-            <a:ext cx="5212080" cy="320040"/>
+            <a:off x="3547872" y="4727448"/>
+            <a:ext cx="2286000" cy="274320"/>
           </a:xfrm>
           <a:prstGeom prst="rect">
             <a:avLst/>
@@ -12062,113 +13918,108 @@
               <a:buNone/>
             </a:pPr>
             <a:r>
-              <a:rPr lang="en-US" sz="1600" dirty="0">
+              <a:rPr lang="en-US" sz="1300" dirty="0">
                 <a:solidFill>
                   <a:schemeClr val="accent6"/>
                 </a:solidFill>
               </a:rPr>
-              <a:t>Хранение: </a:t>
-            </a:r>
+              <a:t>Данные</a:t>
+            </a:r>
+            <a:endParaRPr lang="en-US" sz="1300" dirty="0"/>
+          </a:p>
+        </p:txBody>
+      </p:sp>
+      <p:sp>
+        <p:nvSpPr>
+          <p:cNvPr id="33" name="Text 31"/>
+          <p:cNvSpPr txBox="1"/>
+          <p:nvPr/>
+        </p:nvSpPr>
+        <p:spPr>
+          <a:xfrm>
+            <a:off x="3547872" y="5001768"/>
+            <a:ext cx="2286000" cy="365760"/>
+          </a:xfrm>
+          <a:prstGeom prst="rect">
+            <a:avLst/>
+          </a:prstGeom>
+          <a:noFill/>
+          <a:ln/>
+        </p:spPr>
+        <p:txBody>
+          <a:bodyPr wrap="square" lIns="0" tIns="0" rIns="0" bIns="0" rtlCol="0" anchor="t"/>
+          <a:lstStyle/>
+          <a:p>
             <a:pPr indent="0" marL="0">
               <a:buNone/>
             </a:pPr>
             <a:r>
-              <a:rPr lang="en-US" sz="1600" b="1" dirty="0">
+              <a:rPr lang="en-US" sz="1700" b="1" dirty="0">
                 <a:solidFill>
                   <a:schemeClr val="accent1"/>
                 </a:solidFill>
               </a:rPr>
-              <a:t>drift (SQLite)</a:t>
-            </a:r>
+              <a:t>свой сервер API</a:t>
+            </a:r>
+            <a:endParaRPr lang="en-US" sz="1700" dirty="0"/>
+          </a:p>
+        </p:txBody>
+      </p:sp>
+      <p:sp>
+        <p:nvSpPr>
+          <p:cNvPr id="34" name="Text 32"/>
+          <p:cNvSpPr txBox="1"/>
+          <p:nvPr/>
+        </p:nvSpPr>
+        <p:spPr>
+          <a:xfrm>
+            <a:off x="3547872" y="5394960"/>
+            <a:ext cx="2331720" cy="731520"/>
+          </a:xfrm>
+          <a:prstGeom prst="rect">
+            <a:avLst/>
+          </a:prstGeom>
+          <a:noFill/>
+          <a:ln/>
+        </p:spPr>
+        <p:txBody>
+          <a:bodyPr wrap="square" lIns="0" tIns="0" rIns="0" bIns="0" rtlCol="0" anchor="t"/>
+          <a:lstStyle/>
+          <a:p>
             <a:pPr indent="0" marL="0">
               <a:buNone/>
             </a:pPr>
             <a:r>
               <a:rPr lang="en-US" sz="1200" dirty="0">
                 <a:solidFill>
-                  <a:schemeClr val="accent6"/>
-                </a:solidFill>
-              </a:rPr>
-              <a:t>  вместо Hive, Firebase</a:t>
-            </a:r>
-            <a:endParaRPr lang="en-US" sz="1600" dirty="0"/>
-          </a:p>
-        </p:txBody>
-      </p:sp>
-      <p:sp>
-        <p:nvSpPr>
-          <p:cNvPr id="21" name="Text 19"/>
-          <p:cNvSpPr txBox="1"/>
-          <p:nvPr/>
-        </p:nvSpPr>
-        <p:spPr>
-          <a:xfrm>
-            <a:off x="6263640" y="3017520"/>
-            <a:ext cx="5212080" cy="548640"/>
-          </a:xfrm>
-          <a:prstGeom prst="rect">
-            <a:avLst/>
-          </a:prstGeom>
-          <a:noFill/>
-          <a:ln/>
-        </p:spPr>
-        <p:txBody>
-          <a:bodyPr wrap="square" lIns="0" tIns="0" rIns="0" bIns="0" rtlCol="0" anchor="t"/>
-          <a:lstStyle/>
-          <a:p>
-            <a:pPr indent="0" marL="0">
-              <a:buNone/>
-            </a:pPr>
-            <a:r>
-              <a:rPr lang="en-US" sz="1300" dirty="0">
-                <a:solidFill>
                   <a:schemeClr val="tx1"/>
                 </a:solidFill>
               </a:rPr>
-              <a:t>Данные связаны: пользователь → планы → занятия. Нужны SQL-запросы и транзакции. Firebase требует облака</a:t>
-            </a:r>
-            <a:endParaRPr lang="en-US" sz="1300" dirty="0"/>
-          </a:p>
-        </p:txBody>
-      </p:sp>
-      <p:sp>
-        <p:nvSpPr>
-          <p:cNvPr id="22" name="Выбор Навигация"/>
+              <a:t>вместо Firebase: без облака и ключей, связи и SQL</a:t>
+            </a:r>
+            <a:endParaRPr lang="en-US" sz="1200" dirty="0"/>
+          </a:p>
+        </p:txBody>
+      </p:sp>
+      <p:sp>
+        <p:nvSpPr>
+          <p:cNvPr id="35" name="Выбор Навигация"/>
           <p:cNvSpPr/>
           <p:nvPr/>
         </p:nvSpPr>
         <p:spPr>
           <a:xfrm>
-            <a:off x="6035040" y="3749040"/>
-            <a:ext cx="5605272" cy="1051560"/>
+            <a:off x="6181344" y="4617720"/>
+            <a:ext cx="2633472" cy="1554480"/>
           </a:xfrm>
           <a:prstGeom prst="roundRect">
             <a:avLst>
-              <a:gd name="adj" fmla="val 10435"/>
+              <a:gd name="adj" fmla="val 7059"/>
             </a:avLst>
           </a:prstGeom>
           <a:solidFill>
             <a:schemeClr val="bg1"/>
           </a:solidFill>
-          <a:ln/>
-        </p:spPr>
-      </p:sp>
-      <p:sp>
-        <p:nvSpPr>
-          <p:cNvPr id="23" name="Рамка Навигация"/>
-          <p:cNvSpPr/>
-          <p:nvPr/>
-        </p:nvSpPr>
-        <p:spPr>
-          <a:xfrm>
-            <a:off x="6035040" y="3749040"/>
-            <a:ext cx="5605272" cy="1051560"/>
-          </a:xfrm>
-          <a:prstGeom prst="roundRect">
-            <a:avLst>
-              <a:gd name="adj" fmla="val 10435"/>
-            </a:avLst>
-          </a:prstGeom>
           <a:ln w="12700">
             <a:solidFill>
               <a:srgbClr val="D5DCEC"/>
@@ -12179,14 +14030,14 @@
       </p:sp>
       <p:sp>
         <p:nvSpPr>
-          <p:cNvPr id="24" name="Text 22"/>
+          <p:cNvPr id="36" name="Text 34"/>
           <p:cNvSpPr txBox="1"/>
           <p:nvPr/>
         </p:nvSpPr>
         <p:spPr>
           <a:xfrm>
-            <a:off x="6263640" y="3858768"/>
-            <a:ext cx="5212080" cy="320040"/>
+            <a:off x="6364224" y="4727448"/>
+            <a:ext cx="2286000" cy="274320"/>
           </a:xfrm>
           <a:prstGeom prst="rect">
             <a:avLst/>
@@ -12202,113 +14053,108 @@
               <a:buNone/>
             </a:pPr>
             <a:r>
-              <a:rPr lang="en-US" sz="1600" dirty="0">
+              <a:rPr lang="en-US" sz="1300" dirty="0">
                 <a:solidFill>
                   <a:schemeClr val="accent6"/>
                 </a:solidFill>
               </a:rPr>
-              <a:t>Навигация: </a:t>
-            </a:r>
+              <a:t>Навигация</a:t>
+            </a:r>
+            <a:endParaRPr lang="en-US" sz="1300" dirty="0"/>
+          </a:p>
+        </p:txBody>
+      </p:sp>
+      <p:sp>
+        <p:nvSpPr>
+          <p:cNvPr id="37" name="Text 35"/>
+          <p:cNvSpPr txBox="1"/>
+          <p:nvPr/>
+        </p:nvSpPr>
+        <p:spPr>
+          <a:xfrm>
+            <a:off x="6364224" y="5001768"/>
+            <a:ext cx="2286000" cy="365760"/>
+          </a:xfrm>
+          <a:prstGeom prst="rect">
+            <a:avLst/>
+          </a:prstGeom>
+          <a:noFill/>
+          <a:ln/>
+        </p:spPr>
+        <p:txBody>
+          <a:bodyPr wrap="square" lIns="0" tIns="0" rIns="0" bIns="0" rtlCol="0" anchor="t"/>
+          <a:lstStyle/>
+          <a:p>
             <a:pPr indent="0" marL="0">
               <a:buNone/>
             </a:pPr>
             <a:r>
-              <a:rPr lang="en-US" sz="1600" b="1" dirty="0">
+              <a:rPr lang="en-US" sz="1700" b="1" dirty="0">
                 <a:solidFill>
                   <a:schemeClr val="accent1"/>
                 </a:solidFill>
               </a:rPr>
               <a:t>go_router</a:t>
             </a:r>
+            <a:endParaRPr lang="en-US" sz="1700" dirty="0"/>
+          </a:p>
+        </p:txBody>
+      </p:sp>
+      <p:sp>
+        <p:nvSpPr>
+          <p:cNvPr id="38" name="Text 36"/>
+          <p:cNvSpPr txBox="1"/>
+          <p:nvPr/>
+        </p:nvSpPr>
+        <p:spPr>
+          <a:xfrm>
+            <a:off x="6364224" y="5394960"/>
+            <a:ext cx="2331720" cy="731520"/>
+          </a:xfrm>
+          <a:prstGeom prst="rect">
+            <a:avLst/>
+          </a:prstGeom>
+          <a:noFill/>
+          <a:ln/>
+        </p:spPr>
+        <p:txBody>
+          <a:bodyPr wrap="square" lIns="0" tIns="0" rIns="0" bIns="0" rtlCol="0" anchor="t"/>
+          <a:lstStyle/>
+          <a:p>
             <a:pPr indent="0" marL="0">
               <a:buNone/>
             </a:pPr>
             <a:r>
               <a:rPr lang="en-US" sz="1200" dirty="0">
                 <a:solidFill>
-                  <a:schemeClr val="accent6"/>
-                </a:solidFill>
-              </a:rPr>
-              <a:t>  вместо Navigator 1.0</a:t>
-            </a:r>
-            <a:endParaRPr lang="en-US" sz="1600" dirty="0"/>
-          </a:p>
-        </p:txBody>
-      </p:sp>
-      <p:sp>
-        <p:nvSpPr>
-          <p:cNvPr id="25" name="Text 23"/>
-          <p:cNvSpPr txBox="1"/>
-          <p:nvPr/>
-        </p:nvSpPr>
-        <p:spPr>
-          <a:xfrm>
-            <a:off x="6263640" y="4206240"/>
-            <a:ext cx="5212080" cy="548640"/>
-          </a:xfrm>
-          <a:prstGeom prst="rect">
-            <a:avLst/>
-          </a:prstGeom>
-          <a:noFill/>
-          <a:ln/>
-        </p:spPr>
-        <p:txBody>
-          <a:bodyPr wrap="square" lIns="0" tIns="0" rIns="0" bIns="0" rtlCol="0" anchor="t"/>
-          <a:lstStyle/>
-          <a:p>
-            <a:pPr indent="0" marL="0">
-              <a:buNone/>
-            </a:pPr>
-            <a:r>
-              <a:rPr lang="en-US" sz="1300" dirty="0">
-                <a:solidFill>
                   <a:schemeClr val="tx1"/>
                 </a:solidFill>
               </a:rPr>
-              <a:t>Декларативные маршруты, redirect закрывает экраны без входа</a:t>
-            </a:r>
-            <a:endParaRPr lang="en-US" sz="1300" dirty="0"/>
-          </a:p>
-        </p:txBody>
-      </p:sp>
-      <p:sp>
-        <p:nvSpPr>
-          <p:cNvPr id="26" name="Выбор Пароли"/>
+              <a:t>redirect закрывает экраны без входа</a:t>
+            </a:r>
+            <a:endParaRPr lang="en-US" sz="1200" dirty="0"/>
+          </a:p>
+        </p:txBody>
+      </p:sp>
+      <p:sp>
+        <p:nvSpPr>
+          <p:cNvPr id="39" name="Выбор Вход"/>
           <p:cNvSpPr/>
           <p:nvPr/>
         </p:nvSpPr>
         <p:spPr>
           <a:xfrm>
-            <a:off x="6035040" y="4937760"/>
-            <a:ext cx="5605272" cy="1051560"/>
+            <a:off x="8997696" y="4617720"/>
+            <a:ext cx="2633472" cy="1554480"/>
           </a:xfrm>
           <a:prstGeom prst="roundRect">
             <a:avLst>
-              <a:gd name="adj" fmla="val 10435"/>
+              <a:gd name="adj" fmla="val 7059"/>
             </a:avLst>
           </a:prstGeom>
           <a:solidFill>
             <a:schemeClr val="bg1"/>
           </a:solidFill>
-          <a:ln/>
-        </p:spPr>
-      </p:sp>
-      <p:sp>
-        <p:nvSpPr>
-          <p:cNvPr id="27" name="Рамка Пароли"/>
-          <p:cNvSpPr/>
-          <p:nvPr/>
-        </p:nvSpPr>
-        <p:spPr>
-          <a:xfrm>
-            <a:off x="6035040" y="4937760"/>
-            <a:ext cx="5605272" cy="1051560"/>
-          </a:xfrm>
-          <a:prstGeom prst="roundRect">
-            <a:avLst>
-              <a:gd name="adj" fmla="val 10435"/>
-            </a:avLst>
-          </a:prstGeom>
           <a:ln w="12700">
             <a:solidFill>
               <a:srgbClr val="D5DCEC"/>
@@ -12319,14 +14165,14 @@
       </p:sp>
       <p:sp>
         <p:nvSpPr>
-          <p:cNvPr id="28" name="Text 26"/>
+          <p:cNvPr id="40" name="Text 38"/>
           <p:cNvSpPr txBox="1"/>
           <p:nvPr/>
         </p:nvSpPr>
         <p:spPr>
           <a:xfrm>
-            <a:off x="6263640" y="5047488"/>
-            <a:ext cx="5212080" cy="320040"/>
+            <a:off x="9180576" y="4727448"/>
+            <a:ext cx="2286000" cy="274320"/>
           </a:xfrm>
           <a:prstGeom prst="rect">
             <a:avLst/>
@@ -12342,72 +14188,86 @@
               <a:buNone/>
             </a:pPr>
             <a:r>
-              <a:rPr lang="en-US" sz="1600" dirty="0">
+              <a:rPr lang="en-US" sz="1300" dirty="0">
                 <a:solidFill>
                   <a:schemeClr val="accent6"/>
                 </a:solidFill>
               </a:rPr>
-              <a:t>Пароли: </a:t>
-            </a:r>
+              <a:t>Вход</a:t>
+            </a:r>
+            <a:endParaRPr lang="en-US" sz="1300" dirty="0"/>
+          </a:p>
+        </p:txBody>
+      </p:sp>
+      <p:sp>
+        <p:nvSpPr>
+          <p:cNvPr id="41" name="Text 39"/>
+          <p:cNvSpPr txBox="1"/>
+          <p:nvPr/>
+        </p:nvSpPr>
+        <p:spPr>
+          <a:xfrm>
+            <a:off x="9180576" y="5001768"/>
+            <a:ext cx="2286000" cy="365760"/>
+          </a:xfrm>
+          <a:prstGeom prst="rect">
+            <a:avLst/>
+          </a:prstGeom>
+          <a:noFill/>
+          <a:ln/>
+        </p:spPr>
+        <p:txBody>
+          <a:bodyPr wrap="square" lIns="0" tIns="0" rIns="0" bIns="0" rtlCol="0" anchor="t"/>
+          <a:lstStyle/>
+          <a:p>
             <a:pPr indent="0" marL="0">
               <a:buNone/>
             </a:pPr>
             <a:r>
-              <a:rPr lang="en-US" sz="1600" b="1" dirty="0">
+              <a:rPr lang="en-US" sz="1700" b="1" dirty="0">
                 <a:solidFill>
                   <a:schemeClr val="accent1"/>
                 </a:solidFill>
               </a:rPr>
-              <a:t>PBKDF2 локально</a:t>
-            </a:r>
+              <a:t>PBKDF2 + токен</a:t>
+            </a:r>
+            <a:endParaRPr lang="en-US" sz="1700" dirty="0"/>
+          </a:p>
+        </p:txBody>
+      </p:sp>
+      <p:sp>
+        <p:nvSpPr>
+          <p:cNvPr id="42" name="Text 40"/>
+          <p:cNvSpPr txBox="1"/>
+          <p:nvPr/>
+        </p:nvSpPr>
+        <p:spPr>
+          <a:xfrm>
+            <a:off x="9180576" y="5394960"/>
+            <a:ext cx="2331720" cy="731520"/>
+          </a:xfrm>
+          <a:prstGeom prst="rect">
+            <a:avLst/>
+          </a:prstGeom>
+          <a:noFill/>
+          <a:ln/>
+        </p:spPr>
+        <p:txBody>
+          <a:bodyPr wrap="square" lIns="0" tIns="0" rIns="0" bIns="0" rtlCol="0" anchor="t"/>
+          <a:lstStyle/>
+          <a:p>
             <a:pPr indent="0" marL="0">
               <a:buNone/>
             </a:pPr>
             <a:r>
               <a:rPr lang="en-US" sz="1200" dirty="0">
                 <a:solidFill>
-                  <a:schemeClr val="accent6"/>
-                </a:solidFill>
-              </a:rPr>
-              <a:t>  вместо Firebase Auth</a:t>
-            </a:r>
-            <a:endParaRPr lang="en-US" sz="1600" dirty="0"/>
-          </a:p>
-        </p:txBody>
-      </p:sp>
-      <p:sp>
-        <p:nvSpPr>
-          <p:cNvPr id="29" name="Text 27"/>
-          <p:cNvSpPr txBox="1"/>
-          <p:nvPr/>
-        </p:nvSpPr>
-        <p:spPr>
-          <a:xfrm>
-            <a:off x="6263640" y="5394960"/>
-            <a:ext cx="5212080" cy="548640"/>
-          </a:xfrm>
-          <a:prstGeom prst="rect">
-            <a:avLst/>
-          </a:prstGeom>
-          <a:noFill/>
-          <a:ln/>
-        </p:spPr>
-        <p:txBody>
-          <a:bodyPr wrap="square" lIns="0" tIns="0" rIns="0" bIns="0" rtlCol="0" anchor="t"/>
-          <a:lstStyle/>
-          <a:p>
-            <a:pPr indent="0" marL="0">
-              <a:buNone/>
-            </a:pPr>
-            <a:r>
-              <a:rPr lang="en-US" sz="1300" dirty="0">
-                <a:solidFill>
                   <a:schemeClr val="tx1"/>
                 </a:solidFill>
               </a:rPr>
-              <a:t>Вход работает офлайн, пароль хранится только как хэш с солью</a:t>
-            </a:r>
-            <a:endParaRPr lang="en-US" sz="1300" dirty="0"/>
+              <a:t>вместо Firebase Auth: пароль только хэшем</a:t>
+            </a:r>
+            <a:endParaRPr lang="en-US" sz="1200" dirty="0"/>
           </a:p>
         </p:txBody>
       </p:sp>
